--- a/fixtures/real-world/oecd-economic-outlook-2017-fr.pptx
+++ b/fixtures/real-world/oecd-economic-outlook-2017-fr.pptx
@@ -2767,19 +2767,19 @@
             <a:rPr lang="en-GB" dirty="0" smtClean="0">
               <a:latin typeface="Calibri" panose="020F0502020204030204" pitchFamily="34" charset="0"/>
             </a:rPr>
-            <a:t>Global growth expected to pick-up modestly </a:t>
+            <a:t>FR: Global growth expected to pick-up modestly </a:t>
           </a:r>
           <a:r>
             <a:rPr lang="en-GB" smtClean="0">
               <a:latin typeface="Calibri" panose="020F0502020204030204" pitchFamily="34" charset="0"/>
             </a:rPr>
-            <a:t>with upside </a:t>
+            <a:t>FR: with upside </a:t>
           </a:r>
           <a:r>
             <a:rPr lang="en-GB" dirty="0" smtClean="0">
               <a:latin typeface="Calibri" panose="020F0502020204030204" pitchFamily="34" charset="0"/>
             </a:rPr>
-            <a:t>risks</a:t>
+            <a:t>FR: risks</a:t>
           </a:r>
         </a:p>
       </dgm:t>
@@ -2821,7 +2821,7 @@
             <a:rPr lang="en-GB" dirty="0" smtClean="0">
               <a:latin typeface="Calibri" panose="020F0502020204030204" pitchFamily="34" charset="0"/>
             </a:rPr>
-            <a:t>More needs to be done to share the gains from structural trends and trade</a:t>
+            <a:t>FR: More needs to be done to share the gains from structural trends and trade</a:t>
           </a:r>
         </a:p>
       </dgm:t>
@@ -2863,7 +2863,7 @@
             <a:rPr lang="en-GB" dirty="0" smtClean="0">
               <a:latin typeface="Calibri" panose="020F0502020204030204" pitchFamily="34" charset="0"/>
             </a:rPr>
-            <a:t>An integrated policy approach is needed to make globalisation work for all</a:t>
+            <a:t>FR: An integrated policy approach is needed to make globalisation work for all</a:t>
           </a:r>
         </a:p>
       </dgm:t>
@@ -2910,7 +2910,7 @@
               </a:solidFill>
               <a:latin typeface="Calibri" panose="020F0502020204030204" pitchFamily="34" charset="0"/>
             </a:rPr>
-            <a:t>Changes to technology, consumer preferences and trade are occurring simultaneously</a:t>
+            <a:t>FR: Changes to technology, consumer preferences and trade are occurring simultaneously</a:t>
           </a:r>
         </a:p>
       </dgm:t>
@@ -2958,7 +2958,7 @@
               </a:solidFill>
               <a:latin typeface="Calibri" panose="020F0502020204030204" pitchFamily="34" charset="0"/>
             </a:rPr>
-            <a:t>A more level playing field for the international system</a:t>
+            <a:t>FR: A more level playing field for the international system</a:t>
           </a:r>
         </a:p>
       </dgm:t>
@@ -3005,7 +3005,7 @@
               </a:solidFill>
               <a:latin typeface="Calibri" panose="020F0502020204030204" pitchFamily="34" charset="0"/>
             </a:rPr>
-            <a:t>Confidence is increasing and investment and trade are picking up from low levels</a:t>
+            <a:t>FR: Confidence is increasing and investment and trade are picking up from low levels</a:t>
           </a:r>
         </a:p>
       </dgm:t>
@@ -3052,7 +3052,7 @@
               </a:solidFill>
               <a:latin typeface="Calibri" panose="020F0502020204030204" pitchFamily="34" charset="0"/>
             </a:rPr>
-            <a:t>Signs of rising demand for high-tech goods and investment to upgrade capital</a:t>
+            <a:t>FR: Signs of rising demand for high-tech goods and investment to upgrade capital</a:t>
           </a:r>
         </a:p>
       </dgm:t>
@@ -3100,7 +3100,7 @@
               </a:solidFill>
               <a:latin typeface="Calibri" panose="020F0502020204030204" pitchFamily="34" charset="0"/>
             </a:rPr>
-            <a:t>Domestic reforms to boost competition, job creation, skills and innovation</a:t>
+            <a:t>FR: Domestic reforms to boost competition, job creation, skills and innovation</a:t>
           </a:r>
         </a:p>
       </dgm:t>
@@ -3142,7 +3142,7 @@
             <a:rPr lang="en-GB" dirty="0" smtClean="0">
               <a:latin typeface="Calibri" panose="020F0502020204030204" pitchFamily="34" charset="0"/>
             </a:rPr>
-            <a:t>Productivity and wage growth remain subdued; financial stability risks persist</a:t>
+            <a:t>FR: Productivity and wage growth remain subdued; financial stability risks persist</a:t>
           </a:r>
         </a:p>
       </dgm:t>
@@ -3189,7 +3189,7 @@
               </a:solidFill>
               <a:latin typeface="Calibri" panose="020F0502020204030204" pitchFamily="34" charset="0"/>
             </a:rPr>
-            <a:t>Job losses from shifts in activity are concentrated in manufacturing and specific regions</a:t>
+            <a:t>FR: Job losses from shifts in activity are concentrated in manufacturing and specific regions</a:t>
           </a:r>
         </a:p>
       </dgm:t>
@@ -3236,7 +3236,7 @@
               </a:solidFill>
               <a:latin typeface="Calibri" panose="020F0502020204030204" pitchFamily="34" charset="0"/>
             </a:rPr>
-            <a:t>Growth is broad based; recovery in commodity producers helps the modest global upturn</a:t>
+            <a:t>FR: Growth is broad based; recovery in commodity producers helps the modest global upturn</a:t>
           </a:r>
           <a:endParaRPr lang="en-GB" dirty="0" smtClean="0">
             <a:solidFill>
@@ -3291,7 +3291,7 @@
               </a:solidFill>
               <a:latin typeface="Calibri" panose="020F0502020204030204" pitchFamily="34" charset="0"/>
             </a:rPr>
-            <a:t>Headline employment indicators are improving but labour markets have not recovered</a:t>
+            <a:t>FR: Headline employment indicators are improving but labour markets have not recovered</a:t>
           </a:r>
         </a:p>
       </dgm:t>
@@ -3338,7 +3338,7 @@
               </a:solidFill>
               <a:latin typeface="Calibri" panose="020F0502020204030204" pitchFamily="34" charset="0"/>
             </a:rPr>
-            <a:t>Financial risks from high and rising credit growth, house price increases, interest rate gaps</a:t>
+            <a:t>FR: Financial risks from high and rising credit growth, house price increases, interest rate gaps</a:t>
           </a:r>
           <a:endParaRPr lang="en-GB" dirty="0" smtClean="0">
             <a:solidFill>
@@ -3394,7 +3394,7 @@
               </a:solidFill>
               <a:latin typeface="Calibri" panose="020F0502020204030204" pitchFamily="34" charset="0"/>
             </a:rPr>
-            <a:t>Targeted policies to help people who are left behind seize new opportunities</a:t>
+            <a:t>FR: Targeted policies to help people who are left behind seize new opportunities</a:t>
           </a:r>
         </a:p>
       </dgm:t>
@@ -3636,7 +3636,7 @@
             <a:rPr lang="en-GB" sz="2000" dirty="0" smtClean="0">
               <a:latin typeface="Calibri" panose="020F0502020204030204" pitchFamily="34" charset="0"/>
             </a:rPr>
-            <a:t>Actions to improve the international environment:</a:t>
+            <a:t>FR: Actions to improve the international environment:</a:t>
           </a:r>
         </a:p>
       </dgm:t>
@@ -3683,7 +3683,7 @@
               </a:solidFill>
               <a:latin typeface="Calibri" panose="020F0502020204030204" pitchFamily="34" charset="0"/>
             </a:rPr>
-            <a:t>Preserve institutions and standards, such as for labour and environmental protection</a:t>
+            <a:t>FR: Preserve institutions and standards, such as for labour and environmental protection</a:t>
           </a:r>
         </a:p>
       </dgm:t>
@@ -3730,7 +3730,7 @@
               </a:solidFill>
               <a:latin typeface="Calibri" panose="020F0502020204030204" pitchFamily="34" charset="0"/>
             </a:rPr>
-            <a:t>Pursue open markets for cross-border trade and investment</a:t>
+            <a:t>FR: Pursue open markets for cross-border trade and investment</a:t>
           </a:r>
         </a:p>
       </dgm:t>
@@ -3777,7 +3777,7 @@
               </a:solidFill>
               <a:latin typeface="Calibri" panose="020F0502020204030204" pitchFamily="34" charset="0"/>
             </a:rPr>
-            <a:t>Promote multilateral cooperation, e.g. on tax base erosion and profit shifting and competition policy</a:t>
+            <a:t>FR: Promote multilateral cooperation, e.g. on tax base erosion and profit shifting and competition policy</a:t>
           </a:r>
         </a:p>
       </dgm:t>
@@ -3824,7 +3824,7 @@
               </a:solidFill>
               <a:latin typeface="Calibri" panose="020F0502020204030204" pitchFamily="34" charset="0"/>
             </a:rPr>
-            <a:t>Combat corruption, illicit trade and counterfeiting</a:t>
+            <a:t>FR: Combat corruption, illicit trade and counterfeiting</a:t>
           </a:r>
         </a:p>
       </dgm:t>
@@ -4079,7 +4079,7 @@
             <a:rPr lang="en-GB" sz="1600" b="1" dirty="0" smtClean="0">
               <a:latin typeface="Calibri" panose="020F0502020204030204" pitchFamily="34" charset="0"/>
             </a:rPr>
-            <a:t>Make the international system fairer and work better</a:t>
+            <a:t>FR: Make the international system fairer and work better</a:t>
           </a:r>
           <a:endParaRPr lang="en-GB" sz="1600" b="1" dirty="0">
             <a:latin typeface="Calibri" panose="020F0502020204030204" pitchFamily="34" charset="0"/>
@@ -4127,7 +4127,7 @@
               </a:solidFill>
               <a:latin typeface="Calibri" panose="020F0502020204030204" pitchFamily="34" charset="0"/>
             </a:rPr>
-            <a:t>Policies to encourage new firms, innovation &amp; job creation</a:t>
+            <a:t>FR: Policies to encourage new firms, innovation  job creation</a:t>
           </a:r>
           <a:endParaRPr lang="en-GB" sz="1600" b="1" dirty="0">
             <a:solidFill>
@@ -4175,13 +4175,13 @@
             <a:rPr lang="en-GB" sz="1600" b="1" dirty="0" smtClean="0">
               <a:latin typeface="Calibri" panose="020F0502020204030204" pitchFamily="34" charset="0"/>
             </a:rPr>
-            <a:t>Targeted policies to help people seize new </a:t>
+            <a:t>FR: Targeted policies to help people seize new </a:t>
           </a:r>
           <a:r>
             <a:rPr lang="en-GB" sz="1550" b="1" dirty="0" smtClean="0">
               <a:latin typeface="Calibri" panose="020F0502020204030204" pitchFamily="34" charset="0"/>
             </a:rPr>
-            <a:t>opportunities</a:t>
+            <a:t>FR: opportunities</a:t>
           </a:r>
           <a:endParaRPr lang="en-GB" sz="1550" b="1" dirty="0">
             <a:latin typeface="Calibri" panose="020F0502020204030204" pitchFamily="34" charset="0"/>

--- a/fixtures/real-world/oecd-economic-outlook-2017-fr.pptx
+++ b/fixtures/real-world/oecd-economic-outlook-2017-fr.pptx
@@ -2767,19 +2767,19 @@
             <a:rPr lang="en-GB" dirty="0" smtClean="0">
               <a:latin typeface="Calibri" panose="020F0502020204030204" pitchFamily="34" charset="0"/>
             </a:rPr>
-            <a:t>FR: Global growth expected to pick-up modestly </a:t>
+            <a:t>La croissance mondiale devrait se redresser modérément </a:t>
           </a:r>
           <a:r>
             <a:rPr lang="en-GB" smtClean="0">
               <a:latin typeface="Calibri" panose="020F0502020204030204" pitchFamily="34" charset="0"/>
             </a:rPr>
-            <a:t>FR: with upside </a:t>
+            <a:t>avec des risques </a:t>
           </a:r>
           <a:r>
             <a:rPr lang="en-GB" dirty="0" smtClean="0">
               <a:latin typeface="Calibri" panose="020F0502020204030204" pitchFamily="34" charset="0"/>
             </a:rPr>
-            <a:t>FR: risks</a:t>
+            <a:t>haussiers</a:t>
           </a:r>
         </a:p>
       </dgm:t>
@@ -2821,7 +2821,7 @@
             <a:rPr lang="en-GB" dirty="0" smtClean="0">
               <a:latin typeface="Calibri" panose="020F0502020204030204" pitchFamily="34" charset="0"/>
             </a:rPr>
-            <a:t>FR: More needs to be done to share the gains from structural trends and trade</a:t>
+            <a:t>Davantage d'efforts sont nécessaires pour mieux partager les gains des tendances structurelles et du commerce</a:t>
           </a:r>
         </a:p>
       </dgm:t>
@@ -2863,7 +2863,7 @@
             <a:rPr lang="en-GB" dirty="0" smtClean="0">
               <a:latin typeface="Calibri" panose="020F0502020204030204" pitchFamily="34" charset="0"/>
             </a:rPr>
-            <a:t>FR: An integrated policy approach is needed to make globalisation work for all</a:t>
+            <a:t>Une approche intégrée des politiques est nécessaire pour que la mondialisation profite à tous</a:t>
           </a:r>
         </a:p>
       </dgm:t>
@@ -2910,7 +2910,7 @@
               </a:solidFill>
               <a:latin typeface="Calibri" panose="020F0502020204030204" pitchFamily="34" charset="0"/>
             </a:rPr>
-            <a:t>FR: Changes to technology, consumer preferences and trade are occurring simultaneously</a:t>
+            <a:t>Les évolutions de la technologie, des préférences des consommateurs et du commerce surviennent simultanément</a:t>
           </a:r>
         </a:p>
       </dgm:t>
@@ -2958,7 +2958,7 @@
               </a:solidFill>
               <a:latin typeface="Calibri" panose="020F0502020204030204" pitchFamily="34" charset="0"/>
             </a:rPr>
-            <a:t>FR: A more level playing field for the international system</a:t>
+            <a:t>Des conditions de concurrence plus équitables pour le système international</a:t>
           </a:r>
         </a:p>
       </dgm:t>
@@ -3005,7 +3005,7 @@
               </a:solidFill>
               <a:latin typeface="Calibri" panose="020F0502020204030204" pitchFamily="34" charset="0"/>
             </a:rPr>
-            <a:t>FR: Confidence is increasing and investment and trade are picking up from low levels</a:t>
+            <a:t>La confiance s'améliore et l'investissement et le commerce repartent à partir de niveaux faibles</a:t>
           </a:r>
         </a:p>
       </dgm:t>
@@ -3052,7 +3052,7 @@
               </a:solidFill>
               <a:latin typeface="Calibri" panose="020F0502020204030204" pitchFamily="34" charset="0"/>
             </a:rPr>
-            <a:t>FR: Signs of rising demand for high-tech goods and investment to upgrade capital</a:t>
+            <a:t>Signes d'une demande accrue de biens de haute technologie et d'investissements pour moderniser le capital</a:t>
           </a:r>
         </a:p>
       </dgm:t>
@@ -3100,7 +3100,7 @@
               </a:solidFill>
               <a:latin typeface="Calibri" panose="020F0502020204030204" pitchFamily="34" charset="0"/>
             </a:rPr>
-            <a:t>FR: Domestic reforms to boost competition, job creation, skills and innovation</a:t>
+            <a:t>Réformes intérieures pour stimuler la concurrence, la création d'emplois, les compétences et l'innovation</a:t>
           </a:r>
         </a:p>
       </dgm:t>
@@ -3142,7 +3142,7 @@
             <a:rPr lang="en-GB" dirty="0" smtClean="0">
               <a:latin typeface="Calibri" panose="020F0502020204030204" pitchFamily="34" charset="0"/>
             </a:rPr>
-            <a:t>FR: Productivity and wage growth remain subdued; financial stability risks persist</a:t>
+            <a:t>La croissance de la productivité et des salaires reste modérée ; les risques pour la stabilité financière persistent</a:t>
           </a:r>
         </a:p>
       </dgm:t>
@@ -3189,7 +3189,7 @@
               </a:solidFill>
               <a:latin typeface="Calibri" panose="020F0502020204030204" pitchFamily="34" charset="0"/>
             </a:rPr>
-            <a:t>FR: Job losses from shifts in activity are concentrated in manufacturing and specific regions</a:t>
+            <a:t>Les pertes d'emplois dues aux réorientations de l'activité se concentrent dans l'industrie manufacturière et certaines régions</a:t>
           </a:r>
         </a:p>
       </dgm:t>
@@ -3236,7 +3236,7 @@
               </a:solidFill>
               <a:latin typeface="Calibri" panose="020F0502020204030204" pitchFamily="34" charset="0"/>
             </a:rPr>
-            <a:t>FR: Growth is broad based; recovery in commodity producers helps the modest global upturn</a:t>
+            <a:t>La croissance est généralisée ; la reprise chez les producteurs de matières premières soutient la modeste embellie mondiale</a:t>
           </a:r>
           <a:endParaRPr lang="en-GB" dirty="0" smtClean="0">
             <a:solidFill>
@@ -3291,7 +3291,7 @@
               </a:solidFill>
               <a:latin typeface="Calibri" panose="020F0502020204030204" pitchFamily="34" charset="0"/>
             </a:rPr>
-            <a:t>FR: Headline employment indicators are improving but labour markets have not recovered</a:t>
+            <a:t>Les principaux indicateurs de l'emploi s'améliorent, mais les marchés du travail ne se sont pas redressés</a:t>
           </a:r>
         </a:p>
       </dgm:t>
@@ -3338,7 +3338,7 @@
               </a:solidFill>
               <a:latin typeface="Calibri" panose="020F0502020204030204" pitchFamily="34" charset="0"/>
             </a:rPr>
-            <a:t>FR: Financial risks from high and rising credit growth, house price increases, interest rate gaps</a:t>
+            <a:t>Risques financiers liés à une croissance du crédit élevée et en hausse, à la hausse des prix de l'immobilier et aux écarts de taux d'intérêt</a:t>
           </a:r>
           <a:endParaRPr lang="en-GB" dirty="0" smtClean="0">
             <a:solidFill>
@@ -3394,7 +3394,7 @@
               </a:solidFill>
               <a:latin typeface="Calibri" panose="020F0502020204030204" pitchFamily="34" charset="0"/>
             </a:rPr>
-            <a:t>FR: Targeted policies to help people who are left behind seize new opportunities</a:t>
+            <a:t>Des politiques ciblées pour aider les personnes laissées de côté à saisir de nouvelles opportunités</a:t>
           </a:r>
         </a:p>
       </dgm:t>
@@ -3636,7 +3636,7 @@
             <a:rPr lang="en-GB" sz="2000" dirty="0" smtClean="0">
               <a:latin typeface="Calibri" panose="020F0502020204030204" pitchFamily="34" charset="0"/>
             </a:rPr>
-            <a:t>FR: Actions to improve the international environment:</a:t>
+            <a:t>Mesures pour améliorer l'environnement international :</a:t>
           </a:r>
         </a:p>
       </dgm:t>
@@ -3683,7 +3683,7 @@
               </a:solidFill>
               <a:latin typeface="Calibri" panose="020F0502020204030204" pitchFamily="34" charset="0"/>
             </a:rPr>
-            <a:t>FR: Preserve institutions and standards, such as for labour and environmental protection</a:t>
+            <a:t>Préserver les institutions et les normes, notamment en matière de protection du travail et de l'environnement</a:t>
           </a:r>
         </a:p>
       </dgm:t>
@@ -3730,7 +3730,7 @@
               </a:solidFill>
               <a:latin typeface="Calibri" panose="020F0502020204030204" pitchFamily="34" charset="0"/>
             </a:rPr>
-            <a:t>FR: Pursue open markets for cross-border trade and investment</a:t>
+            <a:t>Promouvoir l'ouverture des marchés au commerce et à l'investissement transfrontaliers</a:t>
           </a:r>
         </a:p>
       </dgm:t>
@@ -3777,7 +3777,7 @@
               </a:solidFill>
               <a:latin typeface="Calibri" panose="020F0502020204030204" pitchFamily="34" charset="0"/>
             </a:rPr>
-            <a:t>FR: Promote multilateral cooperation, e.g. on tax base erosion and profit shifting and competition policy</a:t>
+            <a:t>Favoriser la coopération multilatérale, p. ex. sur l'érosion de la base d'imposition et le transfert de bénéfices et la politique de concurrence</a:t>
           </a:r>
         </a:p>
       </dgm:t>
@@ -3824,7 +3824,7 @@
               </a:solidFill>
               <a:latin typeface="Calibri" panose="020F0502020204030204" pitchFamily="34" charset="0"/>
             </a:rPr>
-            <a:t>FR: Combat corruption, illicit trade and counterfeiting</a:t>
+            <a:t>Lutter contre la corruption, le commerce illicite et la contrefaçon</a:t>
           </a:r>
         </a:p>
       </dgm:t>
@@ -4079,7 +4079,7 @@
             <a:rPr lang="en-GB" sz="1600" b="1" dirty="0" smtClean="0">
               <a:latin typeface="Calibri" panose="020F0502020204030204" pitchFamily="34" charset="0"/>
             </a:rPr>
-            <a:t>FR: Make the international system fairer and work better</a:t>
+            <a:t>Rendre le système international plus équitable et plus efficace</a:t>
           </a:r>
           <a:endParaRPr lang="en-GB" sz="1600" b="1" dirty="0">
             <a:latin typeface="Calibri" panose="020F0502020204030204" pitchFamily="34" charset="0"/>
@@ -4127,7 +4127,7 @@
               </a:solidFill>
               <a:latin typeface="Calibri" panose="020F0502020204030204" pitchFamily="34" charset="0"/>
             </a:rPr>
-            <a:t>FR: Policies to encourage new firms, innovation  job creation</a:t>
+            <a:t>Politiques pour encourager les nouvelles entreprises, l'innovation et la création d'emplois</a:t>
           </a:r>
           <a:endParaRPr lang="en-GB" sz="1600" b="1" dirty="0">
             <a:solidFill>
@@ -4175,13 +4175,13 @@
             <a:rPr lang="en-GB" sz="1600" b="1" dirty="0" smtClean="0">
               <a:latin typeface="Calibri" panose="020F0502020204030204" pitchFamily="34" charset="0"/>
             </a:rPr>
-            <a:t>FR: Targeted policies to help people seize new </a:t>
+            <a:t>Des politiques ciblées pour aider les personnes à saisir de nouvelles </a:t>
           </a:r>
           <a:r>
             <a:rPr lang="en-GB" sz="1550" b="1" dirty="0" smtClean="0">
               <a:latin typeface="Calibri" panose="020F0502020204030204" pitchFamily="34" charset="0"/>
             </a:rPr>
-            <a:t>FR: opportunities</a:t>
+            <a:t>opportunités</a:t>
           </a:r>
           <a:endParaRPr lang="en-GB" sz="1550" b="1" dirty="0">
             <a:latin typeface="Calibri" panose="020F0502020204030204" pitchFamily="34" charset="0"/>
@@ -4433,19 +4433,19 @@
             <a:rPr lang="en-GB" sz="2000" kern="1200" dirty="0" smtClean="0">
               <a:latin typeface="Calibri" panose="020F0502020204030204" pitchFamily="34" charset="0"/>
             </a:rPr>
-            <a:t>Global growth expected to pick-up modestly </a:t>
+            <a:t>La croissance mondiale devrait se redresser modérément </a:t>
           </a:r>
           <a:r>
             <a:rPr lang="en-GB" sz="2000" kern="1200" smtClean="0">
               <a:latin typeface="Calibri" panose="020F0502020204030204" pitchFamily="34" charset="0"/>
             </a:rPr>
-            <a:t>with upside </a:t>
+            <a:t>avec des risques </a:t>
           </a:r>
           <a:r>
             <a:rPr lang="en-GB" sz="2000" kern="1200" dirty="0" smtClean="0">
               <a:latin typeface="Calibri" panose="020F0502020204030204" pitchFamily="34" charset="0"/>
             </a:rPr>
-            <a:t>risks</a:t>
+            <a:t>haussiers</a:t>
           </a:r>
         </a:p>
       </dsp:txBody>
@@ -4512,7 +4512,7 @@
               </a:solidFill>
               <a:latin typeface="Calibri" panose="020F0502020204030204" pitchFamily="34" charset="0"/>
             </a:rPr>
-            <a:t>Confidence is increasing and investment and trade are picking up from low levels</a:t>
+            <a:t>Davantage d'efforts sont nécessaires pour mieux partager les gains des tendances structurelles et du commerce</a:t>
           </a:r>
         </a:p>
         <a:p>
@@ -4537,7 +4537,7 @@
               </a:solidFill>
               <a:latin typeface="Calibri" panose="020F0502020204030204" pitchFamily="34" charset="0"/>
             </a:rPr>
-            <a:t>Growth is broad based; recovery in commodity producers helps the modest global upturn</a:t>
+            <a:t>Une approche intégrée des politiques est nécessaire pour que la mondialisation profite à tous</a:t>
           </a:r>
           <a:endParaRPr lang="en-GB" sz="1600" kern="1200" dirty="0" smtClean="0">
             <a:solidFill>
@@ -4570,7 +4570,7 @@
               </a:solidFill>
               <a:latin typeface="Calibri" panose="020F0502020204030204" pitchFamily="34" charset="0"/>
             </a:rPr>
-            <a:t>Signs of rising demand for high-tech goods and investment to upgrade capital</a:t>
+            <a:t>Les évolutions de la technologie, des préférences des consommateurs et du commerce surviennent simultanément</a:t>
           </a:r>
         </a:p>
       </dsp:txBody>
@@ -4648,7 +4648,7 @@
             <a:rPr lang="en-GB" sz="2000" kern="1200" dirty="0" smtClean="0">
               <a:latin typeface="Calibri" panose="020F0502020204030204" pitchFamily="34" charset="0"/>
             </a:rPr>
-            <a:t>Productivity and wage growth remain subdued; financial stability risks persist</a:t>
+            <a:t>Des conditions de concurrence plus équitables pour le système international</a:t>
           </a:r>
         </a:p>
       </dsp:txBody>
@@ -4715,7 +4715,7 @@
               </a:solidFill>
               <a:latin typeface="Calibri" panose="020F0502020204030204" pitchFamily="34" charset="0"/>
             </a:rPr>
-            <a:t>Headline employment indicators are improving but labour markets have not recovered</a:t>
+            <a:t>La confiance s'améliore et l'investissement et le commerce repartent à partir de niveaux faibles</a:t>
           </a:r>
         </a:p>
         <a:p>
@@ -4740,7 +4740,7 @@
               </a:solidFill>
               <a:latin typeface="Calibri" panose="020F0502020204030204" pitchFamily="34" charset="0"/>
             </a:rPr>
-            <a:t>Financial risks from high and rising credit growth, house price increases, interest rate gaps</a:t>
+            <a:t>Signes d'une demande accrue de biens de haute technologie et d'investissements pour moderniser le capital</a:t>
           </a:r>
           <a:endParaRPr lang="en-GB" sz="1600" kern="1200" dirty="0" smtClean="0">
             <a:solidFill>
@@ -4826,7 +4826,7 @@
             <a:rPr lang="en-GB" sz="2000" kern="1200" dirty="0" smtClean="0">
               <a:latin typeface="Calibri" panose="020F0502020204030204" pitchFamily="34" charset="0"/>
             </a:rPr>
-            <a:t>More needs to be done to share the gains from structural trends and trade</a:t>
+            <a:t>Réformes intérieures pour stimuler la concurrence, la création d'emplois, les compétences et l'innovation</a:t>
           </a:r>
         </a:p>
       </dsp:txBody>
@@ -4893,7 +4893,7 @@
               </a:solidFill>
               <a:latin typeface="Calibri" panose="020F0502020204030204" pitchFamily="34" charset="0"/>
             </a:rPr>
-            <a:t>Changes to technology, consumer preferences and trade are occurring simultaneously</a:t>
+            <a:t>La croissance de la productivité et des salaires reste modérée ; les risques pour la stabilité financière persistent</a:t>
           </a:r>
         </a:p>
         <a:p>
@@ -4918,7 +4918,7 @@
               </a:solidFill>
               <a:latin typeface="Calibri" panose="020F0502020204030204" pitchFamily="34" charset="0"/>
             </a:rPr>
-            <a:t>Job losses from shifts in activity are concentrated in manufacturing and specific regions</a:t>
+            <a:t>Les pertes d'emplois dues aux réorientations de l'activité se concentrent dans l'industrie manufacturière et certaines régions</a:t>
           </a:r>
         </a:p>
       </dsp:txBody>
@@ -4996,7 +4996,7 @@
             <a:rPr lang="en-GB" sz="2000" kern="1200" dirty="0" smtClean="0">
               <a:latin typeface="Calibri" panose="020F0502020204030204" pitchFamily="34" charset="0"/>
             </a:rPr>
-            <a:t>An integrated policy approach is needed to make globalisation work for all</a:t>
+            <a:t>La croissance est généralisée ; la reprise chez les producteurs de matières premières soutient la modeste embellie mondiale</a:t>
           </a:r>
         </a:p>
       </dsp:txBody>
@@ -5063,7 +5063,7 @@
               </a:solidFill>
               <a:latin typeface="Calibri" panose="020F0502020204030204" pitchFamily="34" charset="0"/>
             </a:rPr>
-            <a:t>A more level playing field for the international system</a:t>
+            <a:t>Les principaux indicateurs de l'emploi s'améliorent, mais les marchés du travail ne se sont pas redressés</a:t>
           </a:r>
         </a:p>
         <a:p>
@@ -5088,7 +5088,7 @@
               </a:solidFill>
               <a:latin typeface="Calibri" panose="020F0502020204030204" pitchFamily="34" charset="0"/>
             </a:rPr>
-            <a:t>Domestic reforms to boost competition, job creation, skills and innovation</a:t>
+            <a:t>Risques financiers liés à une croissance du crédit élevée et en hausse, à la hausse des prix de l'immobilier et aux écarts de taux d'intérêt</a:t>
           </a:r>
         </a:p>
         <a:p>
@@ -5113,7 +5113,7 @@
               </a:solidFill>
               <a:latin typeface="Calibri" panose="020F0502020204030204" pitchFamily="34" charset="0"/>
             </a:rPr>
-            <a:t>Targeted policies to help people who are left behind seize new opportunities</a:t>
+            <a:t>Des politiques ciblées pour aider les personnes laissées de côté à saisir de nouvelles opportunités</a:t>
           </a:r>
         </a:p>
       </dsp:txBody>
@@ -14308,7 +14308,6 @@
           </a:bodyPr>
           <a:lstStyle/>
           <a:p>
-            <a:pPr algn="ctr"/>
             <a:r>
               <a:rPr lang="en-GB" sz="3400" b="1" dirty="0" smtClean="0">
                 <a:solidFill>
@@ -14316,25 +14315,10 @@
                 </a:solidFill>
                 <a:latin typeface="Arial"/>
               </a:rPr>
-              <a:t/>
+              <a:t>OECD ECONOMIC OUTLOOK</a:t>
             </a:r>
-            <a:br>
-              <a:rPr lang="en-GB" sz="3400" b="1" dirty="0" smtClean="0">
-                <a:solidFill>
-                  <a:prstClr val="white"/>
-                </a:solidFill>
-                <a:latin typeface="Arial"/>
-              </a:rPr>
-            </a:br>
-            <a:r>
-              <a:rPr lang="en-GB" sz="3600" b="1" dirty="0" smtClean="0">
-                <a:solidFill>
-                  <a:prstClr val="white"/>
-                </a:solidFill>
-                <a:latin typeface="Arial"/>
-              </a:rPr>
-              <a:t>PERSPECTIVES ÉCONOMIQUES DE L'OCDE</a:t>
-            </a:r>
+          </a:p>
+          <a:p>
             <a:r>
               <a:rPr lang="en-GB" sz="3400" b="1" dirty="0" smtClean="0">
                 <a:solidFill>
@@ -14342,40 +14326,8 @@
                 </a:solidFill>
                 <a:latin typeface="Arial"/>
               </a:rPr>
-              <a:t/>
+              <a:t>Mieux, mais encore insuffisant</a:t>
             </a:r>
-            <a:br>
-              <a:rPr lang="en-GB" sz="3400" b="1" dirty="0" smtClean="0">
-                <a:solidFill>
-                  <a:prstClr val="white"/>
-                </a:solidFill>
-                <a:latin typeface="Arial"/>
-              </a:rPr>
-            </a:br>
-            <a:endParaRPr lang="en-US" sz="3600" i="1" dirty="0" smtClean="0">
-              <a:solidFill>
-                <a:prstClr val="white"/>
-              </a:solidFill>
-              <a:latin typeface="Arial"/>
-            </a:endParaRPr>
-          </a:p>
-          <a:p>
-            <a:pPr algn="ctr"/>
-            <a:r>
-              <a:rPr lang="en-US" sz="4400" i="1" dirty="0" smtClean="0">
-                <a:solidFill>
-                  <a:prstClr val="white"/>
-                </a:solidFill>
-                <a:latin typeface="Arial"/>
-              </a:rPr>
-              <a:t>Mieux, mais pas encore suffisant</a:t>
-            </a:r>
-            <a:endParaRPr lang="en-US" sz="4400" i="1" dirty="0">
-              <a:solidFill>
-                <a:prstClr val="white"/>
-              </a:solidFill>
-              <a:latin typeface="Arial"/>
-            </a:endParaRPr>
           </a:p>
         </p:txBody>
       </p:sp>
@@ -14421,12 +14373,6 @@
               </a:rPr>
               <a:t>Blog ECOSCOPE : oecdecoscope.wordpress.com</a:t>
             </a:r>
-            <a:endParaRPr lang="en-GB" sz="1600" dirty="0">
-              <a:solidFill>
-                <a:prstClr val="white"/>
-              </a:solidFill>
-              <a:latin typeface="Arial"/>
-            </a:endParaRPr>
           </a:p>
         </p:txBody>
       </p:sp>
@@ -14458,9 +14404,6 @@
           <a:bodyPr/>
           <a:lstStyle/>
           <a:p>
-            <a:pPr lvl="0" algn="ctr" eaLnBrk="0" hangingPunct="0">
-              <a:defRPr/>
-            </a:pPr>
             <a:r>
               <a:rPr lang="en-GB" sz="2800" b="1" dirty="0" smtClean="0">
                 <a:solidFill>
@@ -14471,139 +14414,41 @@
               </a:rPr>
               <a:t> </a:t>
             </a:r>
+          </a:p>
+          <a:p>
             <a:r>
-              <a:rPr lang="en-US" b="1" dirty="0" smtClean="0">
+              <a:rPr lang="en-GB" sz="2800" b="1" dirty="0" smtClean="0">
                 <a:solidFill>
-                  <a:schemeClr val="bg1"/>
+                  <a:srgbClr val="898989"/>
                 </a:solidFill>
-                <a:latin typeface="+mj-lt"/>
+                <a:latin typeface="+mn-lt"/>
                 <a:cs typeface="+mn-cs"/>
               </a:rPr>
               <a:t/>
             </a:r>
-            <a:br>
-              <a:rPr lang="en-US" b="1" dirty="0" smtClean="0">
-                <a:solidFill>
-                  <a:schemeClr val="bg1"/>
-                </a:solidFill>
-                <a:latin typeface="+mj-lt"/>
-                <a:cs typeface="+mn-cs"/>
-              </a:rPr>
-            </a:br>
-            <a:r>
-              <a:rPr lang="en-GB" b="1" dirty="0" smtClean="0">
-                <a:solidFill>
-                  <a:schemeClr val="bg1"/>
-                </a:solidFill>
-                <a:latin typeface="+mj-lt"/>
-                <a:cs typeface="+mn-cs"/>
-              </a:rPr>
-              <a:t/>
-            </a:r>
-            <a:br>
-              <a:rPr lang="en-GB" b="1" dirty="0" smtClean="0">
-                <a:solidFill>
-                  <a:schemeClr val="bg1"/>
-                </a:solidFill>
-                <a:latin typeface="+mj-lt"/>
-                <a:cs typeface="+mn-cs"/>
-              </a:rPr>
-            </a:br>
-            <a:endParaRPr lang="en-GB" b="1" dirty="0" smtClean="0">
-              <a:solidFill>
-                <a:schemeClr val="bg1"/>
-              </a:solidFill>
-              <a:latin typeface="+mj-lt"/>
-              <a:cs typeface="+mn-cs"/>
-            </a:endParaRPr>
           </a:p>
           <a:p>
-            <a:pPr lvl="0" algn="ctr" eaLnBrk="0" hangingPunct="0">
-              <a:defRPr/>
-            </a:pPr>
             <a:r>
-              <a:rPr lang="en-GB" b="1" dirty="0" smtClean="0">
+              <a:rPr lang="en-GB" sz="2800" b="1" dirty="0" smtClean="0">
                 <a:solidFill>
-                  <a:schemeClr val="bg1"/>
+                  <a:srgbClr val="898989"/>
                 </a:solidFill>
-                <a:latin typeface="+mj-lt"/>
-                <a:cs typeface="+mn-cs"/>
-              </a:rPr>
-              <a:t/>
-            </a:r>
-            <a:br>
-              <a:rPr lang="en-GB" b="1" dirty="0" smtClean="0">
-                <a:solidFill>
-                  <a:schemeClr val="bg1"/>
-                </a:solidFill>
-                <a:latin typeface="+mj-lt"/>
-                <a:cs typeface="+mn-cs"/>
-              </a:rPr>
-            </a:br>
-            <a:endParaRPr lang="en-GB" sz="800" b="1" dirty="0" smtClean="0">
-              <a:solidFill>
-                <a:schemeClr val="tx2">
-                  <a:lumMod val="40000"/>
-                  <a:lumOff val="60000"/>
-                </a:schemeClr>
-              </a:solidFill>
-              <a:latin typeface="+mj-lt"/>
-              <a:cs typeface="+mn-cs"/>
-            </a:endParaRPr>
-          </a:p>
-          <a:p>
-            <a:pPr algn="ctr" eaLnBrk="0" hangingPunct="0">
-              <a:spcBef>
-                <a:spcPts val="0"/>
-              </a:spcBef>
-              <a:defRPr/>
-            </a:pPr>
-            <a:r>
-              <a:rPr lang="en-GB" sz="2600" b="1" dirty="0" smtClean="0">
-                <a:solidFill>
-                  <a:schemeClr val="tx2">
-                    <a:lumMod val="40000"/>
-                    <a:lumOff val="60000"/>
-                  </a:schemeClr>
-                </a:solidFill>
-                <a:latin typeface="+mj-lt"/>
+                <a:latin typeface="+mn-lt"/>
                 <a:cs typeface="+mn-cs"/>
               </a:rPr>
               <a:t>Catherine L. Mann</a:t>
             </a:r>
           </a:p>
           <a:p>
-            <a:pPr algn="ctr" eaLnBrk="0" hangingPunct="0">
-              <a:spcBef>
-                <a:spcPts val="0"/>
-              </a:spcBef>
-              <a:defRPr/>
-            </a:pPr>
             <a:r>
-              <a:rPr lang="en-GB" sz="2200" b="1" dirty="0" smtClean="0">
+              <a:rPr lang="en-GB" sz="2800" b="1" dirty="0" smtClean="0">
                 <a:solidFill>
-                  <a:schemeClr val="tx2">
-                    <a:lumMod val="40000"/>
-                    <a:lumOff val="60000"/>
-                  </a:schemeClr>
+                  <a:srgbClr val="898989"/>
                 </a:solidFill>
-                <a:latin typeface="+mj-lt"/>
+                <a:latin typeface="+mn-lt"/>
                 <a:cs typeface="+mn-cs"/>
               </a:rPr>
-              <a:t>Chef économiste de l'OCDE </a:t>
-            </a:r>
-            <a:r>
-              <a:rPr lang="en-GB" sz="2200" b="1" dirty="0">
-                <a:solidFill>
-                  <a:schemeClr val="tx2">
-                    <a:lumMod val="40000"/>
-                    <a:lumOff val="60000"/>
-                  </a:schemeClr>
-                </a:solidFill>
-                <a:latin typeface="+mj-lt"/>
-                <a:cs typeface="+mn-cs"/>
-              </a:rPr>
-              <a:t>Chef économiste</a:t>
+              <a:t>Économiste en chef de l'OCDE</a:t>
             </a:r>
           </a:p>
         </p:txBody>
@@ -14636,9 +14481,6 @@
           <a:bodyPr/>
           <a:lstStyle/>
           <a:p>
-            <a:pPr lvl="0" algn="ctr" eaLnBrk="0" hangingPunct="0">
-              <a:defRPr/>
-            </a:pPr>
             <a:r>
               <a:rPr lang="en-GB" sz="2800" b="1" dirty="0" smtClean="0">
                 <a:solidFill>
@@ -14647,66 +14489,8 @@
                 <a:latin typeface="+mn-lt"/>
                 <a:cs typeface="+mn-cs"/>
               </a:rPr>
-              <a:t> </a:t>
+              <a:t> 7 juin 2017Paris</a:t>
             </a:r>
-            <a:r>
-              <a:rPr lang="en-US" b="1" dirty="0" smtClean="0">
-                <a:solidFill>
-                  <a:schemeClr val="bg1"/>
-                </a:solidFill>
-                <a:latin typeface="+mj-lt"/>
-                <a:cs typeface="+mn-cs"/>
-              </a:rPr>
-              <a:t>7 juin 2017</a:t>
-            </a:r>
-            <a:br>
-              <a:rPr lang="en-US" b="1" dirty="0" smtClean="0">
-                <a:solidFill>
-                  <a:schemeClr val="bg1"/>
-                </a:solidFill>
-                <a:latin typeface="+mj-lt"/>
-                <a:cs typeface="+mn-cs"/>
-              </a:rPr>
-            </a:br>
-            <a:r>
-              <a:rPr lang="en-US" b="1" dirty="0" smtClean="0">
-                <a:solidFill>
-                  <a:schemeClr val="bg1"/>
-                </a:solidFill>
-                <a:latin typeface="+mj-lt"/>
-                <a:cs typeface="+mn-cs"/>
-              </a:rPr>
-              <a:t>Paris</a:t>
-            </a:r>
-            <a:r>
-              <a:rPr lang="en-GB" b="1" dirty="0" smtClean="0">
-                <a:solidFill>
-                  <a:schemeClr val="bg1"/>
-                </a:solidFill>
-                <a:latin typeface="+mj-lt"/>
-                <a:cs typeface="+mn-cs"/>
-              </a:rPr>
-              <a:t/>
-            </a:r>
-            <a:br>
-              <a:rPr lang="en-GB" b="1" dirty="0" smtClean="0">
-                <a:solidFill>
-                  <a:schemeClr val="bg1"/>
-                </a:solidFill>
-                <a:latin typeface="+mj-lt"/>
-                <a:cs typeface="+mn-cs"/>
-              </a:rPr>
-            </a:br>
-            <a:endParaRPr lang="en-GB" sz="2200" b="1" dirty="0">
-              <a:solidFill>
-                <a:schemeClr val="tx2">
-                  <a:lumMod val="40000"/>
-                  <a:lumOff val="60000"/>
-                </a:schemeClr>
-              </a:solidFill>
-              <a:latin typeface="+mj-lt"/>
-              <a:cs typeface="+mn-cs"/>
-            </a:endParaRPr>
           </a:p>
         </p:txBody>
       </p:sp>
@@ -14873,9 +14657,6 @@
           </a:bodyPr>
           <a:lstStyle/>
           <a:p>
-            <a:pPr algn="ctr">
-              <a:defRPr/>
-            </a:pPr>
             <a:r>
               <a:rPr lang="en-US" sz="2800" b="1" dirty="0" smtClean="0">
                 <a:solidFill>
@@ -14883,31 +14664,8 @@
                 </a:solidFill>
                 <a:latin typeface="+mj-lt"/>
               </a:rPr>
-              <a:t>Hausse du crédit privé dans les EME et </a:t>
+              <a:t>Hausse du crédit privé dans les économies de marché émergentes et risques sur le marché du logement dans les économies avancées</a:t>
             </a:r>
-            <a:br>
-              <a:rPr lang="en-US" sz="2800" b="1" dirty="0" smtClean="0">
-                <a:solidFill>
-                  <a:schemeClr val="tx2"/>
-                </a:solidFill>
-                <a:latin typeface="+mj-lt"/>
-              </a:rPr>
-            </a:br>
-            <a:r>
-              <a:rPr lang="en-US" sz="2800" b="1" dirty="0" smtClean="0">
-                <a:solidFill>
-                  <a:schemeClr val="tx2"/>
-                </a:solidFill>
-                <a:latin typeface="+mj-lt"/>
-              </a:rPr>
-              <a:t>risques sur les marchés immobiliers dans les économies avancées</a:t>
-            </a:r>
-            <a:endParaRPr lang="en-GB" sz="2800" b="1" dirty="0">
-              <a:solidFill>
-                <a:schemeClr val="tx2"/>
-              </a:solidFill>
-              <a:latin typeface="+mj-lt"/>
-            </a:endParaRPr>
           </a:p>
         </p:txBody>
       </p:sp>
@@ -14942,125 +14700,8 @@
                 </a:solidFill>
                 <a:latin typeface="Calibri" panose="020F0502020204030204" pitchFamily="34" charset="0"/>
               </a:rPr>
-              <a:t>Note : Les EME hors Chine représentent une moyenne non pondérée des ratios pour l'Argentine, le Brésil, la Colombie</a:t>
+              <a:t>Note : les économies de marché émergentes hors Chine correspondent à une moyenne non pondérée des ratios pour l'Argentine, le Brésil, la Colombie, l'Inde, l'Indonésie, le Mexique, la Russie, la Malaisie, l'Afrique du Sud et la Turquie.Source : BRI ; base de données analytique des prix de l'immobilier de l'OCDE ; et calculs de l'OCDE.</a:t>
             </a:r>
-            <a:r>
-              <a:rPr lang="en-US" sz="1200" dirty="0">
-                <a:solidFill>
-                  <a:schemeClr val="bg2">
-                    <a:lumMod val="10000"/>
-                  </a:schemeClr>
-                </a:solidFill>
-                <a:latin typeface="Calibri" panose="020F0502020204030204" pitchFamily="34" charset="0"/>
-              </a:rPr>
-              <a:t>, l'Inde, l'Indonésie, le Mexique, la Russie, la Malaisie, </a:t>
-            </a:r>
-            <a:r>
-              <a:rPr lang="en-US" sz="1200" dirty="0" smtClean="0">
-                <a:solidFill>
-                  <a:schemeClr val="bg2">
-                    <a:lumMod val="10000"/>
-                  </a:schemeClr>
-                </a:solidFill>
-                <a:latin typeface="Calibri" panose="020F0502020204030204" pitchFamily="34" charset="0"/>
-              </a:rPr>
-              <a:t>l'Afrique </a:t>
-            </a:r>
-            <a:r>
-              <a:rPr lang="en-US" sz="1200" dirty="0">
-                <a:solidFill>
-                  <a:schemeClr val="bg2">
-                    <a:lumMod val="10000"/>
-                  </a:schemeClr>
-                </a:solidFill>
-                <a:latin typeface="Calibri" panose="020F0502020204030204" pitchFamily="34" charset="0"/>
-              </a:rPr>
-              <a:t>du Sud et la Turquie.</a:t>
-            </a:r>
-            <a:br>
-              <a:rPr lang="en-US" sz="1200" dirty="0">
-                <a:solidFill>
-                  <a:schemeClr val="bg2">
-                    <a:lumMod val="10000"/>
-                  </a:schemeClr>
-                </a:solidFill>
-                <a:latin typeface="Calibri" panose="020F0502020204030204" pitchFamily="34" charset="0"/>
-              </a:rPr>
-            </a:br>
-            <a:r>
-              <a:rPr lang="en-US" sz="1200" dirty="0" smtClean="0">
-                <a:solidFill>
-                  <a:schemeClr val="bg2">
-                    <a:lumMod val="10000"/>
-                  </a:schemeClr>
-                </a:solidFill>
-                <a:latin typeface="Calibri" panose="020F0502020204030204" pitchFamily="34" charset="0"/>
-              </a:rPr>
-              <a:t>Source</a:t>
-            </a:r>
-            <a:r>
-              <a:rPr lang="en-US" sz="1200" dirty="0">
-                <a:solidFill>
-                  <a:schemeClr val="bg2">
-                    <a:lumMod val="10000"/>
-                  </a:schemeClr>
-                </a:solidFill>
-                <a:latin typeface="Calibri" panose="020F0502020204030204" pitchFamily="34" charset="0"/>
-              </a:rPr>
-              <a:t> : </a:t>
-            </a:r>
-            <a:r>
-              <a:rPr lang="en-US" sz="1200" dirty="0" smtClean="0">
-                <a:solidFill>
-                  <a:schemeClr val="bg2">
-                    <a:lumMod val="10000"/>
-                  </a:schemeClr>
-                </a:solidFill>
-                <a:latin typeface="Calibri" panose="020F0502020204030204" pitchFamily="34" charset="0"/>
-              </a:rPr>
-              <a:t>BIS ; </a:t>
-            </a:r>
-            <a:r>
-              <a:rPr lang="en-US" sz="1200" dirty="0">
-                <a:solidFill>
-                  <a:schemeClr val="bg2">
-                    <a:lumMod val="10000"/>
-                  </a:schemeClr>
-                </a:solidFill>
-                <a:latin typeface="Calibri" panose="020F0502020204030204" pitchFamily="34" charset="0"/>
-              </a:rPr>
-              <a:t>OCDE base de données analytique sur les prix immobiliers ; </a:t>
-            </a:r>
-            <a:r>
-              <a:rPr lang="en-US" sz="1200" dirty="0" smtClean="0">
-                <a:solidFill>
-                  <a:schemeClr val="bg2">
-                    <a:lumMod val="10000"/>
-                  </a:schemeClr>
-                </a:solidFill>
-                <a:latin typeface="Calibri" panose="020F0502020204030204" pitchFamily="34" charset="0"/>
-              </a:rPr>
-              <a:t>et </a:t>
-            </a:r>
-            <a:r>
-              <a:rPr lang="en-US" sz="1200" dirty="0">
-                <a:solidFill>
-                  <a:schemeClr val="bg2">
-                    <a:lumMod val="10000"/>
-                  </a:schemeClr>
-                </a:solidFill>
-                <a:latin typeface="Calibri" panose="020F0502020204030204" pitchFamily="34" charset="0"/>
-              </a:rPr>
-              <a:t>calculs de l'OCDE.</a:t>
-            </a:r>
-            <a:endParaRPr lang="en-US" sz="1200" dirty="0" smtClean="0">
-              <a:solidFill>
-                <a:schemeClr val="bg2">
-                  <a:lumMod val="10000"/>
-                </a:schemeClr>
-              </a:solidFill>
-              <a:latin typeface="Calibri" panose="020F0502020204030204" pitchFamily="34" charset="0"/>
-            </a:endParaRPr>
           </a:p>
         </p:txBody>
       </p:sp>
@@ -15085,7 +14726,6 @@
           </a:bodyPr>
           <a:lstStyle/>
           <a:p>
-            <a:pPr algn="ctr"/>
             <a:r>
               <a:rPr lang="en-GB" sz="2000" b="1" dirty="0" smtClean="0">
                 <a:solidFill>
@@ -15099,15 +14739,17 @@
             </a:r>
           </a:p>
           <a:p>
-            <a:pPr algn="ctr"/>
-            <a:endParaRPr lang="en-GB" sz="1400" i="1" dirty="0" smtClean="0">
-              <a:solidFill>
-                <a:schemeClr val="bg2">
-                  <a:lumMod val="10000"/>
-                </a:schemeClr>
-              </a:solidFill>
-              <a:latin typeface="Calibri" pitchFamily="34" charset="0"/>
-            </a:endParaRPr>
+            <a:r>
+              <a:rPr lang="en-GB" sz="2000" b="1" dirty="0" smtClean="0">
+                <a:solidFill>
+                  <a:schemeClr val="bg2">
+                    <a:lumMod val="10000"/>
+                  </a:schemeClr>
+                </a:solidFill>
+                <a:latin typeface="Calibri" pitchFamily="34" charset="0"/>
+              </a:rPr>
+              <a:t/>
+            </a:r>
           </a:p>
         </p:txBody>
       </p:sp>
@@ -15132,7 +14774,6 @@
           </a:bodyPr>
           <a:lstStyle/>
           <a:p>
-            <a:pPr algn="ctr"/>
             <a:r>
               <a:rPr lang="en-GB" sz="2000" b="1" dirty="0" smtClean="0">
                 <a:solidFill>
@@ -15142,30 +14783,21 @@
                 </a:solidFill>
                 <a:latin typeface="Calibri" pitchFamily="34" charset="0"/>
               </a:rPr>
-              <a:t>Ratio prix des logements/loyers</a:t>
+              <a:t>Ratio prix de l'immobilier/loyer</a:t>
             </a:r>
           </a:p>
           <a:p>
-            <a:pPr lvl="0" algn="ctr"/>
             <a:r>
-              <a:rPr lang="en-US" sz="1200" i="1" dirty="0" smtClean="0">
+              <a:rPr lang="en-GB" sz="2000" b="1" dirty="0" smtClean="0">
                 <a:solidFill>
-                  <a:srgbClr val="E6E6E6">
+                  <a:schemeClr val="bg2">
                     <a:lumMod val="10000"/>
-                  </a:srgbClr>
+                  </a:schemeClr>
                 </a:solidFill>
                 <a:latin typeface="Calibri" pitchFamily="34" charset="0"/>
               </a:rPr>
               <a:t>Moyenne depuis 1980 = 100</a:t>
             </a:r>
-            <a:endParaRPr lang="en-US" sz="1200" i="1" dirty="0">
-              <a:solidFill>
-                <a:srgbClr val="E6E6E6">
-                  <a:lumMod val="10000"/>
-                </a:srgbClr>
-              </a:solidFill>
-              <a:latin typeface="Calibri" pitchFamily="34" charset="0"/>
-            </a:endParaRPr>
           </a:p>
         </p:txBody>
       </p:sp>
@@ -15291,9 +14923,6 @@
           </a:bodyPr>
           <a:lstStyle/>
           <a:p>
-            <a:pPr algn="ctr">
-              <a:defRPr/>
-            </a:pPr>
             <a:r>
               <a:rPr lang="en-US" sz="2800" b="1" dirty="0" smtClean="0">
                 <a:solidFill>
@@ -15301,32 +14930,8 @@
                 </a:solidFill>
                 <a:latin typeface="+mj-lt"/>
               </a:rPr>
-              <a:t>Inflation généralement en deçà des objectifs ; la divergence potentielle des taux d'intérêt crée des </a:t>
+              <a:t>L'inflation est généralement inférieure aux objectifs ; une éventuelle divergence des taux d'intérêt crée des risques financiers</a:t>
             </a:r>
-            <a:r>
-              <a:rPr lang="en-US" sz="2800" b="1" dirty="0">
-                <a:solidFill>
-                  <a:schemeClr val="tx2"/>
-                </a:solidFill>
-                <a:latin typeface="+mj-lt"/>
-              </a:rPr>
-              <a:t>risques </a:t>
-            </a:r>
-            <a:r>
-              <a:rPr lang="en-US" sz="2800" b="1" dirty="0" smtClean="0">
-                <a:solidFill>
-                  <a:schemeClr val="tx2"/>
-                </a:solidFill>
-                <a:latin typeface="+mj-lt"/>
-              </a:rPr>
-              <a:t>financiers</a:t>
-            </a:r>
-            <a:endParaRPr lang="en-GB" sz="2800" b="1" dirty="0">
-              <a:solidFill>
-                <a:schemeClr val="tx2"/>
-              </a:solidFill>
-              <a:latin typeface="+mj-lt"/>
-            </a:endParaRPr>
           </a:p>
         </p:txBody>
       </p:sp>
@@ -15352,7 +14957,6 @@
           </a:bodyPr>
           <a:lstStyle/>
           <a:p>
-            <a:pPr algn="ctr"/>
             <a:r>
               <a:rPr lang="en-US" sz="2000" b="1" dirty="0" smtClean="0">
                 <a:solidFill>
@@ -15364,24 +14968,6 @@
               </a:rPr>
               <a:t>Inflation sous-jacente</a:t>
             </a:r>
-            <a:br>
-              <a:rPr lang="en-US" sz="2000" b="1" dirty="0" smtClean="0">
-                <a:solidFill>
-                  <a:schemeClr val="bg2">
-                    <a:lumMod val="10000"/>
-                  </a:schemeClr>
-                </a:solidFill>
-                <a:latin typeface="Calibri" pitchFamily="34" charset="0"/>
-              </a:rPr>
-            </a:br>
-            <a:endParaRPr lang="en-GB" sz="1200" i="1" baseline="30000" dirty="0">
-              <a:solidFill>
-                <a:schemeClr val="bg2">
-                  <a:lumMod val="10000"/>
-                </a:schemeClr>
-              </a:solidFill>
-              <a:latin typeface="Calibri" pitchFamily="34" charset="0"/>
-            </a:endParaRPr>
           </a:p>
         </p:txBody>
       </p:sp>
@@ -15416,90 +15002,8 @@
                 </a:solidFill>
                 <a:latin typeface="Calibri" panose="020F0502020204030204" pitchFamily="34" charset="0"/>
               </a:rPr>
-              <a:t/>
+              <a:t>Note : l'inflation sous-jacente du Japon est ajustée de l'effet des hausses de la taxe sur la consommation.Source : base de données de l'OCDE Economic Outlook, juin 2017 ; Bloomberg ; et calculs de l'OCDE.</a:t>
             </a:r>
-            <a:br>
-              <a:rPr lang="en-GB" sz="1200" dirty="0" smtClean="0">
-                <a:solidFill>
-                  <a:schemeClr val="bg2">
-                    <a:lumMod val="10000"/>
-                  </a:schemeClr>
-                </a:solidFill>
-                <a:latin typeface="Calibri" panose="020F0502020204030204" pitchFamily="34" charset="0"/>
-              </a:rPr>
-            </a:br>
-            <a:r>
-              <a:rPr lang="en-GB" sz="1200" dirty="0" smtClean="0">
-                <a:solidFill>
-                  <a:schemeClr val="bg2">
-                    <a:lumMod val="10000"/>
-                  </a:schemeClr>
-                </a:solidFill>
-                <a:latin typeface="Calibri" panose="020F0502020204030204" pitchFamily="34" charset="0"/>
-              </a:rPr>
-              <a:t/>
-            </a:r>
-            <a:br>
-              <a:rPr lang="en-GB" sz="1200" dirty="0" smtClean="0">
-                <a:solidFill>
-                  <a:schemeClr val="bg2">
-                    <a:lumMod val="10000"/>
-                  </a:schemeClr>
-                </a:solidFill>
-                <a:latin typeface="Calibri" panose="020F0502020204030204" pitchFamily="34" charset="0"/>
-              </a:rPr>
-            </a:br>
-            <a:r>
-              <a:rPr lang="en-GB" sz="1200" dirty="0" smtClean="0">
-                <a:solidFill>
-                  <a:schemeClr val="bg2">
-                    <a:lumMod val="10000"/>
-                  </a:schemeClr>
-                </a:solidFill>
-                <a:latin typeface="Calibri" panose="020F0502020204030204" pitchFamily="34" charset="0"/>
-              </a:rPr>
-              <a:t>Note : L'inflation sous-jacente au Japon est corrigée de l'impact des hausses de la taxe à la consommation.</a:t>
-            </a:r>
-            <a:br>
-              <a:rPr lang="en-GB" sz="1200" dirty="0" smtClean="0">
-                <a:solidFill>
-                  <a:schemeClr val="bg2">
-                    <a:lumMod val="10000"/>
-                  </a:schemeClr>
-                </a:solidFill>
-                <a:latin typeface="Calibri" panose="020F0502020204030204" pitchFamily="34" charset="0"/>
-              </a:rPr>
-            </a:br>
-            <a:r>
-              <a:rPr lang="en-GB" sz="1200" dirty="0" smtClean="0">
-                <a:solidFill>
-                  <a:schemeClr val="bg2">
-                    <a:lumMod val="10000"/>
-                  </a:schemeClr>
-                </a:solidFill>
-                <a:latin typeface="Calibri" panose="020F0502020204030204" pitchFamily="34" charset="0"/>
-              </a:rPr>
-              <a:t>Source : </a:t>
-            </a:r>
-            <a:r>
-              <a:rPr lang="en-US" sz="1200" dirty="0" smtClean="0">
-                <a:solidFill>
-                  <a:schemeClr val="bg2">
-                    <a:lumMod val="10000"/>
-                  </a:schemeClr>
-                </a:solidFill>
-                <a:latin typeface="Calibri" panose="020F0502020204030204" pitchFamily="34" charset="0"/>
-              </a:rPr>
-              <a:t>OCDE base de données des Perspectives économiques de juin 2017 ; Bloomberg ; et calculs de l'OCDE.</a:t>
-            </a:r>
-            <a:endParaRPr lang="en-GB" sz="1200" dirty="0">
-              <a:solidFill>
-                <a:schemeClr val="bg2">
-                  <a:lumMod val="10000"/>
-                </a:schemeClr>
-              </a:solidFill>
-              <a:latin typeface="Calibri" panose="020F0502020204030204" pitchFamily="34" charset="0"/>
-            </a:endParaRPr>
           </a:p>
         </p:txBody>
       </p:sp>
@@ -15566,7 +15070,6 @@
           </a:bodyPr>
           <a:lstStyle/>
           <a:p>
-            <a:pPr algn="ctr"/>
             <a:r>
               <a:rPr lang="en-US" sz="2000" b="1" dirty="0" smtClean="0">
                 <a:solidFill>
@@ -15576,18 +15079,10 @@
                 </a:solidFill>
                 <a:latin typeface="Calibri" pitchFamily="34" charset="0"/>
               </a:rPr>
-              <a:t>Anticipations des marchés concernant les</a:t>
+              <a:t>Anticipations de marché des taux d'intérêt au jour le jour</a:t>
             </a:r>
-            <a:br>
-              <a:rPr lang="en-US" sz="2000" b="1" dirty="0" smtClean="0">
-                <a:solidFill>
-                  <a:schemeClr val="bg2">
-                    <a:lumMod val="10000"/>
-                  </a:schemeClr>
-                </a:solidFill>
-                <a:latin typeface="Calibri" pitchFamily="34" charset="0"/>
-              </a:rPr>
-            </a:br>
+          </a:p>
+          <a:p>
             <a:r>
               <a:rPr lang="en-US" sz="2000" b="1" dirty="0" smtClean="0">
                 <a:solidFill>
@@ -15597,51 +15092,8 @@
                 </a:solidFill>
                 <a:latin typeface="Calibri" pitchFamily="34" charset="0"/>
               </a:rPr>
-              <a:t>taux d'intérêt au jour le jour</a:t>
-            </a:r>
-          </a:p>
-          <a:p>
-            <a:pPr algn="ctr"/>
-            <a:r>
-              <a:rPr lang="en-US" sz="1200" i="1" dirty="0" smtClean="0">
-                <a:solidFill>
-                  <a:schemeClr val="bg2">
-                    <a:lumMod val="10000"/>
-                  </a:schemeClr>
-                </a:solidFill>
-                <a:latin typeface="Calibri" pitchFamily="34" charset="0"/>
-              </a:rPr>
               <a:t>Moyenne mobile sur 15 jours</a:t>
             </a:r>
-            <a:r>
-              <a:rPr lang="en-US" sz="1200" i="1" dirty="0">
-                <a:solidFill>
-                  <a:schemeClr val="bg2">
-                    <a:lumMod val="10000"/>
-                  </a:schemeClr>
-                </a:solidFill>
-                <a:latin typeface="Calibri" pitchFamily="34" charset="0"/>
-              </a:rPr>
-              <a:t/>
-            </a:r>
-            <a:br>
-              <a:rPr lang="en-US" sz="1200" i="1" dirty="0">
-                <a:solidFill>
-                  <a:schemeClr val="bg2">
-                    <a:lumMod val="10000"/>
-                  </a:schemeClr>
-                </a:solidFill>
-                <a:latin typeface="Calibri" pitchFamily="34" charset="0"/>
-              </a:rPr>
-            </a:br>
-            <a:endParaRPr lang="en-GB" sz="1200" i="1" baseline="30000" dirty="0">
-              <a:solidFill>
-                <a:schemeClr val="bg2">
-                  <a:lumMod val="10000"/>
-                </a:schemeClr>
-              </a:solidFill>
-              <a:latin typeface="Calibri" pitchFamily="34" charset="0"/>
-            </a:endParaRPr>
           </a:p>
         </p:txBody>
       </p:sp>
@@ -15765,9 +15217,6 @@
           </a:bodyPr>
           <a:lstStyle/>
           <a:p>
-            <a:pPr algn="ctr">
-              <a:defRPr/>
-            </a:pPr>
             <a:r>
               <a:rPr lang="en-US" sz="4000" b="1" dirty="0" smtClean="0">
                 <a:solidFill>
@@ -15779,9 +15228,6 @@
             </a:r>
           </a:p>
           <a:p>
-            <a:pPr algn="ctr">
-              <a:defRPr/>
-            </a:pPr>
             <a:r>
               <a:rPr lang="en-US" sz="4000" b="1" dirty="0" smtClean="0">
                 <a:solidFill>
@@ -15916,9 +15362,6 @@
           </a:bodyPr>
           <a:lstStyle/>
           <a:p>
-            <a:pPr algn="ctr">
-              <a:defRPr/>
-            </a:pPr>
             <a:r>
               <a:rPr lang="en-US" sz="2800" b="1" dirty="0" smtClean="0">
                 <a:solidFill>
@@ -15926,7 +15369,7 @@
                 </a:solidFill>
                 <a:latin typeface="+mj-lt"/>
               </a:rPr>
-              <a:t>Les spécialisations et les structures du commerce ont évolué</a:t>
+              <a:t>La spécialisation et les schémas du commerce ont évolué</a:t>
             </a:r>
           </a:p>
         </p:txBody>
@@ -15953,7 +15396,6 @@
           </a:bodyPr>
           <a:lstStyle/>
           <a:p>
-            <a:pPr lvl="0" algn="ctr"/>
             <a:r>
               <a:rPr lang="en-US" sz="2000" b="1" dirty="0">
                 <a:solidFill>
@@ -15963,10 +15405,12 @@
                 </a:solidFill>
                 <a:latin typeface="Calibri" pitchFamily="34" charset="0"/>
               </a:rPr>
-              <a:t>C</a:t>
+              <a:t>Commerce mondial de biens</a:t>
             </a:r>
+          </a:p>
+          <a:p>
             <a:r>
-              <a:rPr lang="en-US" sz="2000" b="1" dirty="0" smtClean="0">
+              <a:rPr lang="en-US" sz="2000" b="1" dirty="0">
                 <a:solidFill>
                   <a:schemeClr val="bg2">
                     <a:lumMod val="10000"/>
@@ -15974,71 +15418,8 @@
                 </a:solidFill>
                 <a:latin typeface="Calibri" pitchFamily="34" charset="0"/>
               </a:rPr>
-              <a:t>ommerce mondial de marchandises</a:t>
+              <a:t>Part des exportations mondiales de biens, en volume</a:t>
             </a:r>
-            <a:endParaRPr lang="en-US" sz="2000" b="1" dirty="0">
-              <a:solidFill>
-                <a:schemeClr val="bg2">
-                  <a:lumMod val="10000"/>
-                </a:schemeClr>
-              </a:solidFill>
-              <a:latin typeface="Calibri" pitchFamily="34" charset="0"/>
-            </a:endParaRPr>
-          </a:p>
-          <a:p>
-            <a:pPr lvl="0" algn="ctr"/>
-            <a:r>
-              <a:rPr lang="en-US" sz="1200" i="1" dirty="0">
-                <a:solidFill>
-                  <a:schemeClr val="bg2">
-                    <a:lumMod val="10000"/>
-                  </a:schemeClr>
-                </a:solidFill>
-                <a:latin typeface="Calibri" pitchFamily="34" charset="0"/>
-              </a:rPr>
-              <a:t>Part des </a:t>
-            </a:r>
-            <a:r>
-              <a:rPr lang="en-US" sz="1200" i="1">
-                <a:solidFill>
-                  <a:schemeClr val="bg2">
-                    <a:lumMod val="10000"/>
-                  </a:schemeClr>
-                </a:solidFill>
-                <a:latin typeface="Calibri" pitchFamily="34" charset="0"/>
-              </a:rPr>
-              <a:t>exportations mondiales de </a:t>
-            </a:r>
-            <a:r>
-              <a:rPr lang="en-US" sz="1200" i="1" smtClean="0">
-                <a:solidFill>
-                  <a:schemeClr val="bg2">
-                    <a:lumMod val="10000"/>
-                  </a:schemeClr>
-                </a:solidFill>
-                <a:latin typeface="Calibri" pitchFamily="34" charset="0"/>
-              </a:rPr>
-              <a:t>marchandises, </a:t>
-            </a:r>
-            <a:r>
-              <a:rPr lang="en-US" sz="1200" i="1" dirty="0" smtClean="0">
-                <a:solidFill>
-                  <a:schemeClr val="bg2">
-                    <a:lumMod val="10000"/>
-                  </a:schemeClr>
-                </a:solidFill>
-                <a:latin typeface="Calibri" pitchFamily="34" charset="0"/>
-              </a:rPr>
-              <a:t>volumes</a:t>
-            </a:r>
-            <a:endParaRPr lang="en-US" sz="1200" i="1" dirty="0">
-              <a:solidFill>
-                <a:schemeClr val="bg2">
-                  <a:lumMod val="10000"/>
-                </a:schemeClr>
-              </a:solidFill>
-              <a:latin typeface="Calibri" pitchFamily="34" charset="0"/>
-            </a:endParaRPr>
           </a:p>
         </p:txBody>
       </p:sp>
@@ -16064,7 +15445,6 @@
           </a:bodyPr>
           <a:lstStyle/>
           <a:p>
-            <a:pPr lvl="0" algn="ctr"/>
             <a:r>
               <a:rPr lang="en-US" sz="2000" b="1" dirty="0" smtClean="0">
                 <a:solidFill>
@@ -16078,37 +15458,30 @@
             </a:r>
           </a:p>
           <a:p>
-            <a:pPr lvl="0" algn="ctr"/>
             <a:r>
-              <a:rPr lang="en-US" sz="1200" i="1" dirty="0" smtClean="0">
+              <a:rPr lang="en-US" sz="2000" b="1" dirty="0" smtClean="0">
                 <a:solidFill>
-                  <a:srgbClr val="E6E6E6">
+                  <a:schemeClr val="bg2">
                     <a:lumMod val="10000"/>
-                  </a:srgbClr>
+                  </a:schemeClr>
                 </a:solidFill>
                 <a:latin typeface="Calibri" pitchFamily="34" charset="0"/>
               </a:rPr>
-              <a:t>Exportations, valeurs</a:t>
+              <a:t>Exportations, en valeur</a:t>
             </a:r>
-            <a:endParaRPr lang="en-US" sz="1200" i="1" dirty="0">
-              <a:solidFill>
-                <a:srgbClr val="E6E6E6">
-                  <a:lumMod val="10000"/>
-                </a:srgbClr>
-              </a:solidFill>
-              <a:latin typeface="Calibri" pitchFamily="34" charset="0"/>
-            </a:endParaRPr>
           </a:p>
           <a:p>
-            <a:pPr lvl="0" algn="ctr"/>
-            <a:endParaRPr lang="en-US" sz="2000" b="1" dirty="0" smtClean="0">
-              <a:solidFill>
-                <a:schemeClr val="bg2">
-                  <a:lumMod val="10000"/>
-                </a:schemeClr>
-              </a:solidFill>
-              <a:latin typeface="Calibri" pitchFamily="34" charset="0"/>
-            </a:endParaRPr>
+            <a:r>
+              <a:rPr lang="en-US" sz="2000" b="1" dirty="0" smtClean="0">
+                <a:solidFill>
+                  <a:schemeClr val="bg2">
+                    <a:lumMod val="10000"/>
+                  </a:schemeClr>
+                </a:solidFill>
+                <a:latin typeface="Calibri" pitchFamily="34" charset="0"/>
+              </a:rPr>
+              <a:t/>
+            </a:r>
           </a:p>
         </p:txBody>
       </p:sp>
@@ -16165,94 +15538,8 @@
                 </a:solidFill>
                 <a:latin typeface="Calibri" panose="020F0502020204030204" pitchFamily="34" charset="0"/>
               </a:rPr>
-              <a:t>Note :</a:t>
+              <a:t>Note : axe de gauche – les économies asiatiques dynamiques incluent la Malaisie, les Philippines, Singapour, la Thaïlande, le Vietnam, le Taipei chinois et Hong Kong.Axe de droite – les services aux entreprises incluent la R-D, les TIC, l'immobilier et d'autres activités de services aux entreprises. Les services financiers incluent l'intermédiation financière, l'assurance, les fonds de pension et d'autres activités financières. </a:t>
             </a:r>
-            <a:r>
-              <a:rPr lang="en-GB" sz="1100" i="1" dirty="0" smtClean="0">
-                <a:solidFill>
-                  <a:srgbClr val="171717"/>
-                </a:solidFill>
-                <a:latin typeface="Calibri" panose="020F0502020204030204" pitchFamily="34" charset="0"/>
-              </a:rPr>
-              <a:t> </a:t>
-            </a:r>
-            <a:r>
-              <a:rPr lang="en-GB" sz="1100" dirty="0" smtClean="0">
-                <a:solidFill>
-                  <a:srgbClr val="171717"/>
-                </a:solidFill>
-                <a:latin typeface="Calibri" panose="020F0502020204030204" pitchFamily="34" charset="0"/>
-              </a:rPr>
-              <a:t>Axe gauche – </a:t>
-            </a:r>
-            <a:r>
-              <a:rPr lang="en-GB" sz="1100" dirty="0">
-                <a:solidFill>
-                  <a:srgbClr val="171717"/>
-                </a:solidFill>
-                <a:latin typeface="Calibri" panose="020F0502020204030204" pitchFamily="34" charset="0"/>
-              </a:rPr>
-              <a:t>Les économies asiatiques dynamiques comprennent la Malaisie, les Philippines, Singapour, la Thaïlande, le Vietnam, le Taipei chinois et Hong Kong</a:t>
-            </a:r>
-            <a:r>
-              <a:rPr lang="en-GB" sz="1100" dirty="0" smtClean="0">
-                <a:solidFill>
-                  <a:srgbClr val="171717"/>
-                </a:solidFill>
-                <a:latin typeface="Calibri" panose="020F0502020204030204" pitchFamily="34" charset="0"/>
-              </a:rPr>
-              <a:t>.</a:t>
-            </a:r>
-            <a:r>
-              <a:rPr lang="en-US" sz="1100" dirty="0" smtClean="0">
-                <a:solidFill>
-                  <a:srgbClr val="171717"/>
-                </a:solidFill>
-                <a:latin typeface="Calibri" panose="020F0502020204030204" pitchFamily="34" charset="0"/>
-              </a:rPr>
-              <a:t/>
-            </a:r>
-            <a:br>
-              <a:rPr lang="en-US" sz="1100" dirty="0" smtClean="0">
-                <a:solidFill>
-                  <a:srgbClr val="171717"/>
-                </a:solidFill>
-                <a:latin typeface="Calibri" panose="020F0502020204030204" pitchFamily="34" charset="0"/>
-              </a:rPr>
-            </a:br>
-            <a:r>
-              <a:rPr lang="en-US" sz="1100" dirty="0" smtClean="0">
-                <a:solidFill>
-                  <a:srgbClr val="171717"/>
-                </a:solidFill>
-                <a:latin typeface="Calibri" panose="020F0502020204030204" pitchFamily="34" charset="0"/>
-              </a:rPr>
-              <a:t>Axe droit – Les services aux </a:t>
-            </a:r>
-            <a:r>
-              <a:rPr lang="en-US" sz="1100" dirty="0">
-                <a:solidFill>
-                  <a:srgbClr val="171717"/>
-                </a:solidFill>
-                <a:latin typeface="Calibri" panose="020F0502020204030204" pitchFamily="34" charset="0"/>
-              </a:rPr>
-              <a:t>entreprises </a:t>
-            </a:r>
-            <a:r>
-              <a:rPr lang="en-US" sz="1100" dirty="0" smtClean="0">
-                <a:solidFill>
-                  <a:srgbClr val="171717"/>
-                </a:solidFill>
-                <a:latin typeface="Calibri" panose="020F0502020204030204" pitchFamily="34" charset="0"/>
-              </a:rPr>
-              <a:t>comprennent la R&amp;D, les TIC, l'immobilier et autres activités commerciales. Les services financiers comprennent l'intermédiation financière, les assurances, les fonds de pension et autres activités financières. </a:t>
-            </a:r>
-            <a:endParaRPr lang="en-GB" sz="1100" dirty="0" smtClean="0">
-              <a:solidFill>
-                <a:srgbClr val="171717"/>
-              </a:solidFill>
-              <a:latin typeface="Calibri" panose="020F0502020204030204" pitchFamily="34" charset="0"/>
-            </a:endParaRPr>
           </a:p>
           <a:p>
             <a:r>
@@ -16262,68 +15549,8 @@
                 </a:solidFill>
                 <a:latin typeface="Calibri" panose="020F0502020204030204" pitchFamily="34" charset="0"/>
               </a:rPr>
-              <a:t>Source</a:t>
+              <a:t>Source : base de données OCDE-OMC Trade in Value Added (TiVA) ; base de données UN Comtrade ; et calculs de l'OCDE.</a:t>
             </a:r>
-            <a:r>
-              <a:rPr lang="en-GB" sz="1100" dirty="0">
-                <a:solidFill>
-                  <a:srgbClr val="171717"/>
-                </a:solidFill>
-                <a:latin typeface="Calibri" panose="020F0502020204030204" pitchFamily="34" charset="0"/>
-              </a:rPr>
-              <a:t>:</a:t>
-            </a:r>
-            <a:r>
-              <a:rPr lang="en-US" sz="1100" i="1" dirty="0">
-                <a:solidFill>
-                  <a:srgbClr val="171717"/>
-                </a:solidFill>
-                <a:latin typeface="Calibri" panose="020F0502020204030204" pitchFamily="34" charset="0"/>
-              </a:rPr>
-              <a:t> </a:t>
-            </a:r>
-            <a:r>
-              <a:rPr lang="en-US" sz="1100" dirty="0" smtClean="0">
-                <a:solidFill>
-                  <a:srgbClr val="171717"/>
-                </a:solidFill>
-                <a:latin typeface="Calibri" panose="020F0502020204030204" pitchFamily="34" charset="0"/>
-              </a:rPr>
-              <a:t>OCDE-OMC base de données sur le commerce en valeur ajoutée (TiVA)</a:t>
-            </a:r>
-            <a:r>
-              <a:rPr lang="en-US" sz="1100" dirty="0">
-                <a:solidFill>
-                  <a:srgbClr val="171717"/>
-                </a:solidFill>
-                <a:latin typeface="Calibri" panose="020F0502020204030204" pitchFamily="34" charset="0"/>
-              </a:rPr>
-              <a:t> ; UN </a:t>
-            </a:r>
-            <a:r>
-              <a:rPr lang="en-US" sz="1100" dirty="0" smtClean="0">
-                <a:solidFill>
-                  <a:srgbClr val="171717"/>
-                </a:solidFill>
-                <a:latin typeface="Calibri" panose="020F0502020204030204" pitchFamily="34" charset="0"/>
-              </a:rPr>
-              <a:t>base de données Comtrade ; et </a:t>
-            </a:r>
-            <a:r>
-              <a:rPr lang="en-US" sz="1100" dirty="0">
-                <a:solidFill>
-                  <a:srgbClr val="171717"/>
-                </a:solidFill>
-                <a:latin typeface="Calibri" panose="020F0502020204030204" pitchFamily="34" charset="0"/>
-              </a:rPr>
-              <a:t>calculs de l'OCDE.</a:t>
-            </a:r>
-            <a:endParaRPr lang="en-GB" sz="1100" dirty="0">
-              <a:solidFill>
-                <a:srgbClr val="171717"/>
-              </a:solidFill>
-              <a:latin typeface="Calibri" panose="020F0502020204030204" pitchFamily="34" charset="0"/>
-            </a:endParaRPr>
           </a:p>
         </p:txBody>
       </p:sp>
@@ -16448,37 +15675,14 @@
           <a:bodyPr/>
           <a:lstStyle/>
           <a:p>
-            <a:pPr algn="ctr">
-              <a:defRPr/>
-            </a:pPr>
             <a:r>
               <a:rPr lang="en-US" sz="2800" b="1" dirty="0" smtClean="0">
                 <a:solidFill>
                   <a:schemeClr val="tx2"/>
                 </a:solidFill>
               </a:rPr>
-              <a:t>Les pertes d'emplois se sont concentrées sur </a:t>
+              <a:t>Les pertes d'emplois ont touché surtout les personnes ayant des compétences de niveau intermédiaire</a:t>
             </a:r>
-            <a:br>
-              <a:rPr lang="en-US" sz="2800" b="1" dirty="0" smtClean="0">
-                <a:solidFill>
-                  <a:schemeClr val="tx2"/>
-                </a:solidFill>
-              </a:rPr>
-            </a:br>
-            <a:r>
-              <a:rPr lang="en-US" sz="2800" b="1" dirty="0" smtClean="0">
-                <a:solidFill>
-                  <a:schemeClr val="tx2"/>
-                </a:solidFill>
-              </a:rPr>
-              <a:t>les personnes ayant des compétences intermédiaires</a:t>
-            </a:r>
-            <a:endParaRPr lang="en-GB" sz="2800" b="1" dirty="0">
-              <a:solidFill>
-                <a:schemeClr val="tx2"/>
-              </a:solidFill>
-            </a:endParaRPr>
           </a:p>
         </p:txBody>
       </p:sp>
@@ -16511,7 +15715,7 @@
                 </a:solidFill>
                 <a:latin typeface="Calibri" panose="020F0502020204030204" pitchFamily="34" charset="0"/>
               </a:rPr>
-              <a:t>Note : l'OCDE représente la moyenne non pondérée de 24 pays. Pour le Japon, 1995-2010.</a:t>
+              <a:t>Note : OCDE correspond à la moyenne non pondérée de 24 pays. Pour le Japon, 1995-2010.</a:t>
             </a:r>
           </a:p>
           <a:p>
@@ -16522,139 +15726,8 @@
                 </a:solidFill>
                 <a:latin typeface="Calibri" panose="020F0502020204030204" pitchFamily="34" charset="0"/>
               </a:rPr>
-              <a:t>Source</a:t>
+              <a:t>Source : OCDE Employment Outlook 2017 ; enquête sur les forces de travail de l'Union européenne ; enquêtes sur les forces de travail pour le Canada, le Japon et les États-Unis ; et calculs de l'OCDE.</a:t>
             </a:r>
-            <a:r>
-              <a:rPr lang="en-GB" sz="1200" dirty="0">
-                <a:solidFill>
-                  <a:srgbClr val="171717"/>
-                </a:solidFill>
-                <a:latin typeface="Calibri" panose="020F0502020204030204" pitchFamily="34" charset="0"/>
-              </a:rPr>
-              <a:t>:</a:t>
-            </a:r>
-            <a:r>
-              <a:rPr lang="en-US" sz="1200" dirty="0">
-                <a:solidFill>
-                  <a:srgbClr val="171717"/>
-                </a:solidFill>
-                <a:latin typeface="Calibri" panose="020F0502020204030204" pitchFamily="34" charset="0"/>
-              </a:rPr>
-              <a:t> </a:t>
-            </a:r>
-            <a:r>
-              <a:rPr lang="en-US" sz="1200" dirty="0" smtClean="0">
-                <a:solidFill>
-                  <a:srgbClr val="171717"/>
-                </a:solidFill>
-                <a:latin typeface="Calibri" panose="020F0502020204030204" pitchFamily="34" charset="0"/>
-              </a:rPr>
-              <a:t>OCDE Perspectives de l'emploi 2017 ; Enquête sur les forces de travail de l'Union européenne ; </a:t>
-            </a:r>
-            <a:r>
-              <a:rPr lang="en-US" sz="1200" dirty="0">
-                <a:solidFill>
-                  <a:srgbClr val="171717"/>
-                </a:solidFill>
-                <a:latin typeface="Calibri" panose="020F0502020204030204" pitchFamily="34" charset="0"/>
-              </a:rPr>
-              <a:t>enquête sur la population </a:t>
-            </a:r>
-            <a:r>
-              <a:rPr lang="en-US" sz="1200" dirty="0" smtClean="0">
-                <a:solidFill>
-                  <a:srgbClr val="171717"/>
-                </a:solidFill>
-                <a:latin typeface="Calibri" panose="020F0502020204030204" pitchFamily="34" charset="0"/>
-              </a:rPr>
-              <a:t>active ; enquêtes sur la </a:t>
-            </a:r>
-            <a:r>
-              <a:rPr lang="en-US" sz="1200" dirty="0">
-                <a:solidFill>
-                  <a:srgbClr val="171717"/>
-                </a:solidFill>
-                <a:latin typeface="Calibri" panose="020F0502020204030204" pitchFamily="34" charset="0"/>
-              </a:rPr>
-              <a:t>population active pour </a:t>
-            </a:r>
-            <a:r>
-              <a:rPr lang="en-US" sz="1200" dirty="0" smtClean="0">
-                <a:solidFill>
-                  <a:srgbClr val="171717"/>
-                </a:solidFill>
-                <a:latin typeface="Calibri" panose="020F0502020204030204" pitchFamily="34" charset="0"/>
-              </a:rPr>
-              <a:t>le Canada, </a:t>
-            </a:r>
-            <a:r>
-              <a:rPr lang="en-US" sz="1200" dirty="0">
-                <a:solidFill>
-                  <a:srgbClr val="171717"/>
-                </a:solidFill>
-                <a:latin typeface="Calibri" panose="020F0502020204030204" pitchFamily="34" charset="0"/>
-              </a:rPr>
-              <a:t>le Japon </a:t>
-            </a:r>
-            <a:r>
-              <a:rPr lang="en-US" sz="1200" dirty="0" smtClean="0">
-                <a:solidFill>
-                  <a:srgbClr val="171717"/>
-                </a:solidFill>
-                <a:latin typeface="Calibri" panose="020F0502020204030204" pitchFamily="34" charset="0"/>
-              </a:rPr>
-              <a:t/>
-            </a:r>
-            <a:br>
-              <a:rPr lang="en-US" sz="1200" dirty="0" smtClean="0">
-                <a:solidFill>
-                  <a:srgbClr val="171717"/>
-                </a:solidFill>
-                <a:latin typeface="Calibri" panose="020F0502020204030204" pitchFamily="34" charset="0"/>
-              </a:rPr>
-            </a:br>
-            <a:r>
-              <a:rPr lang="en-US" sz="1200" dirty="0" smtClean="0">
-                <a:solidFill>
-                  <a:srgbClr val="171717"/>
-                </a:solidFill>
-                <a:latin typeface="Calibri" panose="020F0502020204030204" pitchFamily="34" charset="0"/>
-              </a:rPr>
-              <a:t>et </a:t>
-            </a:r>
-            <a:r>
-              <a:rPr lang="en-US" sz="1200" dirty="0">
-                <a:solidFill>
-                  <a:srgbClr val="171717"/>
-                </a:solidFill>
-                <a:latin typeface="Calibri" panose="020F0502020204030204" pitchFamily="34" charset="0"/>
-              </a:rPr>
-              <a:t>les États-</a:t>
-            </a:r>
-            <a:r>
-              <a:rPr lang="en-US" sz="1200" dirty="0" smtClean="0">
-                <a:solidFill>
-                  <a:srgbClr val="171717"/>
-                </a:solidFill>
-                <a:latin typeface="Calibri" panose="020F0502020204030204" pitchFamily="34" charset="0"/>
-              </a:rPr>
-              <a:t>Unis</a:t>
-            </a:r>
-            <a:r>
-              <a:rPr lang="en-US" sz="1200" dirty="0">
-                <a:solidFill>
-                  <a:srgbClr val="171717"/>
-                </a:solidFill>
-                <a:latin typeface="Calibri" panose="020F0502020204030204" pitchFamily="34" charset="0"/>
-              </a:rPr>
-              <a:t> ; et calculs de l'OCDE.</a:t>
-            </a:r>
-            <a:endParaRPr lang="en-GB" sz="1200" dirty="0">
-              <a:solidFill>
-                <a:srgbClr val="171717"/>
-              </a:solidFill>
-              <a:latin typeface="Calibri" panose="020F0502020204030204" pitchFamily="34" charset="0"/>
-            </a:endParaRPr>
           </a:p>
         </p:txBody>
       </p:sp>
@@ -16680,7 +15753,6 @@
           </a:bodyPr>
           <a:lstStyle/>
           <a:p>
-            <a:pPr lvl="0" algn="ctr"/>
             <a:r>
               <a:rPr lang="en-US" sz="2000" b="1" dirty="0" smtClean="0">
                 <a:solidFill>
@@ -16694,69 +15766,17 @@
             </a:r>
           </a:p>
           <a:p>
-            <a:pPr algn="ctr"/>
             <a:r>
-              <a:rPr lang="en-US" sz="1200" i="1" dirty="0">
+              <a:rPr lang="en-US" sz="2000" b="1" dirty="0" smtClean="0">
                 <a:solidFill>
-                  <a:srgbClr val="000000"/>
+                  <a:schemeClr val="bg2">
+                    <a:lumMod val="10000"/>
+                  </a:schemeClr>
                 </a:solidFill>
-                <a:latin typeface="Calibri" panose="020F0502020204030204" pitchFamily="34" charset="0"/>
+                <a:latin typeface="Calibri" pitchFamily="34" charset="0"/>
               </a:rPr>
-              <a:t>Variation </a:t>
+              <a:t>Variation de la part dans l'emploi total par niveau de compétence, 1995-2015</a:t>
             </a:r>
-            <a:r>
-              <a:rPr lang="en-US" sz="1200" i="1" dirty="0" smtClean="0">
-                <a:solidFill>
-                  <a:srgbClr val="000000"/>
-                </a:solidFill>
-                <a:latin typeface="Calibri" panose="020F0502020204030204" pitchFamily="34" charset="0"/>
-              </a:rPr>
-              <a:t>de la part </a:t>
-            </a:r>
-            <a:r>
-              <a:rPr lang="en-US" sz="1200" i="1" dirty="0">
-                <a:solidFill>
-                  <a:srgbClr val="000000"/>
-                </a:solidFill>
-                <a:latin typeface="Calibri" panose="020F0502020204030204" pitchFamily="34" charset="0"/>
-              </a:rPr>
-              <a:t>de l'emploi total </a:t>
-            </a:r>
-            <a:r>
-              <a:rPr lang="en-US" sz="1200" i="1" dirty="0" smtClean="0">
-                <a:solidFill>
-                  <a:srgbClr val="000000"/>
-                </a:solidFill>
-                <a:latin typeface="Calibri" panose="020F0502020204030204" pitchFamily="34" charset="0"/>
-              </a:rPr>
-              <a:t>par niveau de </a:t>
-            </a:r>
-            <a:r>
-              <a:rPr lang="en-US" sz="1200" i="1" dirty="0">
-                <a:solidFill>
-                  <a:srgbClr val="000000"/>
-                </a:solidFill>
-                <a:latin typeface="Calibri" panose="020F0502020204030204" pitchFamily="34" charset="0"/>
-              </a:rPr>
-              <a:t>compétences, </a:t>
-            </a:r>
-            <a:r>
-              <a:rPr lang="en-US" sz="1200" i="1" dirty="0" smtClean="0">
-                <a:solidFill>
-                  <a:srgbClr val="000000"/>
-                </a:solidFill>
-                <a:latin typeface="Calibri" panose="020F0502020204030204" pitchFamily="34" charset="0"/>
-              </a:rPr>
-              <a:t>1995-2015</a:t>
-            </a:r>
-            <a:endParaRPr lang="en-US" sz="1200" i="1" dirty="0">
-              <a:solidFill>
-                <a:schemeClr val="bg2">
-                  <a:lumMod val="10000"/>
-                </a:schemeClr>
-              </a:solidFill>
-              <a:latin typeface="Calibri" pitchFamily="34" charset="0"/>
-            </a:endParaRPr>
           </a:p>
         </p:txBody>
       </p:sp>
@@ -16930,9 +15950,6 @@
           </a:bodyPr>
           <a:lstStyle/>
           <a:p>
-            <a:pPr algn="ctr">
-              <a:defRPr/>
-            </a:pPr>
             <a:r>
               <a:rPr lang="en-US" sz="2800" b="1" dirty="0">
                 <a:solidFill>
@@ -16940,49 +15957,8 @@
                 </a:solidFill>
                 <a:latin typeface="+mj-lt"/>
               </a:rPr>
-              <a:t>Les économies avancées ont progressé dans la </a:t>
+              <a:t>Les économies avancées ont progressé dans la chaîne de valeur, mais les économies émergentes progressent elles aussi</a:t>
             </a:r>
-            <a:r>
-              <a:rPr lang="en-US" sz="2800" b="1" dirty="0" smtClean="0">
-                <a:solidFill>
-                  <a:schemeClr val="tx2"/>
-                </a:solidFill>
-                <a:latin typeface="+mj-lt"/>
-              </a:rPr>
-              <a:t/>
-            </a:r>
-            <a:br>
-              <a:rPr lang="en-US" sz="2800" b="1" dirty="0" smtClean="0">
-                <a:solidFill>
-                  <a:schemeClr val="tx2"/>
-                </a:solidFill>
-                <a:latin typeface="+mj-lt"/>
-              </a:rPr>
-            </a:br>
-            <a:r>
-              <a:rPr lang="en-US" sz="2800" b="1" dirty="0" smtClean="0">
-                <a:solidFill>
-                  <a:schemeClr val="tx2"/>
-                </a:solidFill>
-                <a:latin typeface="+mj-lt"/>
-              </a:rPr>
-              <a:t>chaîne de </a:t>
-            </a:r>
-            <a:r>
-              <a:rPr lang="en-US" sz="2800" b="1" dirty="0">
-                <a:solidFill>
-                  <a:schemeClr val="tx2"/>
-                </a:solidFill>
-                <a:latin typeface="+mj-lt"/>
-              </a:rPr>
-              <a:t>valeur, mais les EME progressent également</a:t>
-            </a:r>
-            <a:endParaRPr lang="en-GB" sz="2800" b="1" dirty="0">
-              <a:solidFill>
-                <a:schemeClr val="tx2"/>
-              </a:solidFill>
-              <a:latin typeface="+mj-lt"/>
-            </a:endParaRPr>
           </a:p>
         </p:txBody>
       </p:sp>
@@ -17015,149 +15991,8 @@
                 </a:solidFill>
                 <a:latin typeface="Calibri" panose="020F0502020204030204" pitchFamily="34" charset="0"/>
               </a:rPr>
-              <a:t>Note : En termes nominaux. Le moins complexe est le 1</a:t>
+              <a:t>Note : en termes nominaux. Les produits les moins complexes correspondent au 1er quartile des produits par complexité (p. ex. crayons de couleur), les plus complexes au 4e quartile (p. ex. équipements médicaux), hors principales matières premières. Les économies asiatiques dynamiques incluent la Malaisie, les Philippines, Singapour, la Thaïlande, le Vietnam, le Taipei chinois et Hong Kong. L'Europe correspond à la moyenne non pondérée de la Tchéquie, de la France, de l'Allemagne, de l'Irlande, de l'Italie, de la Pologne, du Portugal et du Royaume-Uni.</a:t>
             </a:r>
-            <a:r>
-              <a:rPr lang="en-GB" sz="1100" baseline="30000" dirty="0" smtClean="0">
-                <a:solidFill>
-                  <a:srgbClr val="171717"/>
-                </a:solidFill>
-                <a:latin typeface="Calibri" panose="020F0502020204030204" pitchFamily="34" charset="0"/>
-              </a:rPr>
-              <a:t>er</a:t>
-            </a:r>
-            <a:r>
-              <a:rPr lang="en-GB" sz="1100" dirty="0" smtClean="0">
-                <a:solidFill>
-                  <a:srgbClr val="171717"/>
-                </a:solidFill>
-                <a:latin typeface="Calibri" panose="020F0502020204030204" pitchFamily="34" charset="0"/>
-              </a:rPr>
-              <a:t> </a:t>
-            </a:r>
-            <a:r>
-              <a:rPr lang="en-GB" sz="1100" dirty="0">
-                <a:solidFill>
-                  <a:srgbClr val="171717"/>
-                </a:solidFill>
-                <a:latin typeface="Calibri" panose="020F0502020204030204" pitchFamily="34" charset="0"/>
-              </a:rPr>
-              <a:t>q</a:t>
-            </a:r>
-            <a:r>
-              <a:rPr lang="en-GB" sz="1100" dirty="0" smtClean="0">
-                <a:solidFill>
-                  <a:srgbClr val="171717"/>
-                </a:solidFill>
-                <a:latin typeface="Calibri" panose="020F0502020204030204" pitchFamily="34" charset="0"/>
-              </a:rPr>
-              <a:t>uartile de produits par complexité (par ex. crayons de couleur), le plus </a:t>
-            </a:r>
-            <a:r>
-              <a:rPr lang="en-GB" sz="1100" dirty="0">
-                <a:solidFill>
-                  <a:srgbClr val="171717"/>
-                </a:solidFill>
-                <a:latin typeface="Calibri" panose="020F0502020204030204" pitchFamily="34" charset="0"/>
-              </a:rPr>
-              <a:t>complexe </a:t>
-            </a:r>
-            <a:r>
-              <a:rPr lang="en-GB" sz="1100" dirty="0" smtClean="0">
-                <a:solidFill>
-                  <a:srgbClr val="171717"/>
-                </a:solidFill>
-                <a:latin typeface="Calibri" panose="020F0502020204030204" pitchFamily="34" charset="0"/>
-              </a:rPr>
-              <a:t>est le 4</a:t>
-            </a:r>
-            <a:r>
-              <a:rPr lang="en-GB" sz="1100" baseline="30000" dirty="0" smtClean="0">
-                <a:solidFill>
-                  <a:srgbClr val="171717"/>
-                </a:solidFill>
-                <a:latin typeface="Calibri" panose="020F0502020204030204" pitchFamily="34" charset="0"/>
-              </a:rPr>
-              <a:t>e</a:t>
-            </a:r>
-            <a:r>
-              <a:rPr lang="en-GB" sz="1100" dirty="0" smtClean="0">
-                <a:solidFill>
-                  <a:srgbClr val="171717"/>
-                </a:solidFill>
-                <a:latin typeface="Calibri" panose="020F0502020204030204" pitchFamily="34" charset="0"/>
-              </a:rPr>
-              <a:t> quartile (par ex. équipements médicaux), hors principales matières premières. Les économies asiatiques dynamiques comprennent </a:t>
-            </a:r>
-            <a:r>
-              <a:rPr lang="en-US" sz="1100" dirty="0" smtClean="0">
-                <a:solidFill>
-                  <a:srgbClr val="171717"/>
-                </a:solidFill>
-                <a:latin typeface="Calibri" panose="020F0502020204030204" pitchFamily="34" charset="0"/>
-              </a:rPr>
-              <a:t>la Malaisie</a:t>
-            </a:r>
-            <a:r>
-              <a:rPr lang="en-US" sz="1100" dirty="0">
-                <a:solidFill>
-                  <a:srgbClr val="171717"/>
-                </a:solidFill>
-                <a:latin typeface="Calibri" panose="020F0502020204030204" pitchFamily="34" charset="0"/>
-              </a:rPr>
-              <a:t>, les Philippines, Singapour, </a:t>
-            </a:r>
-            <a:r>
-              <a:rPr lang="en-US" sz="1100" dirty="0" smtClean="0">
-                <a:solidFill>
-                  <a:srgbClr val="171717"/>
-                </a:solidFill>
-                <a:latin typeface="Calibri" panose="020F0502020204030204" pitchFamily="34" charset="0"/>
-              </a:rPr>
-              <a:t>la Thaïlande, le Vietnam</a:t>
-            </a:r>
-            <a:r>
-              <a:rPr lang="en-US" sz="1100" dirty="0">
-                <a:solidFill>
-                  <a:srgbClr val="171717"/>
-                </a:solidFill>
-                <a:latin typeface="Calibri" panose="020F0502020204030204" pitchFamily="34" charset="0"/>
-              </a:rPr>
-              <a:t>, le Taipei </a:t>
-            </a:r>
-            <a:r>
-              <a:rPr lang="en-US" sz="1100" dirty="0" smtClean="0">
-                <a:solidFill>
-                  <a:srgbClr val="171717"/>
-                </a:solidFill>
-                <a:latin typeface="Calibri" panose="020F0502020204030204" pitchFamily="34" charset="0"/>
-              </a:rPr>
-              <a:t>chinois et </a:t>
-            </a:r>
-            <a:r>
-              <a:rPr lang="en-US" sz="1100" dirty="0">
-                <a:solidFill>
-                  <a:srgbClr val="171717"/>
-                </a:solidFill>
-                <a:latin typeface="Calibri" panose="020F0502020204030204" pitchFamily="34" charset="0"/>
-              </a:rPr>
-              <a:t>Hong </a:t>
-            </a:r>
-            <a:r>
-              <a:rPr lang="en-US" sz="1100" dirty="0" smtClean="0">
-                <a:solidFill>
-                  <a:srgbClr val="171717"/>
-                </a:solidFill>
-                <a:latin typeface="Calibri" panose="020F0502020204030204" pitchFamily="34" charset="0"/>
-              </a:rPr>
-              <a:t>Kong. L'Europe est la moyenne non pondérée de la République tchèque, de la France, de l'Allemagne, de l'Irlande, de l'Italie, de la Pologne, du Portugal et du Royaume-Uni.</a:t>
-            </a:r>
-            <a:endParaRPr lang="en-GB" sz="1100" dirty="0" smtClean="0">
-              <a:solidFill>
-                <a:srgbClr val="171717"/>
-              </a:solidFill>
-              <a:latin typeface="Calibri" panose="020F0502020204030204" pitchFamily="34" charset="0"/>
-            </a:endParaRPr>
           </a:p>
           <a:p>
             <a:r>
@@ -17167,41 +16002,8 @@
                 </a:solidFill>
                 <a:latin typeface="Calibri" panose="020F0502020204030204" pitchFamily="34" charset="0"/>
               </a:rPr>
-              <a:t>Source</a:t>
+              <a:t>Source : base de données UN Comtrade ; et calculs de l'OCDE.</a:t>
             </a:r>
-            <a:r>
-              <a:rPr lang="en-GB" sz="1100" dirty="0">
-                <a:solidFill>
-                  <a:srgbClr val="171717"/>
-                </a:solidFill>
-                <a:latin typeface="Calibri" panose="020F0502020204030204" pitchFamily="34" charset="0"/>
-              </a:rPr>
-              <a:t>:</a:t>
-            </a:r>
-            <a:r>
-              <a:rPr lang="en-US" sz="1100" i="1" dirty="0">
-                <a:solidFill>
-                  <a:srgbClr val="171717"/>
-                </a:solidFill>
-                <a:latin typeface="Calibri" panose="020F0502020204030204" pitchFamily="34" charset="0"/>
-              </a:rPr>
-              <a:t> </a:t>
-            </a:r>
-            <a:r>
-              <a:rPr lang="en-US" sz="1100" dirty="0" smtClean="0">
-                <a:solidFill>
-                  <a:srgbClr val="171717"/>
-                </a:solidFill>
-                <a:latin typeface="Calibri" panose="020F0502020204030204" pitchFamily="34" charset="0"/>
-              </a:rPr>
-              <a:t>base de données UN Comtrade ; et calculs de l'OCDE.</a:t>
-            </a:r>
-            <a:endParaRPr lang="en-GB" sz="1100" dirty="0">
-              <a:solidFill>
-                <a:srgbClr val="171717"/>
-              </a:solidFill>
-              <a:latin typeface="Calibri" panose="020F0502020204030204" pitchFamily="34" charset="0"/>
-            </a:endParaRPr>
           </a:p>
         </p:txBody>
       </p:sp>
@@ -17262,7 +16064,6 @@
           </a:bodyPr>
           <a:lstStyle/>
           <a:p>
-            <a:pPr lvl="0" algn="ctr"/>
             <a:r>
               <a:rPr lang="en-US" sz="2000" b="1" dirty="0" smtClean="0">
                 <a:solidFill>
@@ -17272,29 +16073,7 @@
                 </a:solidFill>
                 <a:latin typeface="Calibri" pitchFamily="34" charset="0"/>
               </a:rPr>
-              <a:t>Part des exportations de </a:t>
-            </a:r>
-            <a:r>
-              <a:rPr lang="en-US" sz="2000" b="1" dirty="0">
-                <a:solidFill>
-                  <a:schemeClr val="bg2">
-                    <a:lumMod val="10000"/>
-                  </a:schemeClr>
-                </a:solidFill>
-                <a:latin typeface="Calibri" pitchFamily="34" charset="0"/>
-              </a:rPr>
-              <a:t>marchandises par </a:t>
-            </a:r>
-            <a:r>
-              <a:rPr lang="en-US" sz="2000" b="1" dirty="0" smtClean="0">
-                <a:solidFill>
-                  <a:schemeClr val="bg2">
-                    <a:lumMod val="10000"/>
-                  </a:schemeClr>
-                </a:solidFill>
-                <a:latin typeface="Calibri" pitchFamily="34" charset="0"/>
-              </a:rPr>
-              <a:t>complexité</a:t>
+              <a:t>Part des biens exportés par niveau de complexité</a:t>
             </a:r>
           </a:p>
         </p:txBody>
@@ -17420,7 +16199,6 @@
           <a:bodyPr/>
           <a:lstStyle/>
           <a:p>
-            <a:pPr algn="ctr"/>
             <a:r>
               <a:rPr lang="en-GB" sz="2800" b="1" dirty="0" smtClean="0">
                 <a:solidFill>
@@ -17429,34 +16207,8 @@
                 <a:ea typeface="+mn-ea"/>
                 <a:cs typeface="+mn-cs"/>
               </a:rPr>
-              <a:t>Pertes d'emplois industriels et rôle de la </a:t>
+              <a:t>Pertes d'emplois manufacturiers et rôle de la technologie et des préférences des consommateurs face au commerce</a:t>
             </a:r>
-            <a:br>
-              <a:rPr lang="en-GB" sz="2800" b="1" dirty="0" smtClean="0">
-                <a:solidFill>
-                  <a:schemeClr val="tx2"/>
-                </a:solidFill>
-                <a:ea typeface="+mn-ea"/>
-                <a:cs typeface="+mn-cs"/>
-              </a:rPr>
-            </a:br>
-            <a:r>
-              <a:rPr lang="en-GB" sz="2800" b="1" dirty="0" smtClean="0">
-                <a:solidFill>
-                  <a:schemeClr val="tx2"/>
-                </a:solidFill>
-                <a:ea typeface="+mn-ea"/>
-                <a:cs typeface="+mn-cs"/>
-              </a:rPr>
-              <a:t>technologie  Préférences des consommateurs vs commerce</a:t>
-            </a:r>
-            <a:endParaRPr lang="en-GB" sz="2800" b="1" dirty="0">
-              <a:solidFill>
-                <a:schemeClr val="tx2"/>
-              </a:solidFill>
-              <a:ea typeface="+mn-ea"/>
-              <a:cs typeface="+mn-cs"/>
-            </a:endParaRPr>
           </a:p>
         </p:txBody>
       </p:sp>
@@ -17489,58 +16241,8 @@
                 </a:solidFill>
                 <a:latin typeface="Calibri" panose="020F0502020204030204" pitchFamily="34" charset="0"/>
               </a:rPr>
-              <a:t/>
+              <a:t>Note : décomposition fondée sur une estimation par régression. Chaque facteur repose sur la variation observée sur la période. La technologie et les préférences des consommateurs incluent l'investissement en TIC et en machines, les variations de la part de la consommation manufacturière et des effets spécifiques à la période.</a:t>
             </a:r>
-            <a:br>
-              <a:rPr lang="en-GB" sz="1100" dirty="0" smtClean="0">
-                <a:solidFill>
-                  <a:srgbClr val="171717"/>
-                </a:solidFill>
-                <a:latin typeface="Calibri" panose="020F0502020204030204" pitchFamily="34" charset="0"/>
-              </a:rPr>
-            </a:br>
-            <a:r>
-              <a:rPr lang="en-GB" sz="1100" dirty="0" smtClean="0">
-                <a:solidFill>
-                  <a:srgbClr val="171717"/>
-                </a:solidFill>
-                <a:latin typeface="Calibri" panose="020F0502020204030204" pitchFamily="34" charset="0"/>
-              </a:rPr>
-              <a:t>Note : </a:t>
-            </a:r>
-            <a:r>
-              <a:rPr lang="en-US" sz="1100" dirty="0" smtClean="0">
-                <a:solidFill>
-                  <a:srgbClr val="171717"/>
-                </a:solidFill>
-                <a:latin typeface="Calibri" panose="020F0502020204030204" pitchFamily="34" charset="0"/>
-              </a:rPr>
-              <a:t>Décomposition </a:t>
-            </a:r>
-            <a:r>
-              <a:rPr lang="en-US" sz="1100" dirty="0">
-                <a:solidFill>
-                  <a:srgbClr val="171717"/>
-                </a:solidFill>
-                <a:latin typeface="Calibri" panose="020F0502020204030204" pitchFamily="34" charset="0"/>
-              </a:rPr>
-              <a:t>basée sur </a:t>
-            </a:r>
-            <a:r>
-              <a:rPr lang="en-US" sz="1100" dirty="0" smtClean="0">
-                <a:solidFill>
-                  <a:srgbClr val="171717"/>
-                </a:solidFill>
-                <a:latin typeface="Calibri" panose="020F0502020204030204" pitchFamily="34" charset="0"/>
-              </a:rPr>
-              <a:t>une estimation par régression. Chaque facteur est calculé sur la variation au cours de la période. La technologie et les préférences des consommateurs comprennent les investissements en TIC et en machines, les variations de la part de consommation manufacturière et des effets spécifiques dans le temps.</a:t>
-            </a:r>
-            <a:endParaRPr lang="en-GB" sz="1100" dirty="0" smtClean="0">
-              <a:solidFill>
-                <a:srgbClr val="171717"/>
-              </a:solidFill>
-              <a:latin typeface="Calibri" panose="020F0502020204030204" pitchFamily="34" charset="0"/>
-            </a:endParaRPr>
           </a:p>
           <a:p>
             <a:r>
@@ -17550,41 +16252,8 @@
                 </a:solidFill>
                 <a:latin typeface="Calibri" panose="020F0502020204030204" pitchFamily="34" charset="0"/>
               </a:rPr>
-              <a:t>Source</a:t>
+              <a:t>Source : base de données de l'OCDE Economic Outlook ; base de données STAN ; et calculs de l'OCDE.</a:t>
             </a:r>
-            <a:r>
-              <a:rPr lang="en-GB" sz="1100" dirty="0">
-                <a:solidFill>
-                  <a:srgbClr val="171717"/>
-                </a:solidFill>
-                <a:latin typeface="Calibri" panose="020F0502020204030204" pitchFamily="34" charset="0"/>
-              </a:rPr>
-              <a:t>:</a:t>
-            </a:r>
-            <a:r>
-              <a:rPr lang="en-US" sz="1100" dirty="0">
-                <a:solidFill>
-                  <a:srgbClr val="171717"/>
-                </a:solidFill>
-                <a:latin typeface="Calibri" panose="020F0502020204030204" pitchFamily="34" charset="0"/>
-              </a:rPr>
-              <a:t> </a:t>
-            </a:r>
-            <a:r>
-              <a:rPr lang="en-US" sz="1100" dirty="0" smtClean="0">
-                <a:solidFill>
-                  <a:srgbClr val="171717"/>
-                </a:solidFill>
-                <a:latin typeface="Calibri" panose="020F0502020204030204" pitchFamily="34" charset="0"/>
-              </a:rPr>
-              <a:t>OCDE base de données des Perspectives économiques ; base de données STAN ; et calculs de l'OCDE.</a:t>
-            </a:r>
-            <a:endParaRPr lang="en-GB" sz="1100" dirty="0">
-              <a:solidFill>
-                <a:srgbClr val="171717"/>
-              </a:solidFill>
-              <a:latin typeface="Calibri" panose="020F0502020204030204" pitchFamily="34" charset="0"/>
-            </a:endParaRPr>
           </a:p>
         </p:txBody>
       </p:sp>
@@ -17610,7 +16279,6 @@
           </a:bodyPr>
           <a:lstStyle/>
           <a:p>
-            <a:pPr lvl="0" algn="ctr"/>
             <a:r>
               <a:rPr lang="en-US" sz="2000" b="1" dirty="0" smtClean="0">
                 <a:solidFill>
@@ -17624,78 +16292,17 @@
             </a:r>
           </a:p>
           <a:p>
-            <a:pPr lvl="0" algn="ctr"/>
             <a:r>
-              <a:rPr lang="en-US" sz="1200" i="1" dirty="0" smtClean="0">
+              <a:rPr lang="en-US" sz="2000" b="1" dirty="0" smtClean="0">
                 <a:solidFill>
-                  <a:srgbClr val="000000"/>
+                  <a:schemeClr val="bg2">
+                    <a:lumMod val="10000"/>
+                  </a:schemeClr>
                 </a:solidFill>
-                <a:latin typeface="Calibri" panose="020F0502020204030204" pitchFamily="34" charset="0"/>
+                <a:latin typeface="Calibri" pitchFamily="34" charset="0"/>
               </a:rPr>
-              <a:t>Variation </a:t>
+              <a:t>Variation de la part dans l'emploi total, moyenne annuelle 1990-2008</a:t>
             </a:r>
-            <a:r>
-              <a:rPr lang="en-US" sz="1200" i="1" dirty="0">
-                <a:solidFill>
-                  <a:srgbClr val="000000"/>
-                </a:solidFill>
-                <a:latin typeface="Calibri" panose="020F0502020204030204" pitchFamily="34" charset="0"/>
-              </a:rPr>
-              <a:t>de la </a:t>
-            </a:r>
-            <a:r>
-              <a:rPr lang="en-US" sz="1200" i="1" dirty="0" smtClean="0">
-                <a:solidFill>
-                  <a:srgbClr val="000000"/>
-                </a:solidFill>
-                <a:latin typeface="Calibri" panose="020F0502020204030204" pitchFamily="34" charset="0"/>
-              </a:rPr>
-              <a:t>part </a:t>
-            </a:r>
-            <a:r>
-              <a:rPr lang="en-US" sz="1200" i="1" dirty="0">
-                <a:solidFill>
-                  <a:srgbClr val="000000"/>
-                </a:solidFill>
-                <a:latin typeface="Calibri" panose="020F0502020204030204" pitchFamily="34" charset="0"/>
-              </a:rPr>
-              <a:t>de </a:t>
-            </a:r>
-            <a:r>
-              <a:rPr lang="en-US" sz="1200" i="1" dirty="0" smtClean="0">
-                <a:solidFill>
-                  <a:srgbClr val="000000"/>
-                </a:solidFill>
-                <a:latin typeface="Calibri" panose="020F0502020204030204" pitchFamily="34" charset="0"/>
-              </a:rPr>
-              <a:t>l'emploi total, </a:t>
-            </a:r>
-            <a:r>
-              <a:rPr lang="en-US" sz="1200" i="1" dirty="0">
-                <a:solidFill>
-                  <a:srgbClr val="000000"/>
-                </a:solidFill>
-                <a:latin typeface="Calibri" panose="020F0502020204030204" pitchFamily="34" charset="0"/>
-              </a:rPr>
-              <a:t>moyenne </a:t>
-            </a:r>
-            <a:r>
-              <a:rPr lang="en-US" sz="1200" i="1" dirty="0" smtClean="0">
-                <a:solidFill>
-                  <a:srgbClr val="000000"/>
-                </a:solidFill>
-                <a:latin typeface="Calibri" panose="020F0502020204030204" pitchFamily="34" charset="0"/>
-              </a:rPr>
-              <a:t>annuelle 1990-2008</a:t>
-            </a:r>
-            <a:endParaRPr lang="en-US" sz="1200" i="1" dirty="0">
-              <a:solidFill>
-                <a:schemeClr val="bg2">
-                  <a:lumMod val="10000"/>
-                </a:schemeClr>
-              </a:solidFill>
-              <a:latin typeface="Calibri" pitchFamily="34" charset="0"/>
-            </a:endParaRPr>
           </a:p>
         </p:txBody>
       </p:sp>
@@ -17828,38 +16435,14 @@
           <a:bodyPr/>
           <a:lstStyle/>
           <a:p>
-            <a:pPr algn="ctr">
-              <a:defRPr/>
-            </a:pPr>
             <a:r>
               <a:rPr lang="en-US" sz="2800" b="1" dirty="0" smtClean="0">
                 <a:solidFill>
                   <a:schemeClr val="tx2"/>
                 </a:solidFill>
               </a:rPr>
-              <a:t>Le recul de l'industrie manufacturière est préoccupant car l'activité est </a:t>
+              <a:t>Le recul de l'industrie manufacturière est important car l'activité est concentrée géographiquement</a:t>
             </a:r>
-            <a:r>
-              <a:rPr lang="en-US" sz="2800" b="1" dirty="0">
-                <a:solidFill>
-                  <a:schemeClr val="tx2"/>
-                </a:solidFill>
-              </a:rPr>
-              <a:t>concentrée </a:t>
-            </a:r>
-            <a:r>
-              <a:rPr lang="en-US" sz="2800" b="1" dirty="0" smtClean="0">
-                <a:solidFill>
-                  <a:schemeClr val="tx2"/>
-                </a:solidFill>
-              </a:rPr>
-              <a:t>régionalement</a:t>
-            </a:r>
-            <a:endParaRPr lang="en-GB" sz="2800" b="1" dirty="0">
-              <a:solidFill>
-                <a:schemeClr val="tx2"/>
-              </a:solidFill>
-            </a:endParaRPr>
           </a:p>
         </p:txBody>
       </p:sp>
@@ -17885,7 +16468,6 @@
           </a:bodyPr>
           <a:lstStyle/>
           <a:p>
-            <a:pPr lvl="0" algn="ctr"/>
             <a:r>
               <a:rPr lang="en-US" sz="2000" b="1" dirty="0" smtClean="0">
                 <a:solidFill>
@@ -17899,9 +16481,8 @@
             </a:r>
           </a:p>
           <a:p>
-            <a:pPr lvl="0" algn="ctr"/>
             <a:r>
-              <a:rPr lang="en-US" sz="1200" i="1" dirty="0">
+              <a:rPr lang="en-US" sz="2000" b="1" dirty="0" smtClean="0">
                 <a:solidFill>
                   <a:schemeClr val="bg2">
                     <a:lumMod val="10000"/>
@@ -17909,7 +16490,7 @@
                 </a:solidFill>
                 <a:latin typeface="Calibri" pitchFamily="34" charset="0"/>
               </a:rPr>
-              <a:t>Moyenne 2000-2015 ou dernière année disponible</a:t>
+              <a:t>Moyenne de 2000 à 2015 ou dernière année disponible</a:t>
             </a:r>
           </a:p>
         </p:txBody>
@@ -17943,229 +16524,8 @@
                 </a:solidFill>
                 <a:latin typeface="Calibri" panose="020F0502020204030204" pitchFamily="34" charset="0"/>
               </a:rPr>
-              <a:t>Note : « Commerce de distribution » comprend le commerce de détail et de gros, les réparations, le transport et l'entreposage, l'hébergement et la restauration. </a:t>
+              <a:t>Note : le « commerce et la distribution » incluent le commerce et la distribution, les réparations, les transports et l'entreposage, l'hébergement et la restauration. L'indice mesure le degré de concentration de l'emploi dans certaines régions, variant entre 0 (aucune concentration, lorsque toutes les régions d'un pays présentent le même taux d'emploi manufacturier) et 100 (concentration maximale, lorsque tout l'emploi manufacturier est concentré dans la plus petite région). L'indice tient compte de la taille de la région et s'appuie sur OCDE (2003) « Geographic Concentration and Territorial Disparity in OECD Countries ». Source : base de données de l'OCDE Regional ; et calculs de l'OCDE.</a:t>
             </a:r>
-            <a:r>
-              <a:rPr lang="en-US" sz="1050" dirty="0" smtClean="0">
-                <a:solidFill>
-                  <a:srgbClr val="171717"/>
-                </a:solidFill>
-                <a:latin typeface="Calibri" panose="020F0502020204030204" pitchFamily="34" charset="0"/>
-              </a:rPr>
-              <a:t>L'indice mesure </a:t>
-            </a:r>
-            <a:r>
-              <a:rPr lang="en-US" sz="1050" dirty="0">
-                <a:solidFill>
-                  <a:srgbClr val="171717"/>
-                </a:solidFill>
-                <a:latin typeface="Calibri" panose="020F0502020204030204" pitchFamily="34" charset="0"/>
-              </a:rPr>
-              <a:t>la mesure dans laquelle </a:t>
-            </a:r>
-            <a:r>
-              <a:rPr lang="en-US" sz="1050" dirty="0" smtClean="0">
-                <a:solidFill>
-                  <a:srgbClr val="171717"/>
-                </a:solidFill>
-                <a:latin typeface="Calibri" panose="020F0502020204030204" pitchFamily="34" charset="0"/>
-              </a:rPr>
-              <a:t>l'emploi est </a:t>
-            </a:r>
-            <a:r>
-              <a:rPr lang="en-US" sz="1050" dirty="0">
-                <a:solidFill>
-                  <a:srgbClr val="171717"/>
-                </a:solidFill>
-                <a:latin typeface="Calibri" panose="020F0502020204030204" pitchFamily="34" charset="0"/>
-              </a:rPr>
-              <a:t>concentré dans certaines régions, variant entre 0 (aucune </a:t>
-            </a:r>
-            <a:r>
-              <a:rPr lang="en-US" sz="1050" dirty="0" smtClean="0">
-                <a:solidFill>
-                  <a:srgbClr val="171717"/>
-                </a:solidFill>
-                <a:latin typeface="Calibri" panose="020F0502020204030204" pitchFamily="34" charset="0"/>
-              </a:rPr>
-              <a:t>concentration, où toutes les </a:t>
-            </a:r>
-            <a:r>
-              <a:rPr lang="en-US" sz="1050" dirty="0">
-                <a:solidFill>
-                  <a:srgbClr val="171717"/>
-                </a:solidFill>
-                <a:latin typeface="Calibri" panose="020F0502020204030204" pitchFamily="34" charset="0"/>
-              </a:rPr>
-              <a:t>régions d'un pays ont le même taux d'emploi manufacturier </a:t>
-            </a:r>
-            <a:r>
-              <a:rPr lang="en-US" sz="1050" dirty="0" smtClean="0">
-                <a:solidFill>
-                  <a:srgbClr val="171717"/>
-                </a:solidFill>
-                <a:latin typeface="Calibri" panose="020F0502020204030204" pitchFamily="34" charset="0"/>
-              </a:rPr>
-              <a:t>) </a:t>
-            </a:r>
-            <a:r>
-              <a:rPr lang="en-US" sz="1050" dirty="0">
-                <a:solidFill>
-                  <a:srgbClr val="171717"/>
-                </a:solidFill>
-                <a:latin typeface="Calibri" panose="020F0502020204030204" pitchFamily="34" charset="0"/>
-              </a:rPr>
-              <a:t>et </a:t>
-            </a:r>
-            <a:r>
-              <a:rPr lang="en-US" sz="1050" dirty="0" smtClean="0">
-                <a:solidFill>
-                  <a:srgbClr val="171717"/>
-                </a:solidFill>
-                <a:latin typeface="Calibri" panose="020F0502020204030204" pitchFamily="34" charset="0"/>
-              </a:rPr>
-              <a:t>100 </a:t>
-            </a:r>
-            <a:r>
-              <a:rPr lang="en-US" sz="1050" dirty="0">
-                <a:solidFill>
-                  <a:srgbClr val="171717"/>
-                </a:solidFill>
-                <a:latin typeface="Calibri" panose="020F0502020204030204" pitchFamily="34" charset="0"/>
-              </a:rPr>
-              <a:t>(concentration </a:t>
-            </a:r>
-            <a:r>
-              <a:rPr lang="en-US" sz="1050" dirty="0" smtClean="0">
-                <a:solidFill>
-                  <a:srgbClr val="171717"/>
-                </a:solidFill>
-                <a:latin typeface="Calibri" panose="020F0502020204030204" pitchFamily="34" charset="0"/>
-              </a:rPr>
-              <a:t>maximale, où tout </a:t>
-            </a:r>
-            <a:r>
-              <a:rPr lang="en-US" sz="1050" dirty="0">
-                <a:solidFill>
-                  <a:srgbClr val="171717"/>
-                </a:solidFill>
-                <a:latin typeface="Calibri" panose="020F0502020204030204" pitchFamily="34" charset="0"/>
-              </a:rPr>
-              <a:t>l'emploi manufacturier est concentré dans la plus petite région</a:t>
-            </a:r>
-            <a:r>
-              <a:rPr lang="en-US" sz="1050" dirty="0" smtClean="0">
-                <a:solidFill>
-                  <a:srgbClr val="171717"/>
-                </a:solidFill>
-                <a:latin typeface="Calibri" panose="020F0502020204030204" pitchFamily="34" charset="0"/>
-              </a:rPr>
-              <a:t>). L'indice tient compte de la taille de la région et est basé sur l'OCDE </a:t>
-            </a:r>
-            <a:r>
-              <a:rPr lang="en-US" sz="1050" dirty="0">
-                <a:solidFill>
-                  <a:srgbClr val="171717"/>
-                </a:solidFill>
-                <a:latin typeface="Calibri" panose="020F0502020204030204" pitchFamily="34" charset="0"/>
-              </a:rPr>
-              <a:t>(2003</a:t>
-            </a:r>
-            <a:r>
-              <a:rPr lang="en-US" sz="1050" dirty="0" smtClean="0">
-                <a:solidFill>
-                  <a:srgbClr val="171717"/>
-                </a:solidFill>
-                <a:latin typeface="Calibri" panose="020F0502020204030204" pitchFamily="34" charset="0"/>
-              </a:rPr>
-              <a:t>) </a:t>
-            </a:r>
-            <a:r>
-              <a:rPr lang="en-US" sz="1050" dirty="0">
-                <a:solidFill>
-                  <a:srgbClr val="171717"/>
-                </a:solidFill>
-                <a:latin typeface="Calibri" panose="020F0502020204030204" pitchFamily="34" charset="0"/>
-              </a:rPr>
-              <a:t>« Concentration géographique et disparité territoriale dans les pays de l'OCDE »</a:t>
-            </a:r>
-            <a:r>
-              <a:rPr lang="en-US" sz="1050" dirty="0" smtClean="0">
-                <a:solidFill>
-                  <a:srgbClr val="171717"/>
-                </a:solidFill>
-                <a:latin typeface="Calibri" panose="020F0502020204030204" pitchFamily="34" charset="0"/>
-              </a:rPr>
-              <a:t>. </a:t>
-            </a:r>
-            <a:br>
-              <a:rPr lang="en-US" sz="1050" dirty="0" smtClean="0">
-                <a:solidFill>
-                  <a:srgbClr val="171717"/>
-                </a:solidFill>
-                <a:latin typeface="Calibri" panose="020F0502020204030204" pitchFamily="34" charset="0"/>
-              </a:rPr>
-            </a:br>
-            <a:r>
-              <a:rPr lang="en-GB" sz="1050" dirty="0" smtClean="0">
-                <a:solidFill>
-                  <a:srgbClr val="171717"/>
-                </a:solidFill>
-                <a:latin typeface="Calibri" panose="020F0502020204030204" pitchFamily="34" charset="0"/>
-              </a:rPr>
-              <a:t>Source :</a:t>
-            </a:r>
-            <a:r>
-              <a:rPr lang="en-US" sz="1050" i="1" dirty="0" smtClean="0">
-                <a:solidFill>
-                  <a:srgbClr val="171717"/>
-                </a:solidFill>
-                <a:latin typeface="Calibri" panose="020F0502020204030204" pitchFamily="34" charset="0"/>
-              </a:rPr>
-              <a:t> </a:t>
-            </a:r>
-            <a:r>
-              <a:rPr lang="en-US" sz="1050" dirty="0">
-                <a:solidFill>
-                  <a:srgbClr val="171717"/>
-                </a:solidFill>
-                <a:latin typeface="Calibri" panose="020F0502020204030204" pitchFamily="34" charset="0"/>
-              </a:rPr>
-              <a:t>OCDE base de données </a:t>
-            </a:r>
-            <a:r>
-              <a:rPr lang="en-US" sz="1050" dirty="0" smtClean="0">
-                <a:solidFill>
-                  <a:srgbClr val="171717"/>
-                </a:solidFill>
-                <a:latin typeface="Calibri" panose="020F0502020204030204" pitchFamily="34" charset="0"/>
-              </a:rPr>
-              <a:t>régionale ; </a:t>
-            </a:r>
-            <a:r>
-              <a:rPr lang="en-US" sz="1050" dirty="0">
-                <a:solidFill>
-                  <a:srgbClr val="171717"/>
-                </a:solidFill>
-                <a:latin typeface="Calibri" panose="020F0502020204030204" pitchFamily="34" charset="0"/>
-              </a:rPr>
-              <a:t>et calculs de l'OCDE</a:t>
-            </a:r>
-            <a:r>
-              <a:rPr lang="en-US" sz="1050" dirty="0" smtClean="0">
-                <a:solidFill>
-                  <a:srgbClr val="171717"/>
-                </a:solidFill>
-                <a:latin typeface="Calibri" panose="020F0502020204030204" pitchFamily="34" charset="0"/>
-              </a:rPr>
-              <a:t>.</a:t>
-            </a:r>
-            <a:endParaRPr lang="en-GB" sz="1050" dirty="0">
-              <a:solidFill>
-                <a:srgbClr val="171717"/>
-              </a:solidFill>
-              <a:latin typeface="Calibri" panose="020F0502020204030204" pitchFamily="34" charset="0"/>
-            </a:endParaRPr>
           </a:p>
         </p:txBody>
       </p:sp>
@@ -18229,7 +16589,6 @@
           </a:bodyPr>
           <a:lstStyle/>
           <a:p>
-            <a:pPr algn="ctr"/>
             <a:r>
               <a:rPr lang="en-GB" sz="1400" b="1" dirty="0" smtClean="0">
                 <a:solidFill>
@@ -18241,14 +16600,6 @@
               </a:rPr>
               <a:t>Plus concentré</a:t>
             </a:r>
-            <a:endParaRPr lang="en-GB" sz="1400" b="1" dirty="0">
-              <a:solidFill>
-                <a:schemeClr val="bg2">
-                  <a:lumMod val="10000"/>
-                </a:schemeClr>
-              </a:solidFill>
-              <a:latin typeface="Calibri" panose="020F0502020204030204" pitchFamily="34" charset="0"/>
-            </a:endParaRPr>
           </a:p>
         </p:txBody>
       </p:sp>
@@ -18373,20 +16724,14 @@
           <a:bodyPr/>
           <a:lstStyle/>
           <a:p>
-            <a:pPr algn="ctr"/>
             <a:r>
               <a:rPr lang="en-US" sz="2800" b="1" dirty="0" smtClean="0">
                 <a:solidFill>
                   <a:schemeClr val="tx2"/>
                 </a:solidFill>
               </a:rPr>
-              <a:t>Les pays ayant connu les plus fortes pertes d'emplois manufacturiers ont vu croître les inégalités régionales</a:t>
+              <a:t>Les pays ayant connu de plus fortes baisses des emplois manufacturiers ont vu leurs inégalités régionales augmenter</a:t>
             </a:r>
-            <a:endParaRPr lang="en-US" sz="2800" b="1" dirty="0">
-              <a:solidFill>
-                <a:schemeClr val="tx2"/>
-              </a:solidFill>
-            </a:endParaRPr>
           </a:p>
         </p:txBody>
       </p:sp>
@@ -18419,49 +16764,8 @@
                 </a:solidFill>
                 <a:latin typeface="Calibri" panose="020F0502020204030204" pitchFamily="34" charset="0"/>
               </a:rPr>
-              <a:t/>
+              <a:t>Source : base de données de l'OCDE Regional ; et calculs de l'OCDE.</a:t>
             </a:r>
-            <a:br>
-              <a:rPr lang="en-GB" sz="1200" dirty="0" smtClean="0">
-                <a:solidFill>
-                  <a:srgbClr val="171717"/>
-                </a:solidFill>
-                <a:latin typeface="Calibri" panose="020F0502020204030204" pitchFamily="34" charset="0"/>
-              </a:rPr>
-            </a:br>
-            <a:r>
-              <a:rPr lang="en-GB" sz="1200" dirty="0" smtClean="0">
-                <a:solidFill>
-                  <a:srgbClr val="171717"/>
-                </a:solidFill>
-                <a:latin typeface="Calibri" panose="020F0502020204030204" pitchFamily="34" charset="0"/>
-              </a:rPr>
-              <a:t>Source :</a:t>
-            </a:r>
-            <a:r>
-              <a:rPr lang="en-US" sz="1200" i="1" dirty="0" smtClean="0">
-                <a:solidFill>
-                  <a:srgbClr val="171717"/>
-                </a:solidFill>
-                <a:latin typeface="Calibri" panose="020F0502020204030204" pitchFamily="34" charset="0"/>
-              </a:rPr>
-              <a:t> </a:t>
-            </a:r>
-            <a:r>
-              <a:rPr lang="en-US" sz="1200" dirty="0" smtClean="0">
-                <a:solidFill>
-                  <a:srgbClr val="171717"/>
-                </a:solidFill>
-                <a:latin typeface="Calibri" panose="020F0502020204030204" pitchFamily="34" charset="0"/>
-              </a:rPr>
-              <a:t>OCDE base de données régionale ; et calculs de l'OCDE.</a:t>
-            </a:r>
-            <a:endParaRPr lang="en-GB" sz="1200" dirty="0">
-              <a:solidFill>
-                <a:srgbClr val="171717"/>
-              </a:solidFill>
-              <a:latin typeface="Calibri" panose="020F0502020204030204" pitchFamily="34" charset="0"/>
-            </a:endParaRPr>
           </a:p>
         </p:txBody>
       </p:sp>
@@ -18487,7 +16791,6 @@
           </a:bodyPr>
           <a:lstStyle/>
           <a:p>
-            <a:pPr lvl="0" algn="ctr"/>
             <a:r>
               <a:rPr lang="en-US" sz="1400" b="1" dirty="0" smtClean="0">
                 <a:solidFill>
@@ -18497,92 +16800,8 @@
                 </a:solidFill>
                 <a:latin typeface="Calibri" pitchFamily="34" charset="0"/>
               </a:rPr>
-              <a:t>Variation des </a:t>
+              <a:t>Variation des inégalités moyennes de revenu entre régions 2000 à 2015 ou dernière année disponible, ratio des centiles 90:50, points de %</a:t>
             </a:r>
-            <a:r>
-              <a:rPr lang="en-US" sz="1400" b="1" dirty="0">
-                <a:solidFill>
-                  <a:schemeClr val="bg2">
-                    <a:lumMod val="10000"/>
-                  </a:schemeClr>
-                </a:solidFill>
-                <a:latin typeface="Calibri" pitchFamily="34" charset="0"/>
-              </a:rPr>
-              <a:t>inégalités de revenus moyennes </a:t>
-            </a:r>
-            <a:r>
-              <a:rPr lang="en-US" sz="1400" b="1" dirty="0" smtClean="0">
-                <a:solidFill>
-                  <a:schemeClr val="bg2">
-                    <a:lumMod val="10000"/>
-                  </a:schemeClr>
-                </a:solidFill>
-                <a:latin typeface="Calibri" pitchFamily="34" charset="0"/>
-              </a:rPr>
-              <a:t>entre régions</a:t>
-            </a:r>
-            <a:r>
-              <a:rPr lang="en-US" sz="1400" dirty="0" smtClean="0">
-                <a:solidFill>
-                  <a:schemeClr val="bg2">
-                    <a:lumMod val="10000"/>
-                  </a:schemeClr>
-                </a:solidFill>
-                <a:latin typeface="Calibri" pitchFamily="34" charset="0"/>
-              </a:rPr>
-              <a:t/>
-            </a:r>
-            <a:br>
-              <a:rPr lang="en-US" sz="1400" dirty="0" smtClean="0">
-                <a:solidFill>
-                  <a:schemeClr val="bg2">
-                    <a:lumMod val="10000"/>
-                  </a:schemeClr>
-                </a:solidFill>
-                <a:latin typeface="Calibri" pitchFamily="34" charset="0"/>
-              </a:rPr>
-            </a:br>
-            <a:r>
-              <a:rPr lang="en-US" sz="1200" i="1" dirty="0" smtClean="0">
-                <a:solidFill>
-                  <a:schemeClr val="bg2">
-                    <a:lumMod val="10000"/>
-                  </a:schemeClr>
-                </a:solidFill>
-                <a:latin typeface="Calibri" pitchFamily="34" charset="0"/>
-              </a:rPr>
-              <a:t>2000 à 2015 ou dernière année disponible, ratio percentiles 90:50, </a:t>
-            </a:r>
-            <a:r>
-              <a:rPr lang="en-US" sz="1200" i="1" dirty="0">
-                <a:solidFill>
-                  <a:schemeClr val="bg2">
-                    <a:lumMod val="10000"/>
-                  </a:schemeClr>
-                </a:solidFill>
-                <a:latin typeface="Calibri" pitchFamily="34" charset="0"/>
-              </a:rPr>
-              <a:t>% </a:t>
-            </a:r>
-            <a:r>
-              <a:rPr lang="en-US" sz="1200" i="1" dirty="0" smtClean="0">
-                <a:solidFill>
-                  <a:schemeClr val="bg2">
-                    <a:lumMod val="10000"/>
-                  </a:schemeClr>
-                </a:solidFill>
-                <a:latin typeface="Calibri" pitchFamily="34" charset="0"/>
-              </a:rPr>
-              <a:t>pts</a:t>
-            </a:r>
-            <a:endParaRPr lang="en-US" sz="1400" i="1" dirty="0" smtClean="0">
-              <a:solidFill>
-                <a:schemeClr val="bg2">
-                  <a:lumMod val="10000"/>
-                </a:schemeClr>
-              </a:solidFill>
-              <a:latin typeface="Calibri" pitchFamily="34" charset="0"/>
-            </a:endParaRPr>
           </a:p>
         </p:txBody>
       </p:sp>
@@ -18608,7 +16827,6 @@
           </a:bodyPr>
           <a:lstStyle/>
           <a:p>
-            <a:pPr lvl="0" algn="ctr"/>
             <a:r>
               <a:rPr lang="en-US" sz="1400" b="1" dirty="0" smtClean="0">
                 <a:solidFill>
@@ -18618,59 +16836,8 @@
                 </a:solidFill>
                 <a:latin typeface="Calibri" pitchFamily="34" charset="0"/>
               </a:rPr>
-              <a:t>Variation du taux d'emploi manufacturier national</a:t>
+              <a:t>Variation du taux d'emploi manufacturier national 2000 à 2015 ou dernière année disponible, points de %</a:t>
             </a:r>
-            <a:r>
-              <a:rPr lang="en-US" sz="1400" dirty="0" smtClean="0">
-                <a:solidFill>
-                  <a:schemeClr val="bg2">
-                    <a:lumMod val="10000"/>
-                  </a:schemeClr>
-                </a:solidFill>
-                <a:latin typeface="Calibri" pitchFamily="34" charset="0"/>
-              </a:rPr>
-              <a:t/>
-            </a:r>
-            <a:br>
-              <a:rPr lang="en-US" sz="1400" dirty="0" smtClean="0">
-                <a:solidFill>
-                  <a:schemeClr val="bg2">
-                    <a:lumMod val="10000"/>
-                  </a:schemeClr>
-                </a:solidFill>
-                <a:latin typeface="Calibri" pitchFamily="34" charset="0"/>
-              </a:rPr>
-            </a:br>
-            <a:r>
-              <a:rPr lang="en-US" sz="1200" i="1" dirty="0">
-                <a:solidFill>
-                  <a:schemeClr val="bg2">
-                    <a:lumMod val="10000"/>
-                  </a:schemeClr>
-                </a:solidFill>
-                <a:latin typeface="Calibri" pitchFamily="34" charset="0"/>
-              </a:rPr>
-              <a:t>2000 à 2015 ou </a:t>
-            </a:r>
-            <a:r>
-              <a:rPr lang="en-US" sz="1200" i="1" dirty="0" smtClean="0">
-                <a:solidFill>
-                  <a:schemeClr val="bg2">
-                    <a:lumMod val="10000"/>
-                  </a:schemeClr>
-                </a:solidFill>
-                <a:latin typeface="Calibri" pitchFamily="34" charset="0"/>
-              </a:rPr>
-              <a:t>dernière année disponible, % pts</a:t>
-            </a:r>
-            <a:endParaRPr lang="en-US" sz="1400" i="1" dirty="0" smtClean="0">
-              <a:solidFill>
-                <a:schemeClr val="bg2">
-                  <a:lumMod val="10000"/>
-                </a:schemeClr>
-              </a:solidFill>
-              <a:latin typeface="Calibri" pitchFamily="34" charset="0"/>
-            </a:endParaRPr>
           </a:p>
         </p:txBody>
       </p:sp>
@@ -18734,7 +16901,6 @@
           </a:bodyPr>
           <a:lstStyle/>
           <a:p>
-            <a:pPr algn="ctr"/>
             <a:r>
               <a:rPr lang="en-US" sz="1400" b="1" dirty="0">
                 <a:solidFill>
@@ -18744,16 +16910,8 @@
                 </a:solidFill>
                 <a:latin typeface="Calibri" panose="020F0502020204030204" pitchFamily="34" charset="0"/>
               </a:rPr>
-              <a:t>Élargissement de la dispersion des revenus régionaux</a:t>
+              <a:t>Creusement de la dispersion des revenus régionaux</a:t>
             </a:r>
-            <a:endParaRPr lang="en-GB" sz="1400" b="1" dirty="0">
-              <a:solidFill>
-                <a:schemeClr val="bg2">
-                  <a:lumMod val="10000"/>
-                </a:schemeClr>
-              </a:solidFill>
-              <a:latin typeface="Calibri" panose="020F0502020204030204" pitchFamily="34" charset="0"/>
-            </a:endParaRPr>
           </a:p>
         </p:txBody>
       </p:sp>
@@ -18779,7 +16937,6 @@
           </a:bodyPr>
           <a:lstStyle/>
           <a:p>
-            <a:pPr algn="ctr"/>
             <a:r>
               <a:rPr lang="en-GB" sz="1400" b="1" dirty="0" smtClean="0">
                 <a:solidFill>
@@ -18789,37 +16946,8 @@
                 </a:solidFill>
                 <a:latin typeface="Calibri" panose="020F0502020204030204" pitchFamily="34" charset="0"/>
               </a:rPr>
-              <a:t>Baisse de la part des</a:t>
+              <a:t>Baisse de la part des emplois manufacturiers</a:t>
             </a:r>
-            <a:br>
-              <a:rPr lang="en-GB" sz="1400" b="1" dirty="0" smtClean="0">
-                <a:solidFill>
-                  <a:schemeClr val="bg2">
-                    <a:lumMod val="10000"/>
-                  </a:schemeClr>
-                </a:solidFill>
-                <a:latin typeface="Calibri" panose="020F0502020204030204" pitchFamily="34" charset="0"/>
-              </a:rPr>
-            </a:br>
-            <a:r>
-              <a:rPr lang="en-GB" sz="1400" b="1" dirty="0" smtClean="0">
-                <a:solidFill>
-                  <a:schemeClr val="bg2">
-                    <a:lumMod val="10000"/>
-                  </a:schemeClr>
-                </a:solidFill>
-                <a:latin typeface="Calibri" panose="020F0502020204030204" pitchFamily="34" charset="0"/>
-              </a:rPr>
-              <a:t>emplois manufacturiers</a:t>
-            </a:r>
-            <a:endParaRPr lang="en-GB" sz="1400" b="1" dirty="0">
-              <a:solidFill>
-                <a:schemeClr val="bg2">
-                  <a:lumMod val="10000"/>
-                </a:schemeClr>
-              </a:solidFill>
-              <a:latin typeface="Calibri" panose="020F0502020204030204" pitchFamily="34" charset="0"/>
-            </a:endParaRPr>
           </a:p>
         </p:txBody>
       </p:sp>
@@ -18942,9 +17070,6 @@
           </a:bodyPr>
           <a:lstStyle/>
           <a:p>
-            <a:pPr lvl="0" algn="ctr">
-              <a:defRPr/>
-            </a:pPr>
             <a:r>
               <a:rPr lang="en-US" sz="4000" b="1" dirty="0" smtClean="0">
                 <a:solidFill>
@@ -18952,103 +17077,7 @@
                 </a:solidFill>
                 <a:latin typeface="Arial"/>
               </a:rPr>
-              <a:t>Une </a:t>
-            </a:r>
-            <a:r>
-              <a:rPr lang="en-US" sz="4000" b="1" dirty="0">
-                <a:solidFill>
-                  <a:srgbClr val="006299"/>
-                </a:solidFill>
-                <a:latin typeface="Arial"/>
-              </a:rPr>
-              <a:t>approche </a:t>
-            </a:r>
-            <a:r>
-              <a:rPr lang="en-US" sz="4000" b="1" dirty="0" smtClean="0">
-                <a:solidFill>
-                  <a:srgbClr val="006299"/>
-                </a:solidFill>
-                <a:latin typeface="Arial"/>
-              </a:rPr>
-              <a:t>intégrée des </a:t>
-            </a:r>
-            <a:br>
-              <a:rPr lang="en-US" sz="4000" b="1" dirty="0" smtClean="0">
-                <a:solidFill>
-                  <a:srgbClr val="006299"/>
-                </a:solidFill>
-                <a:latin typeface="Arial"/>
-              </a:rPr>
-            </a:br>
-            <a:r>
-              <a:rPr lang="en-US" sz="4000" b="1" dirty="0" smtClean="0">
-                <a:solidFill>
-                  <a:srgbClr val="006299"/>
-                </a:solidFill>
-                <a:latin typeface="Arial"/>
-              </a:rPr>
-              <a:t>politiques </a:t>
-            </a:r>
-            <a:r>
-              <a:rPr lang="en-US" sz="4000" b="1" dirty="0">
-                <a:solidFill>
-                  <a:srgbClr val="006299"/>
-                </a:solidFill>
-                <a:latin typeface="Arial"/>
-              </a:rPr>
-              <a:t>est </a:t>
-            </a:r>
-            <a:r>
-              <a:rPr lang="en-US" sz="4000" b="1" dirty="0" smtClean="0">
-                <a:solidFill>
-                  <a:srgbClr val="006299"/>
-                </a:solidFill>
-                <a:latin typeface="Arial"/>
-              </a:rPr>
-              <a:t>nécessaire pour répondre aux </a:t>
-            </a:r>
-            <a:br>
-              <a:rPr lang="en-US" sz="4000" b="1" dirty="0" smtClean="0">
-                <a:solidFill>
-                  <a:srgbClr val="006299"/>
-                </a:solidFill>
-                <a:latin typeface="Arial"/>
-              </a:rPr>
-            </a:br>
-            <a:r>
-              <a:rPr lang="en-US" sz="4000" b="1" dirty="0" smtClean="0">
-                <a:solidFill>
-                  <a:srgbClr val="006299"/>
-                </a:solidFill>
-                <a:latin typeface="Arial"/>
-              </a:rPr>
-              <a:t>tendances structurelles et faire en sorte que la </a:t>
-            </a:r>
-            <a:br>
-              <a:rPr lang="en-US" sz="4000" b="1" dirty="0" smtClean="0">
-                <a:solidFill>
-                  <a:srgbClr val="006299"/>
-                </a:solidFill>
-                <a:latin typeface="Arial"/>
-              </a:rPr>
-            </a:br>
-            <a:r>
-              <a:rPr lang="en-US" sz="4000" b="1" dirty="0" smtClean="0">
-                <a:solidFill>
-                  <a:srgbClr val="006299"/>
-                </a:solidFill>
-                <a:latin typeface="Arial"/>
-              </a:rPr>
-              <a:t>mondialisation </a:t>
-            </a:r>
-            <a:r>
-              <a:rPr lang="en-US" sz="4000" b="1" dirty="0">
-                <a:solidFill>
-                  <a:srgbClr val="006299"/>
-                </a:solidFill>
-                <a:latin typeface="Arial"/>
-              </a:rPr>
-              <a:t>profite à tous</a:t>
+              <a:t>Une approche intégrée des politiques est nécessaire pour répondre aux tendances structurelles et faire en sorte que la mondialisation profite à tous</a:t>
             </a:r>
           </a:p>
         </p:txBody>
@@ -19111,9 +17140,6 @@
           </a:bodyPr>
           <a:lstStyle/>
           <a:p>
-            <a:pPr algn="ctr">
-              <a:defRPr/>
-            </a:pPr>
             <a:r>
               <a:rPr lang="en-GB" sz="2800" b="1" dirty="0" smtClean="0">
                 <a:solidFill>
@@ -19123,12 +17149,6 @@
               </a:rPr>
               <a:t>Messages clés</a:t>
             </a:r>
-            <a:endParaRPr lang="en-GB" sz="2800" b="1" dirty="0">
-              <a:solidFill>
-                <a:schemeClr val="tx2"/>
-              </a:solidFill>
-              <a:latin typeface="+mj-lt"/>
-            </a:endParaRPr>
           </a:p>
         </p:txBody>
       </p:sp>
@@ -19299,7 +17319,6 @@
           </a:bodyPr>
           <a:lstStyle/>
           <a:p>
-            <a:pPr lvl="0" algn="ctr"/>
             <a:r>
               <a:rPr lang="en-GB" sz="2800" b="1" dirty="0">
                 <a:solidFill>
@@ -19307,42 +17326,7 @@
                 </a:solidFill>
                 <a:latin typeface="Arial"/>
               </a:rPr>
-              <a:t>Améliorer le fonctionnement du système international </a:t>
-            </a:r>
-            <a:r>
-              <a:rPr lang="en-GB" sz="2800" b="1" dirty="0" smtClean="0">
-                <a:solidFill>
-                  <a:srgbClr val="006299"/>
-                </a:solidFill>
-                <a:latin typeface="Arial"/>
-              </a:rPr>
-              <a:t>et mieux l'adapter,</a:t>
-            </a:r>
-            <a:br>
-              <a:rPr lang="en-GB" sz="2800" b="1" dirty="0" smtClean="0">
-                <a:solidFill>
-                  <a:srgbClr val="006299"/>
-                </a:solidFill>
-                <a:latin typeface="Arial"/>
-              </a:rPr>
-            </a:br>
-            <a:r>
-              <a:rPr lang="en-GB" sz="2800" b="1" dirty="0" smtClean="0">
-                <a:solidFill>
-                  <a:srgbClr val="006299"/>
-                </a:solidFill>
-                <a:latin typeface="Arial"/>
-              </a:rPr>
-              <a:t>afin de </a:t>
-            </a:r>
-            <a:r>
-              <a:rPr lang="en-GB" sz="2800" b="1" dirty="0">
-                <a:solidFill>
-                  <a:srgbClr val="006299"/>
-                </a:solidFill>
-                <a:latin typeface="Arial"/>
-              </a:rPr>
-              <a:t>créer des conditions de concurrence plus équitables</a:t>
+              <a:t>Faire mieux fonctionner le système international et créer des conditions de concurrence plus équitables</a:t>
             </a:r>
           </a:p>
         </p:txBody>
@@ -19400,7 +17384,7 @@
                 </a:solidFill>
                 <a:latin typeface="Calibri" panose="020F0502020204030204" pitchFamily="34" charset="0"/>
               </a:rPr>
-              <a:t>Note : inclut tous les pays de l'OCDE et les BRIICS, l'UE et la Colombie.</a:t>
+              <a:t>Note : inclut tous les pays de l'OCDE et des BRIICS, l'UE et la Colombie.</a:t>
             </a:r>
           </a:p>
           <a:p>
@@ -19413,38 +17397,8 @@
                 </a:solidFill>
                 <a:latin typeface="Calibri" panose="020F0502020204030204" pitchFamily="34" charset="0"/>
               </a:rPr>
-              <a:t>Source : OCDE </a:t>
+              <a:t>Source : OCDE Going for Growth 2017</a:t>
             </a:r>
-            <a:r>
-              <a:rPr lang="en-GB" sz="1050" i="1" dirty="0" smtClean="0">
-                <a:solidFill>
-                  <a:schemeClr val="bg2">
-                    <a:lumMod val="10000"/>
-                  </a:schemeClr>
-                </a:solidFill>
-                <a:latin typeface="Calibri" panose="020F0502020204030204" pitchFamily="34" charset="0"/>
-              </a:rPr>
-              <a:t>Objectif croissance </a:t>
-            </a:r>
-            <a:r>
-              <a:rPr lang="en-GB" sz="1050" dirty="0" smtClean="0">
-                <a:solidFill>
-                  <a:schemeClr val="bg2">
-                    <a:lumMod val="10000"/>
-                  </a:schemeClr>
-                </a:solidFill>
-                <a:latin typeface="Calibri" panose="020F0502020204030204" pitchFamily="34" charset="0"/>
-              </a:rPr>
-              <a:t>2017</a:t>
-            </a:r>
-            <a:endParaRPr lang="en-GB" sz="1050" dirty="0">
-              <a:solidFill>
-                <a:schemeClr val="bg2">
-                  <a:lumMod val="10000"/>
-                </a:schemeClr>
-              </a:solidFill>
-              <a:latin typeface="Calibri" panose="020F0502020204030204" pitchFamily="34" charset="0"/>
-            </a:endParaRPr>
           </a:p>
         </p:txBody>
       </p:sp>
@@ -19470,7 +17424,6 @@
           </a:bodyPr>
           <a:lstStyle/>
           <a:p>
-            <a:pPr lvl="0" algn="ctr"/>
             <a:r>
               <a:rPr lang="en-US" sz="1600" b="1" dirty="0">
                 <a:solidFill>
@@ -19480,59 +17433,8 @@
                 </a:solidFill>
                 <a:latin typeface="Calibri" pitchFamily="34" charset="0"/>
               </a:rPr>
-              <a:t>Mesures prises en réponse aux recommandations de l'OCDE </a:t>
+              <a:t>Mesures prises en réponse aux recommandations de l'OCDE Going for Growth Nombre de réformes, 2015-16</a:t>
             </a:r>
-            <a:r>
-              <a:rPr lang="en-US" sz="1600" b="1" i="1" dirty="0">
-                <a:solidFill>
-                  <a:schemeClr val="bg2">
-                    <a:lumMod val="10000"/>
-                  </a:schemeClr>
-                </a:solidFill>
-                <a:latin typeface="Calibri" pitchFamily="34" charset="0"/>
-              </a:rPr>
-              <a:t>Objectif croissance </a:t>
-            </a:r>
-            <a:r>
-              <a:rPr lang="en-US" sz="1600" b="1" dirty="0" smtClean="0">
-                <a:solidFill>
-                  <a:schemeClr val="bg2">
-                    <a:lumMod val="10000"/>
-                  </a:schemeClr>
-                </a:solidFill>
-                <a:latin typeface="Calibri" pitchFamily="34" charset="0"/>
-              </a:rPr>
-              <a:t>recommandations</a:t>
-            </a:r>
-            <a:br>
-              <a:rPr lang="en-US" sz="1600" b="1" dirty="0" smtClean="0">
-                <a:solidFill>
-                  <a:schemeClr val="bg2">
-                    <a:lumMod val="10000"/>
-                  </a:schemeClr>
-                </a:solidFill>
-                <a:latin typeface="Calibri" pitchFamily="34" charset="0"/>
-              </a:rPr>
-            </a:br>
-            <a:r>
-              <a:rPr lang="en-US" sz="1200" i="1" dirty="0" smtClean="0">
-                <a:solidFill>
-                  <a:schemeClr val="bg2">
-                    <a:lumMod val="10000"/>
-                  </a:schemeClr>
-                </a:solidFill>
-                <a:latin typeface="Calibri" pitchFamily="34" charset="0"/>
-              </a:rPr>
-              <a:t>Nombre de réformes, 2015-16</a:t>
-            </a:r>
-            <a:endParaRPr lang="en-US" sz="1200" i="1" dirty="0">
-              <a:solidFill>
-                <a:schemeClr val="bg2">
-                  <a:lumMod val="10000"/>
-                </a:schemeClr>
-              </a:solidFill>
-              <a:latin typeface="Calibri" pitchFamily="34" charset="0"/>
-            </a:endParaRPr>
           </a:p>
         </p:txBody>
       </p:sp>
@@ -19658,9 +17560,6 @@
           </a:bodyPr>
           <a:lstStyle/>
           <a:p>
-            <a:pPr algn="ctr">
-              <a:defRPr/>
-            </a:pPr>
             <a:r>
               <a:rPr lang="en-US" sz="2800" b="1" dirty="0" smtClean="0">
                 <a:solidFill>
@@ -19668,31 +17567,8 @@
                 </a:solidFill>
                 <a:latin typeface="+mj-lt"/>
               </a:rPr>
-              <a:t>Mettre en œuvre des programmes de réformes nationales</a:t>
+              <a:t>Mettre en œuvre des trains de réformes intérieures pour renforcer une croissance inclusive</a:t>
             </a:r>
-            <a:br>
-              <a:rPr lang="en-US" sz="2800" b="1" dirty="0" smtClean="0">
-                <a:solidFill>
-                  <a:schemeClr val="tx2"/>
-                </a:solidFill>
-                <a:latin typeface="+mj-lt"/>
-              </a:rPr>
-            </a:br>
-            <a:r>
-              <a:rPr lang="en-US" sz="2800" b="1" dirty="0" smtClean="0">
-                <a:solidFill>
-                  <a:schemeClr val="tx2"/>
-                </a:solidFill>
-                <a:latin typeface="+mj-lt"/>
-              </a:rPr>
-              <a:t>pour renforcer une croissance inclusive</a:t>
-            </a:r>
-            <a:endParaRPr lang="en-GB" sz="2800" b="1" dirty="0">
-              <a:solidFill>
-                <a:schemeClr val="tx2"/>
-              </a:solidFill>
-              <a:latin typeface="+mj-lt"/>
-            </a:endParaRPr>
           </a:p>
         </p:txBody>
       </p:sp>
@@ -19718,7 +17594,6 @@
           </a:bodyPr>
           <a:lstStyle/>
           <a:p>
-            <a:pPr lvl="0" algn="ctr"/>
             <a:r>
               <a:rPr lang="en-US" sz="1600" b="1" dirty="0">
                 <a:solidFill>
@@ -19728,38 +17603,8 @@
                 </a:solidFill>
                 <a:latin typeface="Calibri" pitchFamily="34" charset="0"/>
               </a:rPr>
-              <a:t>Mesures prises en réponse aux recommandations de l'OCDE </a:t>
+              <a:t>Mesures prises en réponse aux recommandations de l'OCDE Going for Growth</a:t>
             </a:r>
-            <a:r>
-              <a:rPr lang="en-US" sz="1600" b="1" i="1" dirty="0">
-                <a:solidFill>
-                  <a:schemeClr val="bg2">
-                    <a:lumMod val="10000"/>
-                  </a:schemeClr>
-                </a:solidFill>
-                <a:latin typeface="Calibri" pitchFamily="34" charset="0"/>
-              </a:rPr>
-              <a:t>Objectif croissance </a:t>
-            </a:r>
-            <a:r>
-              <a:rPr lang="en-US" sz="1600" b="1" dirty="0" smtClean="0">
-                <a:solidFill>
-                  <a:schemeClr val="bg2">
-                    <a:lumMod val="10000"/>
-                  </a:schemeClr>
-                </a:solidFill>
-                <a:latin typeface="Calibri" pitchFamily="34" charset="0"/>
-              </a:rPr>
-              <a:t>recommandations</a:t>
-            </a:r>
-            <a:endParaRPr lang="en-US" sz="1600" b="1" dirty="0">
-              <a:solidFill>
-                <a:schemeClr val="bg2">
-                  <a:lumMod val="10000"/>
-                </a:schemeClr>
-              </a:solidFill>
-              <a:latin typeface="Calibri" pitchFamily="34" charset="0"/>
-            </a:endParaRPr>
           </a:p>
         </p:txBody>
       </p:sp>
@@ -19794,7 +17639,7 @@
                 </a:solidFill>
                 <a:latin typeface="Calibri" panose="020F0502020204030204" pitchFamily="34" charset="0"/>
               </a:rPr>
-              <a:t>Note : inclut tous les pays de l'OCDE et les BRIICS, l'UE et la Colombie.</a:t>
+              <a:t>Note : inclut tous les pays de l'OCDE et des BRIICS, l'UE et la Colombie.</a:t>
             </a:r>
           </a:p>
           <a:p>
@@ -19807,38 +17652,8 @@
                 </a:solidFill>
                 <a:latin typeface="Calibri" panose="020F0502020204030204" pitchFamily="34" charset="0"/>
               </a:rPr>
-              <a:t>Source : OCDE </a:t>
+              <a:t>Source : OCDE Going for Growth 2017</a:t>
             </a:r>
-            <a:r>
-              <a:rPr lang="en-GB" sz="1050" i="1" dirty="0" smtClean="0">
-                <a:solidFill>
-                  <a:schemeClr val="bg2">
-                    <a:lumMod val="10000"/>
-                  </a:schemeClr>
-                </a:solidFill>
-                <a:latin typeface="Calibri" panose="020F0502020204030204" pitchFamily="34" charset="0"/>
-              </a:rPr>
-              <a:t>Objectif croissance </a:t>
-            </a:r>
-            <a:r>
-              <a:rPr lang="en-GB" sz="1050" dirty="0" smtClean="0">
-                <a:solidFill>
-                  <a:schemeClr val="bg2">
-                    <a:lumMod val="10000"/>
-                  </a:schemeClr>
-                </a:solidFill>
-                <a:latin typeface="Calibri" panose="020F0502020204030204" pitchFamily="34" charset="0"/>
-              </a:rPr>
-              <a:t>2017</a:t>
-            </a:r>
-            <a:endParaRPr lang="en-GB" sz="1050" dirty="0">
-              <a:solidFill>
-                <a:schemeClr val="bg2">
-                  <a:lumMod val="10000"/>
-                </a:schemeClr>
-              </a:solidFill>
-              <a:latin typeface="Calibri" panose="020F0502020204030204" pitchFamily="34" charset="0"/>
-            </a:endParaRPr>
           </a:p>
         </p:txBody>
       </p:sp>
@@ -19900,9 +17715,6 @@
           </a:bodyPr>
           <a:lstStyle/>
           <a:p>
-            <a:pPr algn="ctr">
-              <a:defRPr/>
-            </a:pPr>
             <a:r>
               <a:rPr lang="en-US" sz="2800" b="1" dirty="0" smtClean="0">
                 <a:solidFill>
@@ -19910,24 +17722,7 @@
                 </a:solidFill>
                 <a:latin typeface="+mj-lt"/>
               </a:rPr>
-              <a:t> Aider les personnes et les travailleurs déplacés </a:t>
-            </a:r>
-            <a:br>
-              <a:rPr lang="en-US" sz="2800" b="1" dirty="0" smtClean="0">
-                <a:solidFill>
-                  <a:schemeClr val="tx2"/>
-                </a:solidFill>
-                <a:latin typeface="+mj-lt"/>
-              </a:rPr>
-            </a:br>
-            <a:r>
-              <a:rPr lang="en-US" sz="2800" b="1" dirty="0" smtClean="0">
-                <a:solidFill>
-                  <a:schemeClr val="tx2"/>
-                </a:solidFill>
-                <a:latin typeface="+mj-lt"/>
-              </a:rPr>
-              <a:t>à s'adapter et à saisir de nouvelles opportunités</a:t>
+              <a:t> Aider les personnes et les travailleurs déplacés à s'adapter et à saisir de nouvelles opportunités</a:t>
             </a:r>
           </a:p>
         </p:txBody>
@@ -19977,14 +17772,17 @@
           </a:bodyPr>
           <a:lstStyle/>
           <a:p>
-            <a:endParaRPr lang="en-US" sz="1200" dirty="0" smtClean="0">
-              <a:solidFill>
-                <a:schemeClr val="bg2">
-                  <a:lumMod val="10000"/>
-                </a:schemeClr>
-              </a:solidFill>
-              <a:latin typeface="Calibri" panose="020F0502020204030204" pitchFamily="34" charset="0"/>
-            </a:endParaRPr>
+            <a:r>
+              <a:rPr lang="en-GB" sz="1200" dirty="0" smtClean="0">
+                <a:solidFill>
+                  <a:schemeClr val="bg2">
+                    <a:lumMod val="10000"/>
+                  </a:schemeClr>
+                </a:solidFill>
+                <a:latin typeface="Calibri" panose="020F0502020204030204" pitchFamily="34" charset="0"/>
+              </a:rPr>
+              <a:t/>
+            </a:r>
           </a:p>
           <a:p>
             <a:r>
@@ -19996,49 +17794,8 @@
                 </a:solidFill>
                 <a:latin typeface="Calibri" panose="020F0502020204030204" pitchFamily="34" charset="0"/>
               </a:rPr>
-              <a:t>Source : </a:t>
+              <a:t>Source : OCDE Going for Growth 2017.</a:t>
             </a:r>
-            <a:r>
-              <a:rPr lang="en-US" sz="1200" dirty="0" smtClean="0">
-                <a:solidFill>
-                  <a:schemeClr val="bg2">
-                    <a:lumMod val="10000"/>
-                  </a:schemeClr>
-                </a:solidFill>
-                <a:latin typeface="Calibri" panose="020F0502020204030204" pitchFamily="34" charset="0"/>
-              </a:rPr>
-              <a:t>OCDE </a:t>
-            </a:r>
-            <a:r>
-              <a:rPr lang="en-US" sz="1200" i="1" dirty="0" smtClean="0">
-                <a:solidFill>
-                  <a:schemeClr val="bg2">
-                    <a:lumMod val="10000"/>
-                  </a:schemeClr>
-                </a:solidFill>
-                <a:latin typeface="Calibri" panose="020F0502020204030204" pitchFamily="34" charset="0"/>
-              </a:rPr>
-              <a:t>Objectif croissance </a:t>
-            </a:r>
-            <a:r>
-              <a:rPr lang="en-US" sz="1200" dirty="0" smtClean="0">
-                <a:solidFill>
-                  <a:schemeClr val="bg2">
-                    <a:lumMod val="10000"/>
-                  </a:schemeClr>
-                </a:solidFill>
-                <a:latin typeface="Calibri" panose="020F0502020204030204" pitchFamily="34" charset="0"/>
-              </a:rPr>
-              <a:t>2017.</a:t>
-            </a:r>
-            <a:endParaRPr lang="en-GB" sz="1200" dirty="0">
-              <a:solidFill>
-                <a:schemeClr val="bg2">
-                  <a:lumMod val="10000"/>
-                </a:schemeClr>
-              </a:solidFill>
-              <a:latin typeface="Calibri" panose="020F0502020204030204" pitchFamily="34" charset="0"/>
-            </a:endParaRPr>
           </a:p>
         </p:txBody>
       </p:sp>
@@ -24108,9 +21865,6 @@
           </a:bodyPr>
           <a:lstStyle/>
           <a:p>
-            <a:pPr lvl="0" algn="ctr">
-              <a:defRPr/>
-            </a:pPr>
             <a:r>
               <a:rPr lang="en-US" sz="2800" b="1" dirty="0" smtClean="0">
                 <a:solidFill>
@@ -24118,31 +21872,8 @@
                 </a:solidFill>
                 <a:latin typeface="Arial"/>
               </a:rPr>
-              <a:t>Agir pour renforcer une croissance inclusive et </a:t>
+              <a:t>Agir pour renforcer une croissance inclusive et faire en sorte que la mondialisation profite à tous</a:t>
             </a:r>
-            <a:br>
-              <a:rPr lang="en-US" sz="2800" b="1" dirty="0" smtClean="0">
-                <a:solidFill>
-                  <a:srgbClr val="006299"/>
-                </a:solidFill>
-                <a:latin typeface="Arial"/>
-              </a:rPr>
-            </a:br>
-            <a:r>
-              <a:rPr lang="en-US" sz="2800" b="1" dirty="0" smtClean="0">
-                <a:solidFill>
-                  <a:srgbClr val="006299"/>
-                </a:solidFill>
-                <a:latin typeface="Arial"/>
-              </a:rPr>
-              <a:t>faire en sorte que la mondialisation profite à tous</a:t>
-            </a:r>
-            <a:endParaRPr lang="en-US" sz="2800" b="1" dirty="0">
-              <a:solidFill>
-                <a:srgbClr val="006299"/>
-              </a:solidFill>
-              <a:latin typeface="Arial"/>
-            </a:endParaRPr>
           </a:p>
         </p:txBody>
       </p:sp>
@@ -24213,7 +21944,6 @@
           </a:bodyPr>
           <a:lstStyle/>
           <a:p>
-            <a:pPr lvl="0"/>
             <a:r>
               <a:rPr lang="en-US" sz="2000" b="1" dirty="0" smtClean="0">
                 <a:solidFill>
@@ -24250,7 +21980,6 @@
           </a:bodyPr>
           <a:lstStyle/>
           <a:p>
-            <a:pPr lvl="0"/>
             <a:r>
               <a:rPr lang="en-US" sz="2000" b="1" dirty="0" smtClean="0">
                 <a:solidFill>
@@ -24260,7 +21989,7 @@
                 </a:solidFill>
                 <a:latin typeface="Calibri" pitchFamily="34" charset="0"/>
               </a:rPr>
-              <a:t>Politiques nationales</a:t>
+              <a:t>Politiques intérieures</a:t>
             </a:r>
           </a:p>
         </p:txBody>
@@ -24364,9 +22093,6 @@
           </a:bodyPr>
           <a:lstStyle/>
           <a:p>
-            <a:pPr algn="ctr">
-              <a:defRPr/>
-            </a:pPr>
             <a:r>
               <a:rPr lang="en-GB" sz="2800" b="1" dirty="0" smtClean="0">
                 <a:solidFill>
@@ -24374,13 +22100,10 @@
                 </a:solidFill>
                 <a:latin typeface="+mj-lt"/>
               </a:rPr>
-              <a:t>La croissance du PIB mondial devrait se redresser modestement </a:t>
+              <a:t>La croissance du PIB mondial devrait se redresser modérément </a:t>
             </a:r>
           </a:p>
           <a:p>
-            <a:pPr algn="ctr">
-              <a:defRPr/>
-            </a:pPr>
             <a:r>
               <a:rPr lang="en-GB" sz="2800" b="1" dirty="0" smtClean="0">
                 <a:solidFill>
@@ -24388,14 +22111,8 @@
                 </a:solidFill>
                 <a:latin typeface="+mj-lt"/>
               </a:rPr>
-              <a:t>mais reste en deçà des normes historiques</a:t>
+              <a:t>mais reste inférieure aux normes historiques</a:t>
             </a:r>
-            <a:endParaRPr lang="en-GB" sz="2800" b="1" dirty="0">
-              <a:solidFill>
-                <a:schemeClr val="tx2"/>
-              </a:solidFill>
-              <a:latin typeface="+mj-lt"/>
-            </a:endParaRPr>
           </a:p>
         </p:txBody>
       </p:sp>
@@ -24453,102 +22170,8 @@
                 </a:solidFill>
                 <a:latin typeface="Calibri" panose="020F0502020204030204" pitchFamily="34" charset="0"/>
               </a:rPr>
-              <a:t/>
+              <a:t>Source : base de données de l'OCDE Economic Outlook, juin 2017.</a:t>
             </a:r>
-            <a:br>
-              <a:rPr lang="en-US" sz="1200" dirty="0" smtClean="0">
-                <a:solidFill>
-                  <a:schemeClr val="bg2">
-                    <a:lumMod val="10000"/>
-                  </a:schemeClr>
-                </a:solidFill>
-                <a:latin typeface="Calibri" panose="020F0502020204030204" pitchFamily="34" charset="0"/>
-              </a:rPr>
-            </a:br>
-            <a:r>
-              <a:rPr lang="en-US" sz="1200" dirty="0" smtClean="0">
-                <a:solidFill>
-                  <a:schemeClr val="bg2">
-                    <a:lumMod val="10000"/>
-                  </a:schemeClr>
-                </a:solidFill>
-                <a:latin typeface="Calibri" panose="020F0502020204030204" pitchFamily="34" charset="0"/>
-              </a:rPr>
-              <a:t/>
-            </a:r>
-            <a:br>
-              <a:rPr lang="en-US" sz="1200" dirty="0" smtClean="0">
-                <a:solidFill>
-                  <a:schemeClr val="bg2">
-                    <a:lumMod val="10000"/>
-                  </a:schemeClr>
-                </a:solidFill>
-                <a:latin typeface="Calibri" panose="020F0502020204030204" pitchFamily="34" charset="0"/>
-              </a:rPr>
-            </a:br>
-            <a:r>
-              <a:rPr lang="en-US" sz="1200" dirty="0" smtClean="0">
-                <a:solidFill>
-                  <a:schemeClr val="bg2">
-                    <a:lumMod val="10000"/>
-                  </a:schemeClr>
-                </a:solidFill>
-                <a:latin typeface="Calibri" panose="020F0502020204030204" pitchFamily="34" charset="0"/>
-              </a:rPr>
-              <a:t>Source</a:t>
-            </a:r>
-            <a:r>
-              <a:rPr lang="en-US" sz="1200" dirty="0">
-                <a:solidFill>
-                  <a:schemeClr val="bg2">
-                    <a:lumMod val="10000"/>
-                  </a:schemeClr>
-                </a:solidFill>
-                <a:latin typeface="Calibri" panose="020F0502020204030204" pitchFamily="34" charset="0"/>
-              </a:rPr>
-              <a:t> : OCDE </a:t>
-            </a:r>
-            <a:r>
-              <a:rPr lang="en-US" sz="1200" dirty="0" smtClean="0">
-                <a:solidFill>
-                  <a:schemeClr val="bg2">
-                    <a:lumMod val="10000"/>
-                  </a:schemeClr>
-                </a:solidFill>
-                <a:latin typeface="Calibri" panose="020F0502020204030204" pitchFamily="34" charset="0"/>
-              </a:rPr>
-              <a:t>juin </a:t>
-            </a:r>
-            <a:r>
-              <a:rPr lang="en-US" sz="1200" dirty="0">
-                <a:solidFill>
-                  <a:schemeClr val="bg2">
-                    <a:lumMod val="10000"/>
-                  </a:schemeClr>
-                </a:solidFill>
-                <a:latin typeface="Calibri" panose="020F0502020204030204" pitchFamily="34" charset="0"/>
-              </a:rPr>
-              <a:t>2017 </a:t>
-            </a:r>
-            <a:r>
-              <a:rPr lang="en-US" sz="1200" dirty="0" smtClean="0">
-                <a:solidFill>
-                  <a:schemeClr val="bg2">
-                    <a:lumMod val="10000"/>
-                  </a:schemeClr>
-                </a:solidFill>
-                <a:latin typeface="Calibri" panose="020F0502020204030204" pitchFamily="34" charset="0"/>
-              </a:rPr>
-              <a:t>base de données des Perspectives économiques.</a:t>
-            </a:r>
-            <a:endParaRPr lang="en-GB" sz="1200" dirty="0">
-              <a:solidFill>
-                <a:schemeClr val="bg2">
-                  <a:lumMod val="10000"/>
-                </a:schemeClr>
-              </a:solidFill>
-              <a:latin typeface="Calibri" panose="020F0502020204030204" pitchFamily="34" charset="0"/>
-            </a:endParaRPr>
           </a:p>
         </p:txBody>
       </p:sp>
@@ -24574,7 +22197,6 @@
           </a:bodyPr>
           <a:lstStyle/>
           <a:p>
-            <a:pPr algn="ctr"/>
             <a:r>
               <a:rPr lang="en-US" sz="2000" b="1" dirty="0" smtClean="0">
                 <a:solidFill>
@@ -24688,9 +22310,6 @@
           </a:bodyPr>
           <a:lstStyle/>
           <a:p>
-            <a:pPr algn="ctr">
-              <a:defRPr/>
-            </a:pPr>
             <a:r>
               <a:rPr lang="en-GB" sz="2800" b="1" dirty="0" smtClean="0">
                 <a:solidFill>
@@ -24698,13 +22317,10 @@
                 </a:solidFill>
                 <a:latin typeface="+mj-lt"/>
               </a:rPr>
-              <a:t>La croissance du PIB par habitant est inférieure aux niveaux historiques </a:t>
+              <a:t>La croissance du PIB par habitant est inférieure à la moyenne historique </a:t>
             </a:r>
           </a:p>
           <a:p>
-            <a:pPr algn="ctr">
-              <a:defRPr/>
-            </a:pPr>
             <a:r>
               <a:rPr lang="en-GB" sz="2800" b="1" dirty="0" smtClean="0">
                 <a:solidFill>
@@ -24712,14 +22328,8 @@
                 </a:solidFill>
                 <a:latin typeface="+mj-lt"/>
               </a:rPr>
-              <a:t>et les inégalités de revenus continuent d'augmenter</a:t>
+              <a:t>et les inégalités de revenu continuent d'augmenter</a:t>
             </a:r>
-            <a:endParaRPr lang="en-GB" sz="2800" b="1" dirty="0">
-              <a:solidFill>
-                <a:schemeClr val="tx2"/>
-              </a:solidFill>
-              <a:latin typeface="+mj-lt"/>
-            </a:endParaRPr>
           </a:p>
         </p:txBody>
       </p:sp>
@@ -24768,7 +22378,6 @@
           </a:bodyPr>
           <a:lstStyle/>
           <a:p>
-            <a:pPr algn="ctr"/>
             <a:r>
               <a:rPr lang="en-US" sz="2000" b="1" dirty="0" smtClean="0">
                 <a:solidFill>
@@ -24782,37 +22391,17 @@
             </a:r>
           </a:p>
           <a:p>
-            <a:pPr lvl="0" algn="ctr"/>
             <a:r>
-              <a:rPr lang="en-US" sz="1200" i="1" dirty="0">
+              <a:rPr lang="en-US" sz="2000" b="1" dirty="0" smtClean="0">
                 <a:solidFill>
-                  <a:srgbClr val="E6E6E6">
+                  <a:schemeClr val="bg2">
                     <a:lumMod val="10000"/>
-                  </a:srgbClr>
+                  </a:schemeClr>
                 </a:solidFill>
                 <a:latin typeface="Calibri" pitchFamily="34" charset="0"/>
               </a:rPr>
-              <a:t>Les lignes horizontales représentent les moyennes pour </a:t>
+              <a:t>Les lignes horizontales sont les moyennes pour 1987-2007</a:t>
             </a:r>
-            <a:r>
-              <a:rPr lang="en-US" sz="1200" i="1" dirty="0" smtClean="0">
-                <a:solidFill>
-                  <a:srgbClr val="E6E6E6">
-                    <a:lumMod val="10000"/>
-                  </a:srgbClr>
-                </a:solidFill>
-                <a:latin typeface="Calibri" pitchFamily="34" charset="0"/>
-              </a:rPr>
-              <a:t>1987-2007</a:t>
-            </a:r>
-            <a:endParaRPr lang="en-US" sz="1200" i="1" dirty="0">
-              <a:solidFill>
-                <a:srgbClr val="E6E6E6">
-                  <a:lumMod val="10000"/>
-                </a:srgbClr>
-              </a:solidFill>
-              <a:latin typeface="Calibri" pitchFamily="34" charset="0"/>
-            </a:endParaRPr>
           </a:p>
         </p:txBody>
       </p:sp>
@@ -24838,7 +22427,6 @@
           </a:bodyPr>
           <a:lstStyle/>
           <a:p>
-            <a:pPr lvl="0" algn="ctr"/>
             <a:r>
               <a:rPr lang="en-US" sz="2000" b="1" dirty="0" smtClean="0">
                 <a:solidFill>
@@ -24848,70 +22436,8 @@
                 </a:solidFill>
                 <a:latin typeface="Calibri" pitchFamily="34" charset="0"/>
               </a:rPr>
-              <a:t>Les inégalités de revenu augmentent au sein de l'OCDE</a:t>
+              <a:t>Les inégalités de revenu augmentent dans l'OCDE Revenu disponible réel des ménages, population totale</a:t>
             </a:r>
-            <a:r>
-              <a:rPr lang="en-US" b="1" dirty="0" smtClean="0">
-                <a:solidFill>
-                  <a:schemeClr val="bg2">
-                    <a:lumMod val="10000"/>
-                  </a:schemeClr>
-                </a:solidFill>
-                <a:latin typeface="Calibri" pitchFamily="34" charset="0"/>
-              </a:rPr>
-              <a:t> </a:t>
-            </a:r>
-            <a:br>
-              <a:rPr lang="en-US" b="1" dirty="0" smtClean="0">
-                <a:solidFill>
-                  <a:schemeClr val="bg2">
-                    <a:lumMod val="10000"/>
-                  </a:schemeClr>
-                </a:solidFill>
-                <a:latin typeface="Calibri" pitchFamily="34" charset="0"/>
-              </a:rPr>
-            </a:br>
-            <a:r>
-              <a:rPr lang="en-US" sz="1200" i="1" dirty="0" smtClean="0">
-                <a:solidFill>
-                  <a:schemeClr val="bg2">
-                    <a:lumMod val="10000"/>
-                  </a:schemeClr>
-                </a:solidFill>
-                <a:latin typeface="Calibri" pitchFamily="34" charset="0"/>
-              </a:rPr>
-              <a:t>Revenu disponible réel des </a:t>
-            </a:r>
-            <a:r>
-              <a:rPr lang="en-US" sz="1200" i="1" dirty="0">
-                <a:solidFill>
-                  <a:schemeClr val="bg2">
-                    <a:lumMod val="10000"/>
-                  </a:schemeClr>
-                </a:solidFill>
-                <a:latin typeface="Calibri" pitchFamily="34" charset="0"/>
-              </a:rPr>
-              <a:t>ménages, </a:t>
-            </a:r>
-            <a:r>
-              <a:rPr lang="en-US" sz="1200" i="1" dirty="0" smtClean="0">
-                <a:solidFill>
-                  <a:schemeClr val="bg2">
-                    <a:lumMod val="10000"/>
-                  </a:schemeClr>
-                </a:solidFill>
-                <a:latin typeface="Calibri" pitchFamily="34" charset="0"/>
-              </a:rPr>
-              <a:t>population totale</a:t>
-            </a:r>
-            <a:endParaRPr lang="en-US" sz="1200" i="1" dirty="0">
-              <a:solidFill>
-                <a:schemeClr val="bg2">
-                  <a:lumMod val="10000"/>
-                </a:schemeClr>
-              </a:solidFill>
-              <a:latin typeface="Calibri" pitchFamily="34" charset="0"/>
-            </a:endParaRPr>
           </a:p>
         </p:txBody>
       </p:sp>
@@ -24987,40 +22513,7 @@
                 </a:solidFill>
                 <a:latin typeface="Calibri" panose="020F0502020204030204" pitchFamily="34" charset="0"/>
               </a:rPr>
-              <a:t>Note : </a:t>
-            </a:r>
-            <a:r>
-              <a:rPr lang="en-US" sz="1200" dirty="0" smtClean="0">
-                <a:solidFill>
-                  <a:schemeClr val="bg2">
-                    <a:lumMod val="10000"/>
-                  </a:schemeClr>
-                </a:solidFill>
-                <a:latin typeface="Calibri" panose="020F0502020204030204" pitchFamily="34" charset="0"/>
-              </a:rPr>
-              <a:t>L'axe de droite représente la </a:t>
-            </a:r>
-            <a:r>
-              <a:rPr lang="en-US" sz="1200" dirty="0">
-                <a:solidFill>
-                  <a:schemeClr val="bg2">
-                    <a:lumMod val="10000"/>
-                  </a:schemeClr>
-                </a:solidFill>
-                <a:latin typeface="Calibri" panose="020F0502020204030204" pitchFamily="34" charset="0"/>
-              </a:rPr>
-              <a:t>moyenne non pondérée de </a:t>
-            </a:r>
-            <a:r>
-              <a:rPr lang="en-US" sz="1200" dirty="0" smtClean="0">
-                <a:solidFill>
-                  <a:schemeClr val="bg2">
-                    <a:lumMod val="10000"/>
-                  </a:schemeClr>
-                </a:solidFill>
-                <a:latin typeface="Calibri" panose="020F0502020204030204" pitchFamily="34" charset="0"/>
-              </a:rPr>
-              <a:t>17 pays de l'OCDE.</a:t>
+              <a:t>Note : l'axe de droite correspond à la moyenne non pondérée de 17 pays de l'OCDE.</a:t>
             </a:r>
           </a:p>
           <a:p>
@@ -25033,51 +22526,7 @@
                 </a:solidFill>
                 <a:latin typeface="Calibri" panose="020F0502020204030204" pitchFamily="34" charset="0"/>
               </a:rPr>
-              <a:t>Source : OCDE base de données des Perspectives économiques de juin 2017 </a:t>
-            </a:r>
-            <a:r>
-              <a:rPr lang="en-US" sz="1200" dirty="0" smtClean="0">
-                <a:solidFill>
-                  <a:schemeClr val="bg2">
-                    <a:lumMod val="10000"/>
-                  </a:schemeClr>
-                </a:solidFill>
-                <a:latin typeface="Calibri" panose="020F0502020204030204" pitchFamily="34" charset="0"/>
-              </a:rPr>
-              <a:t>; </a:t>
-            </a:r>
-            <a:r>
-              <a:rPr lang="en-US" sz="1200" dirty="0">
-                <a:solidFill>
-                  <a:schemeClr val="bg2">
-                    <a:lumMod val="10000"/>
-                  </a:schemeClr>
-                </a:solidFill>
-                <a:latin typeface="Calibri" panose="020F0502020204030204" pitchFamily="34" charset="0"/>
-              </a:rPr>
-              <a:t>et </a:t>
-            </a:r>
-            <a:r>
-              <a:rPr lang="en-US" sz="1200" dirty="0" smtClean="0">
-                <a:solidFill>
-                  <a:schemeClr val="bg2">
-                    <a:lumMod val="10000"/>
-                  </a:schemeClr>
-                </a:solidFill>
-                <a:latin typeface="Calibri" panose="020F0502020204030204" pitchFamily="34" charset="0"/>
-              </a:rPr>
-              <a:t>OCDE </a:t>
-            </a:r>
-            <a:r>
-              <a:rPr lang="en-US" sz="1200" dirty="0">
-                <a:solidFill>
-                  <a:schemeClr val="bg2">
-                    <a:lumMod val="10000"/>
-                  </a:schemeClr>
-                </a:solidFill>
-                <a:latin typeface="Calibri" panose="020F0502020204030204" pitchFamily="34" charset="0"/>
-              </a:rPr>
-              <a:t>base de données sur la distribution des revenus.</a:t>
+              <a:t>Source : base de données de l'OCDE Economic Outlook, juin 2017 ; et base de données de l'OCDE Income Distribution.</a:t>
             </a:r>
           </a:p>
         </p:txBody>
@@ -25140,9 +22589,6 @@
           </a:bodyPr>
           <a:lstStyle/>
           <a:p>
-            <a:pPr algn="ctr">
-              <a:defRPr/>
-            </a:pPr>
             <a:r>
               <a:rPr lang="en-GB" sz="2800" b="1" dirty="0" smtClean="0">
                 <a:solidFill>
@@ -25150,14 +22596,8 @@
                 </a:solidFill>
                 <a:latin typeface="+mj-lt"/>
               </a:rPr>
-              <a:t>Projections des Perspectives économiques de l'OCDE</a:t>
+              <a:t>Projections de l'OCDE Economic Outlook</a:t>
             </a:r>
-            <a:endParaRPr lang="en-GB" sz="2800" b="1" dirty="0">
-              <a:solidFill>
-                <a:schemeClr val="tx2"/>
-              </a:solidFill>
-              <a:latin typeface="+mj-lt"/>
-            </a:endParaRPr>
           </a:p>
         </p:txBody>
       </p:sp>
@@ -25206,7 +22646,6 @@
           </a:bodyPr>
           <a:lstStyle/>
           <a:p>
-            <a:pPr algn="ctr"/>
             <a:r>
               <a:rPr lang="en-GB" sz="2000" b="1" dirty="0" smtClean="0">
                 <a:solidFill>
@@ -25220,9 +22659,8 @@
             </a:r>
           </a:p>
           <a:p>
-            <a:pPr algn="ctr"/>
             <a:r>
-              <a:rPr lang="en-GB" sz="1200" i="1" dirty="0" smtClean="0">
+              <a:rPr lang="en-GB" sz="2000" b="1" dirty="0" smtClean="0">
                 <a:solidFill>
                   <a:schemeClr val="bg2">
                     <a:lumMod val="10000"/>
@@ -25230,7 +22668,7 @@
                 </a:solidFill>
                 <a:latin typeface="Calibri" pitchFamily="34" charset="0"/>
               </a:rPr>
-              <a:t>Glissement annuel, %</a:t>
+              <a:t>En glissement annuel, %</a:t>
             </a:r>
           </a:p>
         </p:txBody>
@@ -25266,81 +22704,7 @@
                 </a:solidFill>
                 <a:latin typeface="Calibri" panose="020F0502020204030204" pitchFamily="34" charset="0"/>
               </a:rPr>
-              <a:t/>
-            </a:r>
-            <a:br>
-              <a:rPr lang="en-US" sz="1200" dirty="0" smtClean="0">
-                <a:solidFill>
-                  <a:schemeClr val="bg2">
-                    <a:lumMod val="10000"/>
-                  </a:schemeClr>
-                </a:solidFill>
-                <a:latin typeface="Calibri" panose="020F0502020204030204" pitchFamily="34" charset="0"/>
-              </a:rPr>
-            </a:br>
-            <a:r>
-              <a:rPr lang="en-US" sz="1200" dirty="0" smtClean="0">
-                <a:solidFill>
-                  <a:schemeClr val="bg2">
-                    <a:lumMod val="10000"/>
-                  </a:schemeClr>
-                </a:solidFill>
-                <a:latin typeface="Calibri" panose="020F0502020204030204" pitchFamily="34" charset="0"/>
-              </a:rPr>
-              <a:t>Note : Différence </a:t>
-            </a:r>
-            <a:r>
-              <a:rPr lang="en-US" sz="1200" dirty="0">
-                <a:solidFill>
-                  <a:schemeClr val="bg2">
-                    <a:lumMod val="10000"/>
-                  </a:schemeClr>
-                </a:solidFill>
-                <a:latin typeface="Calibri" panose="020F0502020204030204" pitchFamily="34" charset="0"/>
-              </a:rPr>
-              <a:t>en points de pourcentage calculée sur des chiffres arrondis. </a:t>
-            </a:r>
-            <a:endParaRPr lang="en-US" sz="1200" dirty="0" smtClean="0">
-              <a:solidFill>
-                <a:schemeClr val="bg2">
-                  <a:lumMod val="10000"/>
-                </a:schemeClr>
-              </a:solidFill>
-              <a:latin typeface="Calibri" panose="020F0502020204030204" pitchFamily="34" charset="0"/>
-            </a:endParaRPr>
-          </a:p>
-          <a:p>
-            <a:r>
-              <a:rPr lang="en-US" sz="1200" dirty="0" smtClean="0">
-                <a:solidFill>
-                  <a:schemeClr val="bg2">
-                    <a:lumMod val="10000"/>
-                  </a:schemeClr>
-                </a:solidFill>
-                <a:latin typeface="Calibri" panose="020F0502020204030204" pitchFamily="34" charset="0"/>
-              </a:rPr>
-              <a:t>1. La croissance de l'Irlande en 2015 est calculée à partir de la valeur ajoutée brute à prix constants, hors</a:t>
-            </a:r>
-            <a:br>
-              <a:rPr lang="en-US" sz="1200" dirty="0" smtClean="0">
-                <a:solidFill>
-                  <a:schemeClr val="bg2">
-                    <a:lumMod val="10000"/>
-                  </a:schemeClr>
-                </a:solidFill>
-                <a:latin typeface="Calibri" panose="020F0502020204030204" pitchFamily="34" charset="0"/>
-              </a:rPr>
-            </a:br>
-            <a:r>
-              <a:rPr lang="en-US" sz="1200" dirty="0" smtClean="0">
-                <a:solidFill>
-                  <a:schemeClr val="bg2">
-                    <a:lumMod val="10000"/>
-                  </a:schemeClr>
-                </a:solidFill>
-                <a:latin typeface="Calibri" panose="020F0502020204030204" pitchFamily="34" charset="0"/>
-              </a:rPr>
-              <a:t>secteurs dominés par les entreprises multinationales à capitaux étrangers.</a:t>
+              <a:t>Note : écart en points de pourcentage calculé à partir de chiffres arrondis. </a:t>
             </a:r>
           </a:p>
           <a:p>
@@ -25353,19 +22717,10 @@
                 </a:solidFill>
                 <a:latin typeface="Calibri" panose="020F0502020204030204" pitchFamily="34" charset="0"/>
               </a:rPr>
-              <a:t>2. Exercices </a:t>
+              <a:t>1. La croissance de l'Irlande en 2015 est calculée à partir de la valeur ajoutée brute à prix constants, hors secteurs dominés par les multinationales sous contrôle étranger.</a:t>
             </a:r>
-            <a:r>
-              <a:rPr lang="en-US" sz="1200" dirty="0">
-                <a:solidFill>
-                  <a:schemeClr val="bg2">
-                    <a:lumMod val="10000"/>
-                  </a:schemeClr>
-                </a:solidFill>
-                <a:latin typeface="Calibri" panose="020F0502020204030204" pitchFamily="34" charset="0"/>
-              </a:rPr>
-              <a:t>budgétaires débutant en avril</a:t>
-            </a:r>
+          </a:p>
+          <a:p>
             <a:r>
               <a:rPr lang="en-US" sz="1200" dirty="0" smtClean="0">
                 <a:solidFill>
@@ -25375,7 +22730,7 @@
                 </a:solidFill>
                 <a:latin typeface="Calibri" panose="020F0502020204030204" pitchFamily="34" charset="0"/>
               </a:rPr>
-              <a:t>.</a:t>
+              <a:t>2. Exercices budgétaires débutant en avril.</a:t>
             </a:r>
           </a:p>
         </p:txBody>
@@ -25553,9 +22908,6 @@
           </a:bodyPr>
           <a:lstStyle/>
           <a:p>
-            <a:pPr algn="ctr">
-              <a:defRPr/>
-            </a:pPr>
             <a:r>
               <a:rPr lang="en-US" sz="2800" b="1" dirty="0" smtClean="0">
                 <a:solidFill>
@@ -25563,24 +22915,7 @@
                 </a:solidFill>
                 <a:latin typeface="+mj-lt"/>
               </a:rPr>
-              <a:t>Les indicateurs de confiance annoncent une reprise,</a:t>
-            </a:r>
-            <a:br>
-              <a:rPr lang="en-US" sz="2800" b="1" dirty="0" smtClean="0">
-                <a:solidFill>
-                  <a:schemeClr val="tx2"/>
-                </a:solidFill>
-                <a:latin typeface="+mj-lt"/>
-              </a:rPr>
-            </a:br>
-            <a:r>
-              <a:rPr lang="en-US" sz="2800" b="1" dirty="0" smtClean="0">
-                <a:solidFill>
-                  <a:schemeClr val="tx2"/>
-                </a:solidFill>
-                <a:latin typeface="+mj-lt"/>
-              </a:rPr>
-              <a:t>mais ils sont devenus moins fiables</a:t>
+              <a:t>Les indicateurs de confiance signalent un redressement, mais ils sont devenus moins fiables</a:t>
             </a:r>
           </a:p>
         </p:txBody>
@@ -25630,7 +22965,6 @@
           </a:bodyPr>
           <a:lstStyle/>
           <a:p>
-            <a:pPr algn="ctr"/>
             <a:r>
               <a:rPr lang="en-GB" sz="2000" b="1" dirty="0" smtClean="0">
                 <a:solidFill>
@@ -25640,48 +22974,8 @@
                 </a:solidFill>
                 <a:latin typeface="Calibri" pitchFamily="34" charset="0"/>
               </a:rPr>
-              <a:t>Confiance des consommateurs et des entreprises</a:t>
+              <a:t>Confiance des consommateurs et des entreprises OCDE et BRIICS, indice</a:t>
             </a:r>
-            <a:br>
-              <a:rPr lang="en-GB" sz="2000" b="1" dirty="0" smtClean="0">
-                <a:solidFill>
-                  <a:schemeClr val="bg2">
-                    <a:lumMod val="10000"/>
-                  </a:schemeClr>
-                </a:solidFill>
-                <a:latin typeface="Calibri" pitchFamily="34" charset="0"/>
-              </a:rPr>
-            </a:br>
-            <a:r>
-              <a:rPr lang="en-GB" sz="1200" i="1" dirty="0">
-                <a:solidFill>
-                  <a:srgbClr val="E6E6E6">
-                    <a:lumMod val="10000"/>
-                  </a:srgbClr>
-                </a:solidFill>
-                <a:latin typeface="Calibri" pitchFamily="34" charset="0"/>
-              </a:rPr>
-              <a:t>OCDE et </a:t>
-            </a:r>
-            <a:r>
-              <a:rPr lang="en-GB" sz="1200" i="1" dirty="0" smtClean="0">
-                <a:solidFill>
-                  <a:srgbClr val="E6E6E6">
-                    <a:lumMod val="10000"/>
-                  </a:srgbClr>
-                </a:solidFill>
-                <a:latin typeface="Calibri" pitchFamily="34" charset="0"/>
-              </a:rPr>
-              <a:t>BRIICS, indice</a:t>
-            </a:r>
-            <a:endParaRPr lang="en-GB" sz="2000" baseline="30000" dirty="0">
-              <a:solidFill>
-                <a:schemeClr val="bg2">
-                  <a:lumMod val="10000"/>
-                </a:schemeClr>
-              </a:solidFill>
-              <a:latin typeface="Calibri" pitchFamily="34" charset="0"/>
-            </a:endParaRPr>
           </a:p>
         </p:txBody>
       </p:sp>
@@ -25716,40 +23010,10 @@
                 </a:solidFill>
                 <a:latin typeface="Calibri" panose="020F0502020204030204" pitchFamily="34" charset="0"/>
               </a:rPr>
-              <a:t>Note : Les indices de confiance sont des moyennes pondérées par le PIB en PPA des </a:t>
+              <a:t>Note : les indices de confiance sont des moyennes pondérées par le PIB en PPA de séries nationales standardisées dont la moyenne de long terme = 100. La confiance des consommateurs est corrélée à la croissance mondiale des ventes au détail et la confiance des entreprises à la croissance mondiale de la production industrielle.</a:t>
             </a:r>
-            <a:r>
-              <a:rPr lang="en-US" sz="1200" dirty="0" smtClean="0">
-                <a:solidFill>
-                  <a:schemeClr val="bg2">
-                    <a:lumMod val="10000"/>
-                  </a:schemeClr>
-                </a:solidFill>
-                <a:latin typeface="Calibri" panose="020F0502020204030204" pitchFamily="34" charset="0"/>
-              </a:rPr>
-              <a:t>séries standardisées nationales où la moyenne à long terme = 100. </a:t>
-            </a:r>
-            <a:br>
-              <a:rPr lang="en-US" sz="1200" dirty="0" smtClean="0">
-                <a:solidFill>
-                  <a:schemeClr val="bg2">
-                    <a:lumMod val="10000"/>
-                  </a:schemeClr>
-                </a:solidFill>
-                <a:latin typeface="Calibri" panose="020F0502020204030204" pitchFamily="34" charset="0"/>
-              </a:rPr>
-            </a:br>
-            <a:r>
-              <a:rPr lang="en-US" sz="1200" dirty="0" smtClean="0">
-                <a:solidFill>
-                  <a:schemeClr val="bg2">
-                    <a:lumMod val="10000"/>
-                  </a:schemeClr>
-                </a:solidFill>
-                <a:latin typeface="Calibri" panose="020F0502020204030204" pitchFamily="34" charset="0"/>
-              </a:rPr>
-              <a:t>La confiance des </a:t>
-            </a:r>
+          </a:p>
+          <a:p>
             <a:r>
               <a:rPr lang="en-US" sz="1200" dirty="0">
                 <a:solidFill>
@@ -25759,161 +23023,8 @@
                 </a:solidFill>
                 <a:latin typeface="Calibri" panose="020F0502020204030204" pitchFamily="34" charset="0"/>
               </a:rPr>
-              <a:t>consommateurs est </a:t>
+              <a:t>Source : base de données de l'OCDE Main Economic Indicators ; et calculs de l'OCDE.</a:t>
             </a:r>
-            <a:r>
-              <a:rPr lang="en-US" sz="1200" dirty="0" smtClean="0">
-                <a:solidFill>
-                  <a:schemeClr val="bg2">
-                    <a:lumMod val="10000"/>
-                  </a:schemeClr>
-                </a:solidFill>
-                <a:latin typeface="Calibri" panose="020F0502020204030204" pitchFamily="34" charset="0"/>
-              </a:rPr>
-              <a:t>en corrélation </a:t>
-            </a:r>
-            <a:r>
-              <a:rPr lang="en-US" sz="1200" dirty="0">
-                <a:solidFill>
-                  <a:schemeClr val="bg2">
-                    <a:lumMod val="10000"/>
-                  </a:schemeClr>
-                </a:solidFill>
-                <a:latin typeface="Calibri" panose="020F0502020204030204" pitchFamily="34" charset="0"/>
-              </a:rPr>
-              <a:t>avec la croissance des ventes au détail mondiales </a:t>
-            </a:r>
-            <a:r>
-              <a:rPr lang="en-US" sz="1200" dirty="0" smtClean="0">
-                <a:solidFill>
-                  <a:schemeClr val="bg2">
-                    <a:lumMod val="10000"/>
-                  </a:schemeClr>
-                </a:solidFill>
-                <a:latin typeface="Calibri" panose="020F0502020204030204" pitchFamily="34" charset="0"/>
-              </a:rPr>
-              <a:t>et la confiance des </a:t>
-            </a:r>
-            <a:r>
-              <a:rPr lang="en-US" sz="1200" dirty="0">
-                <a:solidFill>
-                  <a:schemeClr val="bg2">
-                    <a:lumMod val="10000"/>
-                  </a:schemeClr>
-                </a:solidFill>
-                <a:latin typeface="Calibri" panose="020F0502020204030204" pitchFamily="34" charset="0"/>
-              </a:rPr>
-              <a:t>e</a:t>
-            </a:r>
-            <a:r>
-              <a:rPr lang="en-US" sz="1200" dirty="0" smtClean="0">
-                <a:solidFill>
-                  <a:schemeClr val="bg2">
-                    <a:lumMod val="10000"/>
-                  </a:schemeClr>
-                </a:solidFill>
-                <a:latin typeface="Calibri" panose="020F0502020204030204" pitchFamily="34" charset="0"/>
-              </a:rPr>
-              <a:t>ntreprises </a:t>
-            </a:r>
-            <a:r>
-              <a:rPr lang="en-US" sz="1200" dirty="0">
-                <a:solidFill>
-                  <a:schemeClr val="bg2">
-                    <a:lumMod val="10000"/>
-                  </a:schemeClr>
-                </a:solidFill>
-                <a:latin typeface="Calibri" panose="020F0502020204030204" pitchFamily="34" charset="0"/>
-              </a:rPr>
-              <a:t>est en corrélation </a:t>
-            </a:r>
-            <a:r>
-              <a:rPr lang="en-US" sz="1200" dirty="0" smtClean="0">
-                <a:solidFill>
-                  <a:schemeClr val="bg2">
-                    <a:lumMod val="10000"/>
-                  </a:schemeClr>
-                </a:solidFill>
-                <a:latin typeface="Calibri" panose="020F0502020204030204" pitchFamily="34" charset="0"/>
-              </a:rPr>
-              <a:t>avec la croissance de la </a:t>
-            </a:r>
-            <a:r>
-              <a:rPr lang="en-US" sz="1200" dirty="0">
-                <a:solidFill>
-                  <a:schemeClr val="bg2">
-                    <a:lumMod val="10000"/>
-                  </a:schemeClr>
-                </a:solidFill>
-                <a:latin typeface="Calibri" panose="020F0502020204030204" pitchFamily="34" charset="0"/>
-              </a:rPr>
-              <a:t>production industrielle </a:t>
-            </a:r>
-            <a:r>
-              <a:rPr lang="en-US" sz="1200" dirty="0" smtClean="0">
-                <a:solidFill>
-                  <a:schemeClr val="bg2">
-                    <a:lumMod val="10000"/>
-                  </a:schemeClr>
-                </a:solidFill>
-                <a:latin typeface="Calibri" panose="020F0502020204030204" pitchFamily="34" charset="0"/>
-              </a:rPr>
-              <a:t>mondiale.</a:t>
-            </a:r>
-          </a:p>
-          <a:p>
-            <a:r>
-              <a:rPr lang="en-US" sz="1200" dirty="0" smtClean="0">
-                <a:solidFill>
-                  <a:schemeClr val="bg2">
-                    <a:lumMod val="10000"/>
-                  </a:schemeClr>
-                </a:solidFill>
-                <a:latin typeface="Calibri" panose="020F0502020204030204" pitchFamily="34" charset="0"/>
-              </a:rPr>
-              <a:t>Source : OCDE </a:t>
-            </a:r>
-            <a:r>
-              <a:rPr lang="en-US" sz="1200" dirty="0">
-                <a:solidFill>
-                  <a:schemeClr val="bg2">
-                    <a:lumMod val="10000"/>
-                  </a:schemeClr>
-                </a:solidFill>
-                <a:latin typeface="Calibri" panose="020F0502020204030204" pitchFamily="34" charset="0"/>
-              </a:rPr>
-              <a:t>base de données des Indicateurs économiques principaux ; </a:t>
-            </a:r>
-            <a:r>
-              <a:rPr lang="en-US" sz="1200" dirty="0" smtClean="0">
-                <a:solidFill>
-                  <a:schemeClr val="bg2">
-                    <a:lumMod val="10000"/>
-                  </a:schemeClr>
-                </a:solidFill>
-                <a:latin typeface="Calibri" panose="020F0502020204030204" pitchFamily="34" charset="0"/>
-              </a:rPr>
-              <a:t>et </a:t>
-            </a:r>
-            <a:r>
-              <a:rPr lang="en-US" sz="1200" dirty="0">
-                <a:solidFill>
-                  <a:schemeClr val="bg2">
-                    <a:lumMod val="10000"/>
-                  </a:schemeClr>
-                </a:solidFill>
-                <a:latin typeface="Calibri" panose="020F0502020204030204" pitchFamily="34" charset="0"/>
-              </a:rPr>
-              <a:t>calculs de l'OCDE.</a:t>
-            </a:r>
-            <a:endParaRPr lang="en-US" sz="1200" dirty="0" smtClean="0">
-              <a:solidFill>
-                <a:schemeClr val="bg2">
-                  <a:lumMod val="10000"/>
-                </a:schemeClr>
-              </a:solidFill>
-              <a:latin typeface="Calibri" panose="020F0502020204030204" pitchFamily="34" charset="0"/>
-            </a:endParaRPr>
           </a:p>
         </p:txBody>
       </p:sp>
@@ -25939,7 +23050,6 @@
           </a:bodyPr>
           <a:lstStyle/>
           <a:p>
-            <a:pPr algn="ctr"/>
             <a:r>
               <a:rPr lang="en-GB" sz="2000" b="1" dirty="0" smtClean="0">
                 <a:solidFill>
@@ -25953,37 +23063,17 @@
             </a:r>
           </a:p>
           <a:p>
-            <a:pPr algn="ctr"/>
             <a:r>
-              <a:rPr lang="en-GB" sz="1200" i="1" dirty="0">
+              <a:rPr lang="en-GB" sz="2000" b="1" dirty="0" smtClean="0">
                 <a:solidFill>
-                  <a:srgbClr val="E6E6E6">
+                  <a:schemeClr val="bg2">
                     <a:lumMod val="10000"/>
-                  </a:srgbClr>
+                  </a:schemeClr>
                 </a:solidFill>
                 <a:latin typeface="Calibri" pitchFamily="34" charset="0"/>
               </a:rPr>
-              <a:t>OCDE et </a:t>
+              <a:t>OCDE et BRIICS, corrélation sur 5 ans avec l'activité</a:t>
             </a:r>
-            <a:r>
-              <a:rPr lang="en-GB" sz="1200" i="1" dirty="0" smtClean="0">
-                <a:solidFill>
-                  <a:srgbClr val="E6E6E6">
-                    <a:lumMod val="10000"/>
-                  </a:srgbClr>
-                </a:solidFill>
-                <a:latin typeface="Calibri" pitchFamily="34" charset="0"/>
-              </a:rPr>
-              <a:t>BRIICS, corrélation sur 5 ans avec l'activité</a:t>
-            </a:r>
-            <a:endParaRPr lang="en-GB" sz="2000" baseline="30000" dirty="0">
-              <a:solidFill>
-                <a:schemeClr val="bg2">
-                  <a:lumMod val="10000"/>
-                </a:schemeClr>
-              </a:solidFill>
-              <a:latin typeface="Calibri" pitchFamily="34" charset="0"/>
-            </a:endParaRPr>
           </a:p>
         </p:txBody>
       </p:sp>
@@ -26127,9 +23217,6 @@
           </a:bodyPr>
           <a:lstStyle/>
           <a:p>
-            <a:pPr algn="ctr">
-              <a:defRPr/>
-            </a:pPr>
             <a:r>
               <a:rPr lang="en-US" sz="2700" b="1" dirty="0" smtClean="0">
                 <a:solidFill>
@@ -26137,25 +23224,7 @@
                 </a:solidFill>
                 <a:latin typeface="+mj-lt"/>
               </a:rPr>
-              <a:t>L'investissement augmente mais le stock de capital est vieillissant </a:t>
-            </a:r>
-            <a:r>
-              <a:rPr lang="en-US" sz="2700" b="1" dirty="0">
-                <a:solidFill>
-                  <a:schemeClr val="tx2"/>
-                </a:solidFill>
-                <a:latin typeface="+mj-lt"/>
-              </a:rPr>
-              <a:t>P</a:t>
-            </a:r>
-            <a:r>
-              <a:rPr lang="en-US" sz="2700" b="1" dirty="0" smtClean="0">
-                <a:solidFill>
-                  <a:schemeClr val="tx2"/>
-                </a:solidFill>
-                <a:latin typeface="+mj-lt"/>
-              </a:rPr>
-              <a:t>otentiel haussier grâce à la modernisation technologique</a:t>
+              <a:t>L'investissement augmente, mais le stock de capital est ancien Potentiel de hausse lié à la modernisation technologique</a:t>
             </a:r>
           </a:p>
         </p:txBody>
@@ -26214,226 +23283,7 @@
                 </a:solidFill>
                 <a:latin typeface="Calibri" panose="020F0502020204030204" pitchFamily="34" charset="0"/>
               </a:rPr>
-              <a:t>Note</a:t>
-            </a:r>
-            <a:r>
-              <a:rPr lang="en-US" sz="1050" dirty="0">
-                <a:solidFill>
-                  <a:schemeClr val="bg2">
-                    <a:lumMod val="10000"/>
-                  </a:schemeClr>
-                </a:solidFill>
-                <a:latin typeface="Calibri" panose="020F0502020204030204" pitchFamily="34" charset="0"/>
-              </a:rPr>
-              <a:t> : </a:t>
-            </a:r>
-            <a:r>
-              <a:rPr lang="en-US" sz="1050" dirty="0" smtClean="0">
-                <a:solidFill>
-                  <a:schemeClr val="bg2">
-                    <a:lumMod val="10000"/>
-                  </a:schemeClr>
-                </a:solidFill>
-                <a:latin typeface="Calibri" panose="020F0502020204030204" pitchFamily="34" charset="0"/>
-              </a:rPr>
-              <a:t>Facturation mondiale </a:t>
-            </a:r>
-            <a:r>
-              <a:rPr lang="en-US" sz="1050" dirty="0">
-                <a:solidFill>
-                  <a:schemeClr val="bg2">
-                    <a:lumMod val="10000"/>
-                  </a:schemeClr>
-                </a:solidFill>
-                <a:latin typeface="Calibri" panose="020F0502020204030204" pitchFamily="34" charset="0"/>
-              </a:rPr>
-              <a:t>de semi-conducteurs en dollars américains courants. </a:t>
-            </a:r>
-            <a:r>
-              <a:rPr lang="en-US" sz="1050" dirty="0" smtClean="0">
-                <a:solidFill>
-                  <a:schemeClr val="bg2">
-                    <a:lumMod val="10000"/>
-                  </a:schemeClr>
-                </a:solidFill>
-                <a:latin typeface="Calibri" panose="020F0502020204030204" pitchFamily="34" charset="0"/>
-              </a:rPr>
-              <a:t>La production des principaux ordinateurs avancés </a:t>
-            </a:r>
-            <a:r>
-              <a:rPr lang="en-US" sz="1050" dirty="0">
-                <a:solidFill>
-                  <a:schemeClr val="bg2">
-                    <a:lumMod val="10000"/>
-                  </a:schemeClr>
-                </a:solidFill>
-                <a:latin typeface="Calibri" panose="020F0502020204030204" pitchFamily="34" charset="0"/>
-              </a:rPr>
-              <a:t>et de l'électronique est une moyenne pondérée de la production de produits informatiques et électroniques </a:t>
-            </a:r>
-            <a:r>
-              <a:rPr lang="en-US" sz="1050" dirty="0" smtClean="0">
-                <a:solidFill>
-                  <a:schemeClr val="bg2">
-                    <a:lumMod val="10000"/>
-                  </a:schemeClr>
-                </a:solidFill>
-                <a:latin typeface="Calibri" panose="020F0502020204030204" pitchFamily="34" charset="0"/>
-              </a:rPr>
-              <a:t>pour les États-Unis, </a:t>
-            </a:r>
-            <a:r>
-              <a:rPr lang="en-US" sz="1050" dirty="0">
-                <a:solidFill>
-                  <a:schemeClr val="bg2">
-                    <a:lumMod val="10000"/>
-                  </a:schemeClr>
-                </a:solidFill>
-                <a:latin typeface="Calibri" panose="020F0502020204030204" pitchFamily="34" charset="0"/>
-              </a:rPr>
-              <a:t>de la production d'ordinateurs, </a:t>
-            </a:r>
-            <a:r>
-              <a:rPr lang="en-US" sz="1050" dirty="0" smtClean="0">
-                <a:solidFill>
-                  <a:schemeClr val="bg2">
-                    <a:lumMod val="10000"/>
-                  </a:schemeClr>
-                </a:solidFill>
-                <a:latin typeface="Calibri" panose="020F0502020204030204" pitchFamily="34" charset="0"/>
-              </a:rPr>
-              <a:t>de produits électroniques </a:t>
-            </a:r>
-            <a:r>
-              <a:rPr lang="en-US" sz="1050" dirty="0">
-                <a:solidFill>
-                  <a:schemeClr val="bg2">
-                    <a:lumMod val="10000"/>
-                  </a:schemeClr>
-                </a:solidFill>
-                <a:latin typeface="Calibri" panose="020F0502020204030204" pitchFamily="34" charset="0"/>
-              </a:rPr>
-              <a:t>et optiques pour l'Allemagne, </a:t>
-            </a:r>
-            <a:r>
-              <a:rPr lang="en-US" sz="1050" dirty="0" smtClean="0">
-                <a:solidFill>
-                  <a:schemeClr val="bg2">
-                    <a:lumMod val="10000"/>
-                  </a:schemeClr>
-                </a:solidFill>
-                <a:latin typeface="Calibri" panose="020F0502020204030204" pitchFamily="34" charset="0"/>
-              </a:rPr>
-              <a:t>et de la production d'équipements électroniques de communication et d'information </a:t>
-            </a:r>
-            <a:r>
-              <a:rPr lang="en-US" sz="1050" dirty="0">
-                <a:solidFill>
-                  <a:schemeClr val="bg2">
-                    <a:lumMod val="10000"/>
-                  </a:schemeClr>
-                </a:solidFill>
-                <a:latin typeface="Calibri" panose="020F0502020204030204" pitchFamily="34" charset="0"/>
-              </a:rPr>
-              <a:t>ainsi que de pièces et dispositifs électroniques </a:t>
-            </a:r>
-            <a:r>
-              <a:rPr lang="en-US" sz="1050" dirty="0" smtClean="0">
-                <a:solidFill>
-                  <a:schemeClr val="bg2">
-                    <a:lumMod val="10000"/>
-                  </a:schemeClr>
-                </a:solidFill>
-                <a:latin typeface="Calibri" panose="020F0502020204030204" pitchFamily="34" charset="0"/>
-              </a:rPr>
-              <a:t>pour le Japon.</a:t>
-            </a:r>
-            <a:br>
-              <a:rPr lang="en-US" sz="1050" dirty="0" smtClean="0">
-                <a:solidFill>
-                  <a:schemeClr val="bg2">
-                    <a:lumMod val="10000"/>
-                  </a:schemeClr>
-                </a:solidFill>
-                <a:latin typeface="Calibri" panose="020F0502020204030204" pitchFamily="34" charset="0"/>
-              </a:rPr>
-            </a:br>
-            <a:r>
-              <a:rPr lang="en-US" sz="1050" dirty="0" smtClean="0">
-                <a:solidFill>
-                  <a:schemeClr val="bg2">
-                    <a:lumMod val="10000"/>
-                  </a:schemeClr>
-                </a:solidFill>
-                <a:latin typeface="Calibri" panose="020F0502020204030204" pitchFamily="34" charset="0"/>
-              </a:rPr>
-              <a:t>Source : OCDE base de données des Perspectives économiques de juin 2017</a:t>
-            </a:r>
-            <a:r>
-              <a:rPr lang="en-US" sz="1050" dirty="0">
-                <a:solidFill>
-                  <a:schemeClr val="bg2">
-                    <a:lumMod val="10000"/>
-                  </a:schemeClr>
-                </a:solidFill>
-                <a:latin typeface="Calibri" panose="020F0502020204030204" pitchFamily="34" charset="0"/>
-              </a:rPr>
-              <a:t> ; World Semi-Conductor Statistics ; Eurostat ; Board of Governors of the Federal Reserve System ; </a:t>
-            </a:r>
-            <a:r>
-              <a:rPr lang="en-US" sz="1050" dirty="0" smtClean="0">
-                <a:solidFill>
-                  <a:schemeClr val="bg2">
-                    <a:lumMod val="10000"/>
-                  </a:schemeClr>
-                </a:solidFill>
-                <a:latin typeface="Calibri" panose="020F0502020204030204" pitchFamily="34" charset="0"/>
-              </a:rPr>
-              <a:t>Japan Ministry </a:t>
-            </a:r>
-            <a:r>
-              <a:rPr lang="en-US" sz="1050" dirty="0">
-                <a:solidFill>
-                  <a:schemeClr val="bg2">
-                    <a:lumMod val="10000"/>
-                  </a:schemeClr>
-                </a:solidFill>
-                <a:latin typeface="Calibri" panose="020F0502020204030204" pitchFamily="34" charset="0"/>
-              </a:rPr>
-              <a:t>of Economy, Trade and </a:t>
-            </a:r>
-            <a:r>
-              <a:rPr lang="en-US" sz="1050" dirty="0" smtClean="0">
-                <a:solidFill>
-                  <a:schemeClr val="bg2">
-                    <a:lumMod val="10000"/>
-                  </a:schemeClr>
-                </a:solidFill>
-                <a:latin typeface="Calibri" panose="020F0502020204030204" pitchFamily="34" charset="0"/>
-              </a:rPr>
-              <a:t>Industry ; </a:t>
-            </a:r>
-            <a:r>
-              <a:rPr lang="en-US" sz="1050" dirty="0">
-                <a:solidFill>
-                  <a:schemeClr val="bg2">
-                    <a:lumMod val="10000"/>
-                  </a:schemeClr>
-                </a:solidFill>
-                <a:latin typeface="Calibri" panose="020F0502020204030204" pitchFamily="34" charset="0"/>
-              </a:rPr>
-              <a:t>et calculs de l'OCDE</a:t>
-            </a:r>
-            <a:r>
-              <a:rPr lang="en-US" sz="1050" dirty="0" smtClean="0">
-                <a:solidFill>
-                  <a:schemeClr val="bg2">
-                    <a:lumMod val="10000"/>
-                  </a:schemeClr>
-                </a:solidFill>
-                <a:latin typeface="Calibri" panose="020F0502020204030204" pitchFamily="34" charset="0"/>
-              </a:rPr>
-              <a:t>.</a:t>
+              <a:t>Note : facturations mondiales de semi-conducteurs en dollars US nominaux. La production des principaux biens informatiques et électroniques avancés est une moyenne pondérée de la production de produits informatiques et électroniques pour les États-Unis, de la production de produits informatiques, électroniques et optiques pour l'Allemagne, et de la production d'équipements électroniques d'information et de communication ainsi que de composants et dispositifs électroniques pour le Japon.Source : base de données de l'OCDE Economic Outlook, juin 2017 ; World Semi-Conductor Statistics ; Eurostat ; Board of Governors of the Federal Reserve System ; Japan Ministry of Economy, Trade and Industry ; et calculs de l'OCDE.</a:t>
             </a:r>
           </a:p>
         </p:txBody>
@@ -26460,7 +23310,6 @@
           </a:bodyPr>
           <a:lstStyle/>
           <a:p>
-            <a:pPr algn="ctr"/>
             <a:r>
               <a:rPr lang="en-GB" sz="2000" b="1" dirty="0" smtClean="0">
                 <a:solidFill>
@@ -26472,24 +23321,6 @@
               </a:rPr>
               <a:t>Produits de haute technologie</a:t>
             </a:r>
-            <a:br>
-              <a:rPr lang="en-GB" sz="2000" b="1" dirty="0" smtClean="0">
-                <a:solidFill>
-                  <a:schemeClr val="bg2">
-                    <a:lumMod val="10000"/>
-                  </a:schemeClr>
-                </a:solidFill>
-                <a:latin typeface="Calibri" pitchFamily="34" charset="0"/>
-              </a:rPr>
-            </a:br>
-            <a:endParaRPr lang="en-GB" sz="2000" baseline="30000" dirty="0">
-              <a:solidFill>
-                <a:schemeClr val="bg2">
-                  <a:lumMod val="10000"/>
-                </a:schemeClr>
-              </a:solidFill>
-              <a:latin typeface="Calibri" pitchFamily="34" charset="0"/>
-            </a:endParaRPr>
           </a:p>
         </p:txBody>
       </p:sp>
@@ -26515,7 +23346,6 @@
           </a:bodyPr>
           <a:lstStyle/>
           <a:p>
-            <a:pPr algn="ctr"/>
             <a:r>
               <a:rPr lang="en-US" sz="2000" b="1" dirty="0" smtClean="0">
                 <a:solidFill>
@@ -26670,9 +23500,6 @@
           </a:bodyPr>
           <a:lstStyle/>
           <a:p>
-            <a:pPr algn="ctr">
-              <a:defRPr/>
-            </a:pPr>
             <a:r>
               <a:rPr lang="en-US" sz="2800" b="1" dirty="0">
                 <a:solidFill>
@@ -26680,16 +23507,7 @@
                 </a:solidFill>
                 <a:latin typeface="+mj-lt"/>
               </a:rPr>
-              <a:t>Le commerce mondial s'est récemment redressé grâce à un important soutien du </a:t>
-            </a:r>
-            <a:r>
-              <a:rPr lang="en-US" sz="2800" b="1" dirty="0" smtClean="0">
-                <a:solidFill>
-                  <a:schemeClr val="tx2"/>
-                </a:solidFill>
-                <a:latin typeface="+mj-lt"/>
-              </a:rPr>
-              <a:t>programme de relance en Chine</a:t>
+              <a:t>Le commerce mondial s'est récemment redressé, avec un soutien important des mesures de relance en Chine</a:t>
             </a:r>
           </a:p>
         </p:txBody>
@@ -26739,7 +23557,6 @@
           </a:bodyPr>
           <a:lstStyle/>
           <a:p>
-            <a:pPr algn="ctr"/>
             <a:r>
               <a:rPr lang="en-GB" sz="2000" b="1" dirty="0" smtClean="0">
                 <a:solidFill>
@@ -26751,24 +23568,6 @@
               </a:rPr>
               <a:t>Contributions à la croissance du commerce mondial</a:t>
             </a:r>
-            <a:br>
-              <a:rPr lang="en-GB" sz="2000" b="1" dirty="0" smtClean="0">
-                <a:solidFill>
-                  <a:schemeClr val="bg2">
-                    <a:lumMod val="10000"/>
-                  </a:schemeClr>
-                </a:solidFill>
-                <a:latin typeface="Calibri" pitchFamily="34" charset="0"/>
-              </a:rPr>
-            </a:br>
-            <a:endParaRPr lang="en-GB" sz="2000" baseline="30000" dirty="0">
-              <a:solidFill>
-                <a:schemeClr val="bg2">
-                  <a:lumMod val="10000"/>
-                </a:schemeClr>
-              </a:solidFill>
-              <a:latin typeface="Calibri" pitchFamily="34" charset="0"/>
-            </a:endParaRPr>
           </a:p>
         </p:txBody>
       </p:sp>
@@ -26803,93 +23602,7 @@
                 </a:solidFill>
                 <a:latin typeface="Calibri" panose="020F0502020204030204" pitchFamily="34" charset="0"/>
               </a:rPr>
-              <a:t/>
-            </a:r>
-            <a:br>
-              <a:rPr lang="en-US" sz="1200" dirty="0" smtClean="0">
-                <a:solidFill>
-                  <a:schemeClr val="bg2">
-                    <a:lumMod val="10000"/>
-                  </a:schemeClr>
-                </a:solidFill>
-                <a:latin typeface="Calibri" panose="020F0502020204030204" pitchFamily="34" charset="0"/>
-              </a:rPr>
-            </a:br>
-            <a:r>
-              <a:rPr lang="en-US" sz="1200" dirty="0" smtClean="0">
-                <a:solidFill>
-                  <a:schemeClr val="bg2">
-                    <a:lumMod val="10000"/>
-                  </a:schemeClr>
-                </a:solidFill>
-                <a:latin typeface="Calibri" panose="020F0502020204030204" pitchFamily="34" charset="0"/>
-              </a:rPr>
-              <a:t>Note : Les producteurs de matières premières comprennent l'Argentine, l'Australie, le Brésil, le Chili, la Colombie, la Norvège, la Nouvelle-Zélande, la Russie, l'Arabie saoudite, l'Afrique du Sud et d'autres pays producteurs de pétrole.</a:t>
-            </a:r>
-            <a:br>
-              <a:rPr lang="en-US" sz="1200" dirty="0" smtClean="0">
-                <a:solidFill>
-                  <a:schemeClr val="bg2">
-                    <a:lumMod val="10000"/>
-                  </a:schemeClr>
-                </a:solidFill>
-                <a:latin typeface="Calibri" panose="020F0502020204030204" pitchFamily="34" charset="0"/>
-              </a:rPr>
-            </a:br>
-            <a:r>
-              <a:rPr lang="en-US" sz="1200" dirty="0" smtClean="0">
-                <a:solidFill>
-                  <a:schemeClr val="bg2">
-                    <a:lumMod val="10000"/>
-                  </a:schemeClr>
-                </a:solidFill>
-                <a:latin typeface="Calibri" panose="020F0502020204030204" pitchFamily="34" charset="0"/>
-              </a:rPr>
-              <a:t>Source : OCDE base de données des Perspectives économiques de juin 2017</a:t>
-            </a:r>
-            <a:r>
-              <a:rPr lang="en-US" sz="1200" dirty="0">
-                <a:solidFill>
-                  <a:schemeClr val="bg2">
-                    <a:lumMod val="10000"/>
-                  </a:schemeClr>
-                </a:solidFill>
-                <a:latin typeface="Calibri" panose="020F0502020204030204" pitchFamily="34" charset="0"/>
-              </a:rPr>
-              <a:t> ; </a:t>
-            </a:r>
-            <a:r>
-              <a:rPr lang="en-US" sz="1200" dirty="0" smtClean="0">
-                <a:solidFill>
-                  <a:schemeClr val="bg2">
-                    <a:lumMod val="10000"/>
-                  </a:schemeClr>
-                </a:solidFill>
-                <a:latin typeface="Calibri" panose="020F0502020204030204" pitchFamily="34" charset="0"/>
-              </a:rPr>
-              <a:t>et Bureau national </a:t>
-            </a:r>
-            <a:r>
-              <a:rPr lang="en-US" sz="1200" dirty="0">
-                <a:solidFill>
-                  <a:schemeClr val="bg2">
-                    <a:lumMod val="10000"/>
-                  </a:schemeClr>
-                </a:solidFill>
-                <a:latin typeface="Calibri" panose="020F0502020204030204" pitchFamily="34" charset="0"/>
-              </a:rPr>
-              <a:t>des statistiques de </a:t>
-            </a:r>
-            <a:r>
-              <a:rPr lang="en-US" sz="1200" dirty="0" smtClean="0">
-                <a:solidFill>
-                  <a:schemeClr val="bg2">
-                    <a:lumMod val="10000"/>
-                  </a:schemeClr>
-                </a:solidFill>
-                <a:latin typeface="Calibri" panose="020F0502020204030204" pitchFamily="34" charset="0"/>
-              </a:rPr>
-              <a:t>Chine.</a:t>
+              <a:t>Note : les producteurs de matières premières incluent l'Argentine, l'Australie, le Brésil, le Chili, la Colombie, la Norvège, la Nouvelle-Zélande, la Russie, l'Arabie saoudite, l'Afrique du Sud et d'autres pays producteurs de pétrole.Source : base de données de l'OCDE Economic Outlook, juin 2017 ; et National Bureau of Statistics of China.</a:t>
             </a:r>
           </a:p>
         </p:txBody>
@@ -26916,7 +23629,6 @@
           </a:bodyPr>
           <a:lstStyle/>
           <a:p>
-            <a:pPr algn="ctr"/>
             <a:r>
               <a:rPr lang="en-US" sz="2000" b="1" dirty="0" smtClean="0">
                 <a:solidFill>
@@ -26926,28 +23638,7 @@
                 </a:solidFill>
                 <a:latin typeface="Calibri" pitchFamily="34" charset="0"/>
               </a:rPr>
-              <a:t>Investissement nominal chinois en </a:t>
-            </a:r>
-            <a:br>
-              <a:rPr lang="en-US" sz="2000" b="1" dirty="0" smtClean="0">
-                <a:solidFill>
-                  <a:schemeClr val="bg2">
-                    <a:lumMod val="10000"/>
-                  </a:schemeClr>
-                </a:solidFill>
-                <a:latin typeface="Calibri" pitchFamily="34" charset="0"/>
-              </a:rPr>
-            </a:br>
-            <a:r>
-              <a:rPr lang="en-US" sz="2000" b="1" dirty="0" smtClean="0">
-                <a:solidFill>
-                  <a:schemeClr val="bg2">
-                    <a:lumMod val="10000"/>
-                  </a:schemeClr>
-                </a:solidFill>
-                <a:latin typeface="Calibri" pitchFamily="34" charset="0"/>
-              </a:rPr>
-              <a:t>actifs fixes</a:t>
+              <a:t>Investissement nominal en actifs fixes de la Chine</a:t>
             </a:r>
           </a:p>
         </p:txBody>
@@ -27115,9 +23806,6 @@
           </a:bodyPr>
           <a:lstStyle/>
           <a:p>
-            <a:pPr algn="ctr">
-              <a:defRPr/>
-            </a:pPr>
             <a:r>
               <a:rPr lang="en-US" sz="2800" b="1" dirty="0" smtClean="0">
                 <a:solidFill>
@@ -27125,31 +23813,8 @@
                 </a:solidFill>
                 <a:latin typeface="+mj-lt"/>
               </a:rPr>
-              <a:t>Le redressement du marché du travail est incomplet </a:t>
+              <a:t>La reprise du marché du travail est incomplète et la croissance des salaires réels reste atone</a:t>
             </a:r>
-            <a:br>
-              <a:rPr lang="en-US" sz="2800" b="1" dirty="0" smtClean="0">
-                <a:solidFill>
-                  <a:schemeClr val="tx2"/>
-                </a:solidFill>
-                <a:latin typeface="+mj-lt"/>
-              </a:rPr>
-            </a:br>
-            <a:r>
-              <a:rPr lang="en-US" sz="2800" b="1" dirty="0" smtClean="0">
-                <a:solidFill>
-                  <a:schemeClr val="tx2"/>
-                </a:solidFill>
-                <a:latin typeface="+mj-lt"/>
-              </a:rPr>
-              <a:t>et la croissance des salaires réels reste atone</a:t>
-            </a:r>
-            <a:endParaRPr lang="en-GB" sz="2800" b="1" dirty="0">
-              <a:solidFill>
-                <a:schemeClr val="tx2"/>
-              </a:solidFill>
-              <a:latin typeface="+mj-lt"/>
-            </a:endParaRPr>
           </a:p>
         </p:txBody>
       </p:sp>
@@ -27175,7 +23840,6 @@
           </a:bodyPr>
           <a:lstStyle/>
           <a:p>
-            <a:pPr lvl="0" algn="ctr"/>
             <a:r>
               <a:rPr lang="en-US" sz="2000" b="1" dirty="0" smtClean="0">
                 <a:solidFill>
@@ -27185,37 +23849,8 @@
                 </a:solidFill>
                 <a:latin typeface="Calibri" pitchFamily="34" charset="0"/>
               </a:rPr>
-              <a:t>Chômage et sous-emploi</a:t>
+              <a:t>Chômage et sous-emploi OCDE, part de la population active</a:t>
             </a:r>
-            <a:br>
-              <a:rPr lang="en-US" sz="2000" b="1" dirty="0" smtClean="0">
-                <a:solidFill>
-                  <a:schemeClr val="bg2">
-                    <a:lumMod val="10000"/>
-                  </a:schemeClr>
-                </a:solidFill>
-                <a:latin typeface="Calibri" pitchFamily="34" charset="0"/>
-              </a:rPr>
-            </a:br>
-            <a:r>
-              <a:rPr lang="en-US" sz="1200" i="1" dirty="0" smtClean="0">
-                <a:solidFill>
-                  <a:schemeClr val="bg2">
-                    <a:lumMod val="10000"/>
-                  </a:schemeClr>
-                </a:solidFill>
-                <a:latin typeface="Calibri" pitchFamily="34" charset="0"/>
-              </a:rPr>
-              <a:t>OCDE, part de la population active</a:t>
-            </a:r>
-            <a:endParaRPr lang="en-US" sz="1200" i="1" dirty="0">
-              <a:solidFill>
-                <a:schemeClr val="bg2">
-                  <a:lumMod val="10000"/>
-                </a:schemeClr>
-              </a:solidFill>
-              <a:latin typeface="Calibri" pitchFamily="34" charset="0"/>
-            </a:endParaRPr>
           </a:p>
         </p:txBody>
       </p:sp>
@@ -27250,103 +23885,8 @@
                 </a:solidFill>
                 <a:latin typeface="Calibri" panose="020F0502020204030204" pitchFamily="34" charset="0"/>
               </a:rPr>
-              <a:t>Note : </a:t>
+              <a:t>Note : salaires réels mesurés comme la rémunération du travail par salarié ajustée du déflateur du PIB.Source : base de données de l'OCDE Economic Outlook, juin 2017 ; base de données de l'OCDE Employment ; US Bureau of Labor Statistics ; Eurostat ; et Japan Statistics Bureau.</a:t>
             </a:r>
-            <a:r>
-              <a:rPr lang="en-US" sz="1200" dirty="0" smtClean="0">
-                <a:solidFill>
-                  <a:schemeClr val="bg2">
-                    <a:lumMod val="10000"/>
-                  </a:schemeClr>
-                </a:solidFill>
-                <a:latin typeface="Calibri" panose="020F0502020204030204" pitchFamily="34" charset="0"/>
-              </a:rPr>
-              <a:t>Les salaires réels mesurés par la </a:t>
-            </a:r>
-            <a:r>
-              <a:rPr lang="en-US" sz="1200" dirty="0">
-                <a:solidFill>
-                  <a:schemeClr val="bg2">
-                    <a:lumMod val="10000"/>
-                  </a:schemeClr>
-                </a:solidFill>
-                <a:latin typeface="Calibri" panose="020F0502020204030204" pitchFamily="34" charset="0"/>
-              </a:rPr>
-              <a:t>rémunération du travail par salarié </a:t>
-            </a:r>
-            <a:r>
-              <a:rPr lang="en-US" sz="1200" dirty="0" smtClean="0">
-                <a:solidFill>
-                  <a:schemeClr val="bg2">
-                    <a:lumMod val="10000"/>
-                  </a:schemeClr>
-                </a:solidFill>
-                <a:latin typeface="Calibri" panose="020F0502020204030204" pitchFamily="34" charset="0"/>
-              </a:rPr>
-              <a:t>corrigée </a:t>
-            </a:r>
-            <a:r>
-              <a:rPr lang="en-US" sz="1200" dirty="0">
-                <a:solidFill>
-                  <a:schemeClr val="bg2">
-                    <a:lumMod val="10000"/>
-                  </a:schemeClr>
-                </a:solidFill>
-                <a:latin typeface="Calibri" panose="020F0502020204030204" pitchFamily="34" charset="0"/>
-              </a:rPr>
-              <a:t>du </a:t>
-            </a:r>
-            <a:r>
-              <a:rPr lang="en-US" sz="1200" dirty="0" smtClean="0">
-                <a:solidFill>
-                  <a:schemeClr val="bg2">
-                    <a:lumMod val="10000"/>
-                  </a:schemeClr>
-                </a:solidFill>
-                <a:latin typeface="Calibri" panose="020F0502020204030204" pitchFamily="34" charset="0"/>
-              </a:rPr>
-              <a:t>déflateur du PIB</a:t>
-            </a:r>
-            <a:r>
-              <a:rPr lang="en-US" sz="1200" dirty="0">
-                <a:solidFill>
-                  <a:schemeClr val="bg2">
-                    <a:lumMod val="10000"/>
-                  </a:schemeClr>
-                </a:solidFill>
-                <a:latin typeface="Calibri" panose="020F0502020204030204" pitchFamily="34" charset="0"/>
-              </a:rPr>
-              <a:t>.</a:t>
-            </a:r>
-            <a:br>
-              <a:rPr lang="en-US" sz="1200" dirty="0">
-                <a:solidFill>
-                  <a:schemeClr val="bg2">
-                    <a:lumMod val="10000"/>
-                  </a:schemeClr>
-                </a:solidFill>
-                <a:latin typeface="Calibri" panose="020F0502020204030204" pitchFamily="34" charset="0"/>
-              </a:rPr>
-            </a:br>
-            <a:r>
-              <a:rPr lang="en-US" sz="1200" dirty="0">
-                <a:solidFill>
-                  <a:schemeClr val="bg2">
-                    <a:lumMod val="10000"/>
-                  </a:schemeClr>
-                </a:solidFill>
-                <a:latin typeface="Calibri" panose="020F0502020204030204" pitchFamily="34" charset="0"/>
-              </a:rPr>
-              <a:t>Source : OCDE base de données des Perspectives économiques de juin 2017 ; OCDE base de données sur l'emploi ; US Bureau of Labor Statistics ; Eurostat ; et Japan Statistics Bureau.</a:t>
-            </a:r>
-            <a:endParaRPr lang="en-US" sz="1200" dirty="0" smtClean="0">
-              <a:solidFill>
-                <a:schemeClr val="bg2">
-                  <a:lumMod val="10000"/>
-                </a:schemeClr>
-              </a:solidFill>
-              <a:latin typeface="Calibri" panose="020F0502020204030204" pitchFamily="34" charset="0"/>
-            </a:endParaRPr>
           </a:p>
         </p:txBody>
       </p:sp>
@@ -27372,7 +23912,6 @@
           </a:bodyPr>
           <a:lstStyle/>
           <a:p>
-            <a:pPr lvl="0" algn="ctr"/>
             <a:r>
               <a:rPr lang="en-US" sz="2000" b="1" dirty="0" smtClean="0">
                 <a:solidFill>
@@ -27386,26 +23925,17 @@
             </a:r>
           </a:p>
           <a:p>
-            <a:pPr lvl="0" algn="ctr"/>
             <a:r>
-              <a:rPr lang="en-US" sz="1200" i="1" dirty="0" smtClean="0">
+              <a:rPr lang="en-US" sz="2000" b="1" dirty="0" smtClean="0">
                 <a:solidFill>
-                  <a:srgbClr val="E6E6E6">
+                  <a:schemeClr val="bg2">
                     <a:lumMod val="10000"/>
-                  </a:srgbClr>
+                  </a:schemeClr>
                 </a:solidFill>
                 <a:latin typeface="Calibri" pitchFamily="34" charset="0"/>
               </a:rPr>
-              <a:t>Les lignes horizontales représentent les moyennes 1987-2007</a:t>
+              <a:t>Les lignes horizontales sont les moyennes pour 1987-2007</a:t>
             </a:r>
-            <a:endParaRPr lang="en-US" sz="1200" i="1" dirty="0">
-              <a:solidFill>
-                <a:schemeClr val="bg2">
-                  <a:lumMod val="10000"/>
-                </a:schemeClr>
-              </a:solidFill>
-              <a:latin typeface="Calibri" pitchFamily="34" charset="0"/>
-            </a:endParaRPr>
           </a:p>
         </p:txBody>
       </p:sp>

--- a/fixtures/real-world/oecd-economic-outlook-2017-fr.pptx
+++ b/fixtures/real-world/oecd-economic-outlook-2017-fr.pptx
@@ -2767,19 +2767,19 @@
             <a:rPr lang="en-GB" dirty="0" smtClean="0">
               <a:latin typeface="Calibri" panose="020F0502020204030204" pitchFamily="34" charset="0"/>
             </a:rPr>
-            <a:t>La croissance mondiale devrait se redresser modérément </a:t>
+            <a:t>Global growth expected to pick-up modestly </a:t>
           </a:r>
           <a:r>
             <a:rPr lang="en-GB" smtClean="0">
               <a:latin typeface="Calibri" panose="020F0502020204030204" pitchFamily="34" charset="0"/>
             </a:rPr>
-            <a:t>avec des risques </a:t>
+            <a:t>with upside </a:t>
           </a:r>
           <a:r>
             <a:rPr lang="en-GB" dirty="0" smtClean="0">
               <a:latin typeface="Calibri" panose="020F0502020204030204" pitchFamily="34" charset="0"/>
             </a:rPr>
-            <a:t>haussiers</a:t>
+            <a:t>risks</a:t>
           </a:r>
         </a:p>
       </dgm:t>
@@ -2821,7 +2821,7 @@
             <a:rPr lang="en-GB" dirty="0" smtClean="0">
               <a:latin typeface="Calibri" panose="020F0502020204030204" pitchFamily="34" charset="0"/>
             </a:rPr>
-            <a:t>Davantage d'efforts sont nécessaires pour mieux partager les gains des tendances structurelles et du commerce</a:t>
+            <a:t>More needs to be done to share the gains from structural trends and trade</a:t>
           </a:r>
         </a:p>
       </dgm:t>
@@ -2863,7 +2863,7 @@
             <a:rPr lang="en-GB" dirty="0" smtClean="0">
               <a:latin typeface="Calibri" panose="020F0502020204030204" pitchFamily="34" charset="0"/>
             </a:rPr>
-            <a:t>Une approche intégrée des politiques est nécessaire pour que la mondialisation profite à tous</a:t>
+            <a:t>An integrated policy approach is needed to make globalisation work for all</a:t>
           </a:r>
         </a:p>
       </dgm:t>
@@ -2910,7 +2910,7 @@
               </a:solidFill>
               <a:latin typeface="Calibri" panose="020F0502020204030204" pitchFamily="34" charset="0"/>
             </a:rPr>
-            <a:t>Les évolutions de la technologie, des préférences des consommateurs et du commerce surviennent simultanément</a:t>
+            <a:t>Changes to technology, consumer preferences and trade are occurring simultaneously</a:t>
           </a:r>
         </a:p>
       </dgm:t>
@@ -2958,7 +2958,7 @@
               </a:solidFill>
               <a:latin typeface="Calibri" panose="020F0502020204030204" pitchFamily="34" charset="0"/>
             </a:rPr>
-            <a:t>Des conditions de concurrence plus équitables pour le système international</a:t>
+            <a:t>A more level playing field for the international system</a:t>
           </a:r>
         </a:p>
       </dgm:t>
@@ -3005,7 +3005,7 @@
               </a:solidFill>
               <a:latin typeface="Calibri" panose="020F0502020204030204" pitchFamily="34" charset="0"/>
             </a:rPr>
-            <a:t>La confiance s'améliore et l'investissement et le commerce repartent à partir de niveaux faibles</a:t>
+            <a:t>Confidence is increasing and investment and trade are picking up from low levels</a:t>
           </a:r>
         </a:p>
       </dgm:t>
@@ -3052,7 +3052,7 @@
               </a:solidFill>
               <a:latin typeface="Calibri" panose="020F0502020204030204" pitchFamily="34" charset="0"/>
             </a:rPr>
-            <a:t>Signes d'une demande accrue de biens de haute technologie et d'investissements pour moderniser le capital</a:t>
+            <a:t>Signs of rising demand for high-tech goods and investment to upgrade capital</a:t>
           </a:r>
         </a:p>
       </dgm:t>
@@ -3100,7 +3100,7 @@
               </a:solidFill>
               <a:latin typeface="Calibri" panose="020F0502020204030204" pitchFamily="34" charset="0"/>
             </a:rPr>
-            <a:t>Réformes intérieures pour stimuler la concurrence, la création d'emplois, les compétences et l'innovation</a:t>
+            <a:t>Domestic reforms to boost competition, job creation, skills and innovation</a:t>
           </a:r>
         </a:p>
       </dgm:t>
@@ -3142,7 +3142,7 @@
             <a:rPr lang="en-GB" dirty="0" smtClean="0">
               <a:latin typeface="Calibri" panose="020F0502020204030204" pitchFamily="34" charset="0"/>
             </a:rPr>
-            <a:t>La croissance de la productivité et des salaires reste modérée ; les risques pour la stabilité financière persistent</a:t>
+            <a:t>Productivity and wage growth remain subdued; financial stability risks persist</a:t>
           </a:r>
         </a:p>
       </dgm:t>
@@ -3189,7 +3189,7 @@
               </a:solidFill>
               <a:latin typeface="Calibri" panose="020F0502020204030204" pitchFamily="34" charset="0"/>
             </a:rPr>
-            <a:t>Les pertes d'emplois dues aux réorientations de l'activité se concentrent dans l'industrie manufacturière et certaines régions</a:t>
+            <a:t>Job losses from shifts in activity are concentrated in manufacturing and specific regions</a:t>
           </a:r>
         </a:p>
       </dgm:t>
@@ -3236,7 +3236,7 @@
               </a:solidFill>
               <a:latin typeface="Calibri" panose="020F0502020204030204" pitchFamily="34" charset="0"/>
             </a:rPr>
-            <a:t>La croissance est généralisée ; la reprise chez les producteurs de matières premières soutient la modeste embellie mondiale</a:t>
+            <a:t>Growth is broad based; recovery in commodity producers helps the modest global upturn</a:t>
           </a:r>
           <a:endParaRPr lang="en-GB" dirty="0" smtClean="0">
             <a:solidFill>
@@ -3291,7 +3291,7 @@
               </a:solidFill>
               <a:latin typeface="Calibri" panose="020F0502020204030204" pitchFamily="34" charset="0"/>
             </a:rPr>
-            <a:t>Les principaux indicateurs de l'emploi s'améliorent, mais les marchés du travail ne se sont pas redressés</a:t>
+            <a:t>Headline employment indicators are improving but labour markets have not recovered</a:t>
           </a:r>
         </a:p>
       </dgm:t>
@@ -3338,7 +3338,7 @@
               </a:solidFill>
               <a:latin typeface="Calibri" panose="020F0502020204030204" pitchFamily="34" charset="0"/>
             </a:rPr>
-            <a:t>Risques financiers liés à une croissance du crédit élevée et en hausse, à la hausse des prix de l'immobilier et aux écarts de taux d'intérêt</a:t>
+            <a:t>Financial risks from high and rising credit growth, house price increases, interest rate gaps</a:t>
           </a:r>
           <a:endParaRPr lang="en-GB" dirty="0" smtClean="0">
             <a:solidFill>
@@ -3394,7 +3394,7 @@
               </a:solidFill>
               <a:latin typeface="Calibri" panose="020F0502020204030204" pitchFamily="34" charset="0"/>
             </a:rPr>
-            <a:t>Des politiques ciblées pour aider les personnes laissées de côté à saisir de nouvelles opportunités</a:t>
+            <a:t>Targeted policies to help people who are left behind seize new opportunities</a:t>
           </a:r>
         </a:p>
       </dgm:t>
@@ -3636,7 +3636,7 @@
             <a:rPr lang="en-GB" sz="2000" dirty="0" smtClean="0">
               <a:latin typeface="Calibri" panose="020F0502020204030204" pitchFamily="34" charset="0"/>
             </a:rPr>
-            <a:t>Mesures pour améliorer l'environnement international :</a:t>
+            <a:t>Actions to improve the international environment:</a:t>
           </a:r>
         </a:p>
       </dgm:t>
@@ -3683,7 +3683,7 @@
               </a:solidFill>
               <a:latin typeface="Calibri" panose="020F0502020204030204" pitchFamily="34" charset="0"/>
             </a:rPr>
-            <a:t>Préserver les institutions et les normes, notamment en matière de protection du travail et de l'environnement</a:t>
+            <a:t>Preserve institutions and standards, such as for labour and environmental protection</a:t>
           </a:r>
         </a:p>
       </dgm:t>
@@ -3730,7 +3730,7 @@
               </a:solidFill>
               <a:latin typeface="Calibri" panose="020F0502020204030204" pitchFamily="34" charset="0"/>
             </a:rPr>
-            <a:t>Promouvoir l'ouverture des marchés au commerce et à l'investissement transfrontaliers</a:t>
+            <a:t>Pursue open markets for cross-border trade and investment</a:t>
           </a:r>
         </a:p>
       </dgm:t>
@@ -3777,7 +3777,7 @@
               </a:solidFill>
               <a:latin typeface="Calibri" panose="020F0502020204030204" pitchFamily="34" charset="0"/>
             </a:rPr>
-            <a:t>Favoriser la coopération multilatérale, p. ex. sur l'érosion de la base d'imposition et le transfert de bénéfices et la politique de concurrence</a:t>
+            <a:t>Promote multilateral cooperation, e.g. on tax base erosion and profit shifting and competition policy</a:t>
           </a:r>
         </a:p>
       </dgm:t>
@@ -3824,7 +3824,7 @@
               </a:solidFill>
               <a:latin typeface="Calibri" panose="020F0502020204030204" pitchFamily="34" charset="0"/>
             </a:rPr>
-            <a:t>Lutter contre la corruption, le commerce illicite et la contrefaçon</a:t>
+            <a:t>Combat corruption, illicit trade and counterfeiting</a:t>
           </a:r>
         </a:p>
       </dgm:t>
@@ -4079,7 +4079,7 @@
             <a:rPr lang="en-GB" sz="1600" b="1" dirty="0" smtClean="0">
               <a:latin typeface="Calibri" panose="020F0502020204030204" pitchFamily="34" charset="0"/>
             </a:rPr>
-            <a:t>Rendre le système international plus équitable et plus efficace</a:t>
+            <a:t>Make the international system fairer and work better</a:t>
           </a:r>
           <a:endParaRPr lang="en-GB" sz="1600" b="1" dirty="0">
             <a:latin typeface="Calibri" panose="020F0502020204030204" pitchFamily="34" charset="0"/>
@@ -4127,7 +4127,7 @@
               </a:solidFill>
               <a:latin typeface="Calibri" panose="020F0502020204030204" pitchFamily="34" charset="0"/>
             </a:rPr>
-            <a:t>Politiques pour encourager les nouvelles entreprises, l'innovation et la création d'emplois</a:t>
+            <a:t>Policies to encourage new firms, innovation &amp; job creation</a:t>
           </a:r>
           <a:endParaRPr lang="en-GB" sz="1600" b="1" dirty="0">
             <a:solidFill>
@@ -4175,13 +4175,13 @@
             <a:rPr lang="en-GB" sz="1600" b="1" dirty="0" smtClean="0">
               <a:latin typeface="Calibri" panose="020F0502020204030204" pitchFamily="34" charset="0"/>
             </a:rPr>
-            <a:t>Des politiques ciblées pour aider les personnes à saisir de nouvelles </a:t>
+            <a:t>Targeted policies to help people seize new </a:t>
           </a:r>
           <a:r>
             <a:rPr lang="en-GB" sz="1550" b="1" dirty="0" smtClean="0">
               <a:latin typeface="Calibri" panose="020F0502020204030204" pitchFamily="34" charset="0"/>
             </a:rPr>
-            <a:t>opportunités</a:t>
+            <a:t>opportunities</a:t>
           </a:r>
           <a:endParaRPr lang="en-GB" sz="1550" b="1" dirty="0">
             <a:latin typeface="Calibri" panose="020F0502020204030204" pitchFamily="34" charset="0"/>
@@ -4433,19 +4433,19 @@
             <a:rPr lang="en-GB" sz="2000" kern="1200" dirty="0" smtClean="0">
               <a:latin typeface="Calibri" panose="020F0502020204030204" pitchFamily="34" charset="0"/>
             </a:rPr>
-            <a:t>La croissance mondiale devrait se redresser modérément </a:t>
+            <a:t>Global growth expected to pick-up modestly </a:t>
           </a:r>
           <a:r>
             <a:rPr lang="en-GB" sz="2000" kern="1200" smtClean="0">
               <a:latin typeface="Calibri" panose="020F0502020204030204" pitchFamily="34" charset="0"/>
             </a:rPr>
-            <a:t>avec des risques </a:t>
+            <a:t>with upside </a:t>
           </a:r>
           <a:r>
             <a:rPr lang="en-GB" sz="2000" kern="1200" dirty="0" smtClean="0">
               <a:latin typeface="Calibri" panose="020F0502020204030204" pitchFamily="34" charset="0"/>
             </a:rPr>
-            <a:t>haussiers</a:t>
+            <a:t>risks</a:t>
           </a:r>
         </a:p>
       </dsp:txBody>
@@ -4512,7 +4512,7 @@
               </a:solidFill>
               <a:latin typeface="Calibri" panose="020F0502020204030204" pitchFamily="34" charset="0"/>
             </a:rPr>
-            <a:t>Davantage d'efforts sont nécessaires pour mieux partager les gains des tendances structurelles et du commerce</a:t>
+            <a:t>Confidence is increasing and investment and trade are picking up from low levels</a:t>
           </a:r>
         </a:p>
         <a:p>
@@ -4537,7 +4537,7 @@
               </a:solidFill>
               <a:latin typeface="Calibri" panose="020F0502020204030204" pitchFamily="34" charset="0"/>
             </a:rPr>
-            <a:t>Une approche intégrée des politiques est nécessaire pour que la mondialisation profite à tous</a:t>
+            <a:t>Growth is broad based; recovery in commodity producers helps the modest global upturn</a:t>
           </a:r>
           <a:endParaRPr lang="en-GB" sz="1600" kern="1200" dirty="0" smtClean="0">
             <a:solidFill>
@@ -4570,7 +4570,7 @@
               </a:solidFill>
               <a:latin typeface="Calibri" panose="020F0502020204030204" pitchFamily="34" charset="0"/>
             </a:rPr>
-            <a:t>Les évolutions de la technologie, des préférences des consommateurs et du commerce surviennent simultanément</a:t>
+            <a:t>Signs of rising demand for high-tech goods and investment to upgrade capital</a:t>
           </a:r>
         </a:p>
       </dsp:txBody>
@@ -4648,7 +4648,7 @@
             <a:rPr lang="en-GB" sz="2000" kern="1200" dirty="0" smtClean="0">
               <a:latin typeface="Calibri" panose="020F0502020204030204" pitchFamily="34" charset="0"/>
             </a:rPr>
-            <a:t>Des conditions de concurrence plus équitables pour le système international</a:t>
+            <a:t>Productivity and wage growth remain subdued; financial stability risks persist</a:t>
           </a:r>
         </a:p>
       </dsp:txBody>
@@ -4715,7 +4715,7 @@
               </a:solidFill>
               <a:latin typeface="Calibri" panose="020F0502020204030204" pitchFamily="34" charset="0"/>
             </a:rPr>
-            <a:t>La confiance s'améliore et l'investissement et le commerce repartent à partir de niveaux faibles</a:t>
+            <a:t>Headline employment indicators are improving but labour markets have not recovered</a:t>
           </a:r>
         </a:p>
         <a:p>
@@ -4740,7 +4740,7 @@
               </a:solidFill>
               <a:latin typeface="Calibri" panose="020F0502020204030204" pitchFamily="34" charset="0"/>
             </a:rPr>
-            <a:t>Signes d'une demande accrue de biens de haute technologie et d'investissements pour moderniser le capital</a:t>
+            <a:t>Financial risks from high and rising credit growth, house price increases, interest rate gaps</a:t>
           </a:r>
           <a:endParaRPr lang="en-GB" sz="1600" kern="1200" dirty="0" smtClean="0">
             <a:solidFill>
@@ -4826,7 +4826,7 @@
             <a:rPr lang="en-GB" sz="2000" kern="1200" dirty="0" smtClean="0">
               <a:latin typeface="Calibri" panose="020F0502020204030204" pitchFamily="34" charset="0"/>
             </a:rPr>
-            <a:t>Réformes intérieures pour stimuler la concurrence, la création d'emplois, les compétences et l'innovation</a:t>
+            <a:t>More needs to be done to share the gains from structural trends and trade</a:t>
           </a:r>
         </a:p>
       </dsp:txBody>
@@ -4893,7 +4893,7 @@
               </a:solidFill>
               <a:latin typeface="Calibri" panose="020F0502020204030204" pitchFamily="34" charset="0"/>
             </a:rPr>
-            <a:t>La croissance de la productivité et des salaires reste modérée ; les risques pour la stabilité financière persistent</a:t>
+            <a:t>Changes to technology, consumer preferences and trade are occurring simultaneously</a:t>
           </a:r>
         </a:p>
         <a:p>
@@ -4918,7 +4918,7 @@
               </a:solidFill>
               <a:latin typeface="Calibri" panose="020F0502020204030204" pitchFamily="34" charset="0"/>
             </a:rPr>
-            <a:t>Les pertes d'emplois dues aux réorientations de l'activité se concentrent dans l'industrie manufacturière et certaines régions</a:t>
+            <a:t>Job losses from shifts in activity are concentrated in manufacturing and specific regions</a:t>
           </a:r>
         </a:p>
       </dsp:txBody>
@@ -4996,7 +4996,7 @@
             <a:rPr lang="en-GB" sz="2000" kern="1200" dirty="0" smtClean="0">
               <a:latin typeface="Calibri" panose="020F0502020204030204" pitchFamily="34" charset="0"/>
             </a:rPr>
-            <a:t>La croissance est généralisée ; la reprise chez les producteurs de matières premières soutient la modeste embellie mondiale</a:t>
+            <a:t>An integrated policy approach is needed to make globalisation work for all</a:t>
           </a:r>
         </a:p>
       </dsp:txBody>
@@ -5063,7 +5063,7 @@
               </a:solidFill>
               <a:latin typeface="Calibri" panose="020F0502020204030204" pitchFamily="34" charset="0"/>
             </a:rPr>
-            <a:t>Les principaux indicateurs de l'emploi s'améliorent, mais les marchés du travail ne se sont pas redressés</a:t>
+            <a:t>A more level playing field for the international system</a:t>
           </a:r>
         </a:p>
         <a:p>
@@ -5088,7 +5088,7 @@
               </a:solidFill>
               <a:latin typeface="Calibri" panose="020F0502020204030204" pitchFamily="34" charset="0"/>
             </a:rPr>
-            <a:t>Risques financiers liés à une croissance du crédit élevée et en hausse, à la hausse des prix de l'immobilier et aux écarts de taux d'intérêt</a:t>
+            <a:t>Domestic reforms to boost competition, job creation, skills and innovation</a:t>
           </a:r>
         </a:p>
         <a:p>
@@ -5113,7 +5113,7 @@
               </a:solidFill>
               <a:latin typeface="Calibri" panose="020F0502020204030204" pitchFamily="34" charset="0"/>
             </a:rPr>
-            <a:t>Des politiques ciblées pour aider les personnes laissées de côté à saisir de nouvelles opportunités</a:t>
+            <a:t>Targeted policies to help people who are left behind seize new opportunities</a:t>
           </a:r>
         </a:p>
       </dsp:txBody>
